--- a/osis_presentation_Ibrahim_SAVADOGO_S3.pptx
+++ b/osis_presentation_Ibrahim_SAVADOGO_S3.pptx
@@ -6570,14 +6570,19 @@
               <a:buNone/>
             </a:pPr>
             <a:r>
-              <a:rPr lang="en-US" sz="1300" b="1" dirty="0">
+              <a:rPr lang="en-US" sz="1600" b="1" dirty="0">
                 <a:solidFill>
                   <a:srgbClr val="FFFFFF"/>
                 </a:solidFill>
+                <a:latin typeface="Times New Roman" panose="02020603050405020304" pitchFamily="18" charset="0"/>
+                <a:cs typeface="Times New Roman" panose="02020603050405020304" pitchFamily="18" charset="0"/>
               </a:rPr>
               <a:t>-&gt;</a:t>
             </a:r>
-            <a:endParaRPr lang="en-US" sz="1300" dirty="0"/>
+            <a:endParaRPr lang="en-US" sz="1600" dirty="0">
+              <a:latin typeface="Times New Roman" panose="02020603050405020304" pitchFamily="18" charset="0"/>
+              <a:cs typeface="Times New Roman" panose="02020603050405020304" pitchFamily="18" charset="0"/>
+            </a:endParaRPr>
           </a:p>
         </p:txBody>
       </p:sp>
@@ -6606,14 +6611,19 @@
               <a:buNone/>
             </a:pPr>
             <a:r>
-              <a:rPr lang="en-US" sz="1300" b="1" dirty="0">
+              <a:rPr lang="en-US" sz="1600" b="1" dirty="0">
                 <a:solidFill>
                   <a:srgbClr val="FFFFFF"/>
                 </a:solidFill>
+                <a:latin typeface="Times New Roman" panose="02020603050405020304" pitchFamily="18" charset="0"/>
+                <a:cs typeface="Times New Roman" panose="02020603050405020304" pitchFamily="18" charset="0"/>
               </a:rPr>
               <a:t>{ corps }</a:t>
             </a:r>
-            <a:endParaRPr lang="en-US" sz="1300" dirty="0"/>
+            <a:endParaRPr lang="en-US" sz="1600" dirty="0">
+              <a:latin typeface="Times New Roman" panose="02020603050405020304" pitchFamily="18" charset="0"/>
+              <a:cs typeface="Times New Roman" panose="02020603050405020304" pitchFamily="18" charset="0"/>
+            </a:endParaRPr>
           </a:p>
         </p:txBody>
       </p:sp>
@@ -6754,7 +6764,7 @@
               <a:buNone/>
             </a:pPr>
             <a:r>
-              <a:rPr lang="en-US" sz="1400" b="1" dirty="0">
+              <a:rPr lang="en-US" sz="1600" b="1" dirty="0">
                 <a:solidFill>
                   <a:srgbClr val="0A1628"/>
                 </a:solidFill>
@@ -6764,7 +6774,7 @@
               </a:rPr>
               <a:t>Évolution de la syntaxe :</a:t>
             </a:r>
-            <a:endParaRPr lang="en-US" sz="1400" dirty="0">
+            <a:endParaRPr lang="en-US" sz="1600" dirty="0">
               <a:latin typeface="Times New Roman" panose="02020603050405020304" pitchFamily="18" charset="0"/>
               <a:cs typeface="Times New Roman" panose="02020603050405020304" pitchFamily="18" charset="0"/>
             </a:endParaRPr>
@@ -6786,7 +6796,7 @@
             <a:avLst/>
           </a:prstGeom>
           <a:solidFill>
-            <a:srgbClr val="FADBD8"/>
+            <a:schemeClr val="bg1"/>
           </a:solidFill>
           <a:ln w="12700">
             <a:solidFill>
@@ -6821,17 +6831,12 @@
               <a:buNone/>
             </a:pPr>
             <a:r>
-              <a:rPr lang="en-US" sz="1100" b="1" dirty="0">
-                <a:solidFill>
-                  <a:srgbClr val="C0392B"/>
-                </a:solidFill>
-                <a:latin typeface="Calibri" pitchFamily="34" charset="0"/>
-                <a:ea typeface="Calibri" pitchFamily="34" charset="-122"/>
-                <a:cs typeface="Calibri" pitchFamily="34" charset="-120"/>
+              <a:rPr lang="en-US" sz="1600" dirty="0">
+                <a:latin typeface="Times New Roman" panose="02020603050405020304" pitchFamily="18" charset="0"/>
+                <a:cs typeface="Times New Roman" panose="02020603050405020304" pitchFamily="18" charset="0"/>
               </a:rPr>
               <a:t>❌ Avant Java 8 — Classe Anonyme</a:t>
             </a:r>
-            <a:endParaRPr lang="en-US" sz="1100" dirty="0"/>
           </a:p>
         </p:txBody>
       </p:sp>
@@ -6850,7 +6855,7 @@
             <a:avLst/>
           </a:prstGeom>
           <a:solidFill>
-            <a:srgbClr val="1E1E2E"/>
+            <a:schemeClr val="bg1"/>
           </a:solidFill>
           <a:ln/>
         </p:spPr>
@@ -6880,17 +6885,12 @@
               <a:buNone/>
             </a:pPr>
             <a:r>
-              <a:rPr lang="en-US" sz="1100" dirty="0">
-                <a:solidFill>
-                  <a:srgbClr val="4EC9B0"/>
-                </a:solidFill>
-                <a:latin typeface="Consolas" pitchFamily="34" charset="0"/>
-                <a:ea typeface="Consolas" pitchFamily="34" charset="-122"/>
-                <a:cs typeface="Consolas" pitchFamily="34" charset="-120"/>
+              <a:rPr lang="en-US" sz="1600" dirty="0">
+                <a:latin typeface="Times New Roman" panose="02020603050405020304" pitchFamily="18" charset="0"/>
+                <a:cs typeface="Times New Roman" panose="02020603050405020304" pitchFamily="18" charset="0"/>
               </a:rPr>
               <a:t>Runnable r = new Runnable() {</a:t>
             </a:r>
-            <a:endParaRPr lang="en-US" sz="1100" dirty="0"/>
           </a:p>
         </p:txBody>
       </p:sp>
@@ -6919,17 +6919,12 @@
               <a:buNone/>
             </a:pPr>
             <a:r>
-              <a:rPr lang="en-US" sz="1100" dirty="0">
-                <a:solidFill>
-                  <a:srgbClr val="C586C0"/>
-                </a:solidFill>
-                <a:latin typeface="Consolas" pitchFamily="34" charset="0"/>
-                <a:ea typeface="Consolas" pitchFamily="34" charset="-122"/>
-                <a:cs typeface="Consolas" pitchFamily="34" charset="-120"/>
+              <a:rPr lang="en-US" sz="1600" dirty="0">
+                <a:latin typeface="Times New Roman" panose="02020603050405020304" pitchFamily="18" charset="0"/>
+                <a:cs typeface="Times New Roman" panose="02020603050405020304" pitchFamily="18" charset="0"/>
               </a:rPr>
               <a:t>    @Override</a:t>
             </a:r>
-            <a:endParaRPr lang="en-US" sz="1100" dirty="0"/>
           </a:p>
         </p:txBody>
       </p:sp>
@@ -6958,17 +6953,12 @@
               <a:buNone/>
             </a:pPr>
             <a:r>
-              <a:rPr lang="en-US" sz="1100" dirty="0">
-                <a:solidFill>
-                  <a:srgbClr val="DCDCAA"/>
-                </a:solidFill>
-                <a:latin typeface="Consolas" pitchFamily="34" charset="0"/>
-                <a:ea typeface="Consolas" pitchFamily="34" charset="-122"/>
-                <a:cs typeface="Consolas" pitchFamily="34" charset="-120"/>
+              <a:rPr lang="en-US" sz="1600" dirty="0">
+                <a:latin typeface="Times New Roman" panose="02020603050405020304" pitchFamily="18" charset="0"/>
+                <a:cs typeface="Times New Roman" panose="02020603050405020304" pitchFamily="18" charset="0"/>
               </a:rPr>
               <a:t>    public void run() {</a:t>
             </a:r>
-            <a:endParaRPr lang="en-US" sz="1100" dirty="0"/>
           </a:p>
         </p:txBody>
       </p:sp>
@@ -6997,17 +6987,12 @@
               <a:buNone/>
             </a:pPr>
             <a:r>
-              <a:rPr lang="en-US" sz="1100" dirty="0">
-                <a:solidFill>
-                  <a:srgbClr val="D4D4D4"/>
-                </a:solidFill>
-                <a:latin typeface="Consolas" pitchFamily="34" charset="0"/>
-                <a:ea typeface="Consolas" pitchFamily="34" charset="-122"/>
-                <a:cs typeface="Consolas" pitchFamily="34" charset="-120"/>
+              <a:rPr lang="en-US" sz="1600" dirty="0">
+                <a:latin typeface="Times New Roman" panose="02020603050405020304" pitchFamily="18" charset="0"/>
+                <a:cs typeface="Times New Roman" panose="02020603050405020304" pitchFamily="18" charset="0"/>
               </a:rPr>
               <a:t>        System.out.println("Bonjour!");</a:t>
             </a:r>
-            <a:endParaRPr lang="en-US" sz="1100" dirty="0"/>
           </a:p>
         </p:txBody>
       </p:sp>
@@ -7036,17 +7021,12 @@
               <a:buNone/>
             </a:pPr>
             <a:r>
-              <a:rPr lang="en-US" sz="1100" dirty="0">
-                <a:solidFill>
-                  <a:srgbClr val="D4D4D4"/>
-                </a:solidFill>
-                <a:latin typeface="Consolas" pitchFamily="34" charset="0"/>
-                <a:ea typeface="Consolas" pitchFamily="34" charset="-122"/>
-                <a:cs typeface="Consolas" pitchFamily="34" charset="-120"/>
+              <a:rPr lang="en-US" sz="1600" dirty="0">
+                <a:latin typeface="Times New Roman" panose="02020603050405020304" pitchFamily="18" charset="0"/>
+                <a:cs typeface="Times New Roman" panose="02020603050405020304" pitchFamily="18" charset="0"/>
               </a:rPr>
               <a:t>    }</a:t>
             </a:r>
-            <a:endParaRPr lang="en-US" sz="1100" dirty="0"/>
           </a:p>
         </p:txBody>
       </p:sp>
@@ -7075,17 +7055,12 @@
               <a:buNone/>
             </a:pPr>
             <a:r>
-              <a:rPr lang="en-US" sz="1100" dirty="0">
-                <a:solidFill>
-                  <a:srgbClr val="4EC9B0"/>
-                </a:solidFill>
-                <a:latin typeface="Consolas" pitchFamily="34" charset="0"/>
-                <a:ea typeface="Consolas" pitchFamily="34" charset="-122"/>
-                <a:cs typeface="Consolas" pitchFamily="34" charset="-120"/>
+              <a:rPr lang="en-US" sz="1600" dirty="0">
+                <a:latin typeface="Times New Roman" panose="02020603050405020304" pitchFamily="18" charset="0"/>
+                <a:cs typeface="Times New Roman" panose="02020603050405020304" pitchFamily="18" charset="0"/>
               </a:rPr>
               <a:t>};</a:t>
             </a:r>
-            <a:endParaRPr lang="en-US" sz="1100" dirty="0"/>
           </a:p>
         </p:txBody>
       </p:sp>
@@ -7104,7 +7079,7 @@
             <a:avLst/>
           </a:prstGeom>
           <a:solidFill>
-            <a:srgbClr val="D5F5E3"/>
+            <a:schemeClr val="bg1"/>
           </a:solidFill>
           <a:ln w="12700">
             <a:solidFill>
@@ -7139,17 +7114,20 @@
               <a:buNone/>
             </a:pPr>
             <a:r>
-              <a:rPr lang="en-US" sz="1100" b="1" dirty="0">
+              <a:rPr lang="en-US" sz="1200" b="1" dirty="0">
                 <a:solidFill>
                   <a:srgbClr val="27AE60"/>
                 </a:solidFill>
-                <a:latin typeface="Calibri" pitchFamily="34" charset="0"/>
+                <a:latin typeface="Times New Roman" panose="02020603050405020304" pitchFamily="18" charset="0"/>
                 <a:ea typeface="Calibri" pitchFamily="34" charset="-122"/>
-                <a:cs typeface="Calibri" pitchFamily="34" charset="-120"/>
+                <a:cs typeface="Times New Roman" panose="02020603050405020304" pitchFamily="18" charset="0"/>
               </a:rPr>
               <a:t>✅ Java 8+ — Lambda Expression</a:t>
             </a:r>
-            <a:endParaRPr lang="en-US" sz="1100" dirty="0"/>
+            <a:endParaRPr lang="en-US" sz="1200" dirty="0">
+              <a:latin typeface="Times New Roman" panose="02020603050405020304" pitchFamily="18" charset="0"/>
+              <a:cs typeface="Times New Roman" panose="02020603050405020304" pitchFamily="18" charset="0"/>
+            </a:endParaRPr>
           </a:p>
         </p:txBody>
       </p:sp>
@@ -7162,172 +7140,16 @@
         <p:spPr>
           <a:xfrm>
             <a:off x="4727721" y="2937965"/>
-            <a:ext cx="4206240" cy="2651760"/>
+            <a:ext cx="4206240" cy="767514"/>
           </a:xfrm>
           <a:prstGeom prst="rect">
             <a:avLst/>
           </a:prstGeom>
           <a:solidFill>
-            <a:srgbClr val="0D1F0D"/>
+            <a:schemeClr val="bg1"/>
           </a:solidFill>
           <a:ln/>
         </p:spPr>
-      </p:sp>
-      <p:sp>
-        <p:nvSpPr>
-          <p:cNvPr id="124" name="Text 18"/>
-          <p:cNvSpPr/>
-          <p:nvPr/>
-        </p:nvSpPr>
-        <p:spPr>
-          <a:xfrm>
-            <a:off x="4837449" y="3029405"/>
-            <a:ext cx="3977640" cy="274320"/>
-          </a:xfrm>
-          <a:prstGeom prst="rect">
-            <a:avLst/>
-          </a:prstGeom>
-          <a:noFill/>
-          <a:ln/>
-        </p:spPr>
-        <p:txBody>
-          <a:bodyPr wrap="square" lIns="0" tIns="0" rIns="0" bIns="0" rtlCol="0" anchor="ctr"/>
-          <a:lstStyle/>
-          <a:p>
-            <a:pPr marL="0" indent="0">
-              <a:buNone/>
-            </a:pPr>
-            <a:r>
-              <a:rPr lang="en-US" sz="1100" dirty="0">
-                <a:solidFill>
-                  <a:srgbClr val="6A9955"/>
-                </a:solidFill>
-                <a:latin typeface="Consolas" pitchFamily="34" charset="0"/>
-                <a:ea typeface="Consolas" pitchFamily="34" charset="-122"/>
-                <a:cs typeface="Consolas" pitchFamily="34" charset="-120"/>
-              </a:rPr>
-              <a:t>// Syntaxe complète</a:t>
-            </a:r>
-            <a:endParaRPr lang="en-US" sz="1100" dirty="0"/>
-          </a:p>
-        </p:txBody>
-      </p:sp>
-      <p:sp>
-        <p:nvSpPr>
-          <p:cNvPr id="125" name="Text 19"/>
-          <p:cNvSpPr/>
-          <p:nvPr/>
-        </p:nvSpPr>
-        <p:spPr>
-          <a:xfrm>
-            <a:off x="4837449" y="3331157"/>
-            <a:ext cx="3977640" cy="274320"/>
-          </a:xfrm>
-          <a:prstGeom prst="rect">
-            <a:avLst/>
-          </a:prstGeom>
-          <a:noFill/>
-          <a:ln/>
-        </p:spPr>
-        <p:txBody>
-          <a:bodyPr wrap="square" lIns="0" tIns="0" rIns="0" bIns="0" rtlCol="0" anchor="ctr"/>
-          <a:lstStyle/>
-          <a:p>
-            <a:pPr marL="0" indent="0">
-              <a:buNone/>
-            </a:pPr>
-            <a:r>
-              <a:rPr lang="en-US" sz="1100" dirty="0">
-                <a:solidFill>
-                  <a:srgbClr val="4EC9B0"/>
-                </a:solidFill>
-                <a:latin typeface="Consolas" pitchFamily="34" charset="0"/>
-                <a:ea typeface="Consolas" pitchFamily="34" charset="-122"/>
-                <a:cs typeface="Consolas" pitchFamily="34" charset="-120"/>
-              </a:rPr>
-              <a:t>Runnable r = () -&gt; {</a:t>
-            </a:r>
-            <a:endParaRPr lang="en-US" sz="1100" dirty="0"/>
-          </a:p>
-        </p:txBody>
-      </p:sp>
-      <p:sp>
-        <p:nvSpPr>
-          <p:cNvPr id="126" name="Text 20"/>
-          <p:cNvSpPr/>
-          <p:nvPr/>
-        </p:nvSpPr>
-        <p:spPr>
-          <a:xfrm>
-            <a:off x="4837449" y="3632909"/>
-            <a:ext cx="3977640" cy="274320"/>
-          </a:xfrm>
-          <a:prstGeom prst="rect">
-            <a:avLst/>
-          </a:prstGeom>
-          <a:noFill/>
-          <a:ln/>
-        </p:spPr>
-        <p:txBody>
-          <a:bodyPr wrap="square" lIns="0" tIns="0" rIns="0" bIns="0" rtlCol="0" anchor="ctr"/>
-          <a:lstStyle/>
-          <a:p>
-            <a:pPr marL="0" indent="0">
-              <a:buNone/>
-            </a:pPr>
-            <a:r>
-              <a:rPr lang="en-US" sz="1100" dirty="0">
-                <a:solidFill>
-                  <a:srgbClr val="D4D4D4"/>
-                </a:solidFill>
-                <a:latin typeface="Consolas" pitchFamily="34" charset="0"/>
-                <a:ea typeface="Consolas" pitchFamily="34" charset="-122"/>
-                <a:cs typeface="Consolas" pitchFamily="34" charset="-120"/>
-              </a:rPr>
-              <a:t>    System.out.println("Bonjour!");</a:t>
-            </a:r>
-            <a:endParaRPr lang="en-US" sz="1100" dirty="0"/>
-          </a:p>
-        </p:txBody>
-      </p:sp>
-      <p:sp>
-        <p:nvSpPr>
-          <p:cNvPr id="127" name="Text 21"/>
-          <p:cNvSpPr/>
-          <p:nvPr/>
-        </p:nvSpPr>
-        <p:spPr>
-          <a:xfrm>
-            <a:off x="4837449" y="3934661"/>
-            <a:ext cx="3977640" cy="274320"/>
-          </a:xfrm>
-          <a:prstGeom prst="rect">
-            <a:avLst/>
-          </a:prstGeom>
-          <a:noFill/>
-          <a:ln/>
-        </p:spPr>
-        <p:txBody>
-          <a:bodyPr wrap="square" lIns="0" tIns="0" rIns="0" bIns="0" rtlCol="0" anchor="ctr"/>
-          <a:lstStyle/>
-          <a:p>
-            <a:pPr marL="0" indent="0">
-              <a:buNone/>
-            </a:pPr>
-            <a:r>
-              <a:rPr lang="en-US" sz="1100" dirty="0">
-                <a:solidFill>
-                  <a:srgbClr val="4EC9B0"/>
-                </a:solidFill>
-                <a:latin typeface="Consolas" pitchFamily="34" charset="0"/>
-                <a:ea typeface="Consolas" pitchFamily="34" charset="-122"/>
-                <a:cs typeface="Consolas" pitchFamily="34" charset="-120"/>
-              </a:rPr>
-              <a:t>};</a:t>
-            </a:r>
-            <a:endParaRPr lang="en-US" sz="1100" dirty="0"/>
-          </a:p>
-        </p:txBody>
       </p:sp>
       <p:sp>
         <p:nvSpPr>
@@ -7353,20 +7175,23 @@
             <a:pPr marL="0" indent="0">
               <a:buNone/>
             </a:pPr>
-            <a:endParaRPr lang="en-US" sz="1100" dirty="0"/>
-          </a:p>
-        </p:txBody>
-      </p:sp>
-      <p:sp>
-        <p:nvSpPr>
-          <p:cNvPr id="129" name="Text 23"/>
-          <p:cNvSpPr/>
-          <p:nvPr/>
-        </p:nvSpPr>
-        <p:spPr>
-          <a:xfrm>
-            <a:off x="4837449" y="4538165"/>
-            <a:ext cx="3977640" cy="274320"/>
+            <a:endParaRPr lang="en-US" sz="1600" dirty="0">
+              <a:latin typeface="Times New Roman" panose="02020603050405020304" pitchFamily="18" charset="0"/>
+              <a:cs typeface="Times New Roman" panose="02020603050405020304" pitchFamily="18" charset="0"/>
+            </a:endParaRPr>
+          </a:p>
+        </p:txBody>
+      </p:sp>
+      <p:sp>
+        <p:nvSpPr>
+          <p:cNvPr id="130" name="Text 24"/>
+          <p:cNvSpPr/>
+          <p:nvPr/>
+        </p:nvSpPr>
+        <p:spPr>
+          <a:xfrm>
+            <a:off x="4748107" y="4041323"/>
+            <a:ext cx="4545375" cy="156030"/>
           </a:xfrm>
           <a:prstGeom prst="rect">
             <a:avLst/>
@@ -7382,56 +7207,45 @@
               <a:buNone/>
             </a:pPr>
             <a:r>
-              <a:rPr lang="en-US" sz="1100" dirty="0">
-                <a:solidFill>
-                  <a:srgbClr val="6A9955"/>
-                </a:solidFill>
-                <a:latin typeface="Consolas" pitchFamily="34" charset="0"/>
+              <a:rPr lang="en-US" sz="1600" dirty="0" smtClean="0">
+                <a:solidFill>
+                  <a:srgbClr val="FF0000"/>
+                </a:solidFill>
+                <a:latin typeface="Times New Roman" panose="02020603050405020304" pitchFamily="18" charset="0"/>
                 <a:ea typeface="Consolas" pitchFamily="34" charset="-122"/>
-                <a:cs typeface="Consolas" pitchFamily="34" charset="-120"/>
-              </a:rPr>
-              <a:t>// Syntaxe courte (1 instruction)</a:t>
-            </a:r>
-            <a:endParaRPr lang="en-US" sz="1100" dirty="0"/>
-          </a:p>
-        </p:txBody>
-      </p:sp>
-      <p:sp>
-        <p:nvSpPr>
-          <p:cNvPr id="130" name="Text 24"/>
-          <p:cNvSpPr/>
-          <p:nvPr/>
-        </p:nvSpPr>
-        <p:spPr>
-          <a:xfrm>
-            <a:off x="4837449" y="4839917"/>
-            <a:ext cx="3977640" cy="274320"/>
-          </a:xfrm>
-          <a:prstGeom prst="rect">
-            <a:avLst/>
-          </a:prstGeom>
-          <a:noFill/>
-          <a:ln/>
-        </p:spPr>
-        <p:txBody>
-          <a:bodyPr wrap="square" lIns="0" tIns="0" rIns="0" bIns="0" rtlCol="0" anchor="ctr"/>
-          <a:lstStyle/>
-          <a:p>
-            <a:pPr marL="0" indent="0">
-              <a:buNone/>
-            </a:pPr>
-            <a:r>
-              <a:rPr lang="en-US" sz="1100" dirty="0">
-                <a:solidFill>
-                  <a:srgbClr val="4EC9B0"/>
-                </a:solidFill>
-                <a:latin typeface="Consolas" pitchFamily="34" charset="0"/>
+                <a:cs typeface="Times New Roman" panose="02020603050405020304" pitchFamily="18" charset="0"/>
+              </a:rPr>
+              <a:t>Runnable r2 = () -&gt; </a:t>
+            </a:r>
+            <a:r>
+              <a:rPr lang="en-US" sz="1600" dirty="0" err="1" smtClean="0">
+                <a:solidFill>
+                  <a:srgbClr val="FF0000"/>
+                </a:solidFill>
+                <a:latin typeface="Times New Roman" panose="02020603050405020304" pitchFamily="18" charset="0"/>
                 <a:ea typeface="Consolas" pitchFamily="34" charset="-122"/>
-                <a:cs typeface="Consolas" pitchFamily="34" charset="-120"/>
-              </a:rPr>
-              <a:t>Runnable r2 = () -&gt; System.out.println("Bonjour!");</a:t>
-            </a:r>
-            <a:endParaRPr lang="en-US" sz="1100" dirty="0"/>
+                <a:cs typeface="Times New Roman" panose="02020603050405020304" pitchFamily="18" charset="0"/>
+              </a:rPr>
+              <a:t>System.out.println</a:t>
+            </a:r>
+            <a:r>
+              <a:rPr lang="en-US" sz="1600" dirty="0" smtClean="0">
+                <a:solidFill>
+                  <a:srgbClr val="FF0000"/>
+                </a:solidFill>
+                <a:latin typeface="Times New Roman" panose="02020603050405020304" pitchFamily="18" charset="0"/>
+                <a:ea typeface="Consolas" pitchFamily="34" charset="-122"/>
+                <a:cs typeface="Times New Roman" panose="02020603050405020304" pitchFamily="18" charset="0"/>
+              </a:rPr>
+              <a:t>("Bonjour!");</a:t>
+            </a:r>
+            <a:endParaRPr lang="en-US" sz="1600" dirty="0">
+              <a:solidFill>
+                <a:srgbClr val="FF0000"/>
+              </a:solidFill>
+              <a:latin typeface="Times New Roman" panose="02020603050405020304" pitchFamily="18" charset="0"/>
+              <a:cs typeface="Times New Roman" panose="02020603050405020304" pitchFamily="18" charset="0"/>
+            </a:endParaRPr>
           </a:p>
         </p:txBody>
       </p:sp>
@@ -7685,7 +7499,7 @@
             <a:avLst/>
           </a:prstGeom>
           <a:solidFill>
-            <a:srgbClr val="0D1F0D"/>
+            <a:schemeClr val="bg1"/>
           </a:solidFill>
           <a:ln/>
         </p:spPr>
@@ -11860,7 +11674,7 @@
         </p:nvSpPr>
         <p:spPr>
           <a:xfrm>
-            <a:off x="295497" y="1266428"/>
+            <a:off x="250626" y="1045074"/>
             <a:ext cx="8595360" cy="502920"/>
           </a:xfrm>
           <a:prstGeom prst="rect">
@@ -11871,6 +11685,13 @@
           </a:solidFill>
           <a:ln/>
         </p:spPr>
+        <p:txBody>
+          <a:bodyPr/>
+          <a:lstStyle/>
+          <a:p>
+            <a:endParaRPr lang="en-US"/>
+          </a:p>
+        </p:txBody>
       </p:sp>
       <p:sp>
         <p:nvSpPr>
@@ -11880,8 +11701,8 @@
         </p:nvSpPr>
         <p:spPr>
           <a:xfrm>
-            <a:off x="533609" y="1254154"/>
-            <a:ext cx="8229600" cy="502920"/>
+            <a:off x="592705" y="945772"/>
+            <a:ext cx="8229600" cy="641312"/>
           </a:xfrm>
           <a:prstGeom prst="rect">
             <a:avLst/>
@@ -11954,10 +11775,17 @@
             <a:avLst/>
           </a:prstGeom>
           <a:solidFill>
-            <a:srgbClr val="0A1628"/>
+            <a:schemeClr val="bg1"/>
           </a:solidFill>
           <a:ln/>
         </p:spPr>
+        <p:txBody>
+          <a:bodyPr/>
+          <a:lstStyle/>
+          <a:p>
+            <a:endParaRPr lang="en-US"/>
+          </a:p>
+        </p:txBody>
       </p:sp>
       <p:sp>
         <p:nvSpPr>
@@ -11984,7 +11812,7 @@
               <a:buNone/>
             </a:pPr>
             <a:r>
-              <a:rPr lang="en-US" sz="1200" dirty="0">
+              <a:rPr lang="en-US" sz="1200" b="1" dirty="0">
                 <a:solidFill>
                   <a:srgbClr val="6A9955"/>
                 </a:solidFill>
@@ -11994,7 +11822,7 @@
               </a:rPr>
               <a:t>// Modèle</a:t>
             </a:r>
-            <a:endParaRPr lang="en-US" sz="1200" dirty="0"/>
+            <a:endParaRPr lang="en-US" sz="1200" b="1" dirty="0"/>
           </a:p>
         </p:txBody>
       </p:sp>
@@ -12023,7 +11851,7 @@
               <a:buNone/>
             </a:pPr>
             <a:r>
-              <a:rPr lang="en-US" sz="1200" dirty="0">
+              <a:rPr lang="en-US" sz="1200" b="1" dirty="0">
                 <a:solidFill>
                   <a:srgbClr val="4EC9B0"/>
                 </a:solidFill>
@@ -12033,7 +11861,7 @@
               </a:rPr>
               <a:t>class Employe {</a:t>
             </a:r>
-            <a:endParaRPr lang="en-US" sz="1200" dirty="0"/>
+            <a:endParaRPr lang="en-US" sz="1200" b="1" dirty="0"/>
           </a:p>
         </p:txBody>
       </p:sp>
@@ -12062,7 +11890,7 @@
               <a:buNone/>
             </a:pPr>
             <a:r>
-              <a:rPr lang="en-US" sz="1200" dirty="0">
+              <a:rPr lang="en-US" sz="1200" b="1" dirty="0">
                 <a:solidFill>
                   <a:srgbClr val="9CDCFE"/>
                 </a:solidFill>
@@ -12070,60 +11898,36 @@
                 <a:ea typeface="Consolas" pitchFamily="34" charset="-122"/>
                 <a:cs typeface="Consolas" pitchFamily="34" charset="-120"/>
               </a:rPr>
-              <a:t>    String nom;</a:t>
-            </a:r>
-            <a:endParaRPr lang="en-US" sz="1200" dirty="0"/>
-          </a:p>
-        </p:txBody>
-      </p:sp>
-      <p:sp>
-        <p:nvSpPr>
-          <p:cNvPr id="196" name="Text 8"/>
-          <p:cNvSpPr/>
-          <p:nvPr/>
-        </p:nvSpPr>
-        <p:spPr>
-          <a:xfrm>
-            <a:off x="473833" y="2720658"/>
-            <a:ext cx="5029200" cy="182880"/>
-          </a:xfrm>
-          <a:prstGeom prst="rect">
-            <a:avLst/>
-          </a:prstGeom>
-          <a:noFill/>
-          <a:ln/>
-        </p:spPr>
-        <p:txBody>
-          <a:bodyPr wrap="square" lIns="0" tIns="0" rIns="0" bIns="0" rtlCol="0" anchor="ctr"/>
-          <a:lstStyle/>
-          <a:p>
-            <a:pPr marL="0" indent="0">
-              <a:buNone/>
-            </a:pPr>
-            <a:r>
-              <a:rPr lang="en-US" sz="1200" dirty="0">
-                <a:solidFill>
-                  <a:srgbClr val="9CDCFE"/>
+              <a:t>    </a:t>
+            </a:r>
+            <a:r>
+              <a:rPr lang="en-US" sz="1200" b="1" dirty="0">
+                <a:solidFill>
+                  <a:srgbClr val="FF0000"/>
                 </a:solidFill>
                 <a:latin typeface="Consolas" pitchFamily="34" charset="0"/>
                 <a:ea typeface="Consolas" pitchFamily="34" charset="-122"/>
                 <a:cs typeface="Consolas" pitchFamily="34" charset="-120"/>
               </a:rPr>
-              <a:t>    double salaire;</a:t>
-            </a:r>
-            <a:endParaRPr lang="en-US" sz="1200" dirty="0"/>
-          </a:p>
-        </p:txBody>
-      </p:sp>
-      <p:sp>
-        <p:nvSpPr>
-          <p:cNvPr id="197" name="Text 9"/>
-          <p:cNvSpPr/>
-          <p:nvPr/>
-        </p:nvSpPr>
-        <p:spPr>
-          <a:xfrm>
-            <a:off x="473833" y="2894394"/>
+              <a:t>String nom;</a:t>
+            </a:r>
+            <a:endParaRPr lang="en-US" sz="1200" b="1" dirty="0">
+              <a:solidFill>
+                <a:srgbClr val="FF0000"/>
+              </a:solidFill>
+            </a:endParaRPr>
+          </a:p>
+        </p:txBody>
+      </p:sp>
+      <p:sp>
+        <p:nvSpPr>
+          <p:cNvPr id="196" name="Text 8"/>
+          <p:cNvSpPr/>
+          <p:nvPr/>
+        </p:nvSpPr>
+        <p:spPr>
+          <a:xfrm>
+            <a:off x="473833" y="2720658"/>
             <a:ext cx="5029200" cy="182880"/>
           </a:xfrm>
           <a:prstGeom prst="rect">
@@ -12140,7 +11944,7 @@
               <a:buNone/>
             </a:pPr>
             <a:r>
-              <a:rPr lang="en-US" sz="1200" dirty="0">
+              <a:rPr lang="en-US" sz="1200" b="1" dirty="0">
                 <a:solidFill>
                   <a:srgbClr val="9CDCFE"/>
                 </a:solidFill>
@@ -12148,60 +11952,36 @@
                 <a:ea typeface="Consolas" pitchFamily="34" charset="-122"/>
                 <a:cs typeface="Consolas" pitchFamily="34" charset="-120"/>
               </a:rPr>
-              <a:t>    String departement;</a:t>
-            </a:r>
-            <a:endParaRPr lang="en-US" sz="1200" dirty="0"/>
-          </a:p>
-        </p:txBody>
-      </p:sp>
-      <p:sp>
-        <p:nvSpPr>
-          <p:cNvPr id="198" name="Text 10"/>
-          <p:cNvSpPr/>
-          <p:nvPr/>
-        </p:nvSpPr>
-        <p:spPr>
-          <a:xfrm>
-            <a:off x="473833" y="3068130"/>
-            <a:ext cx="5029200" cy="182880"/>
-          </a:xfrm>
-          <a:prstGeom prst="rect">
-            <a:avLst/>
-          </a:prstGeom>
-          <a:noFill/>
-          <a:ln/>
-        </p:spPr>
-        <p:txBody>
-          <a:bodyPr wrap="square" lIns="0" tIns="0" rIns="0" bIns="0" rtlCol="0" anchor="ctr"/>
-          <a:lstStyle/>
-          <a:p>
-            <a:pPr marL="0" indent="0">
-              <a:buNone/>
-            </a:pPr>
-            <a:r>
-              <a:rPr lang="en-US" sz="1200" dirty="0">
-                <a:solidFill>
-                  <a:srgbClr val="4EC9B0"/>
+              <a:t>    </a:t>
+            </a:r>
+            <a:r>
+              <a:rPr lang="en-US" sz="1200" b="1" dirty="0">
+                <a:solidFill>
+                  <a:srgbClr val="FF0000"/>
                 </a:solidFill>
                 <a:latin typeface="Consolas" pitchFamily="34" charset="0"/>
                 <a:ea typeface="Consolas" pitchFamily="34" charset="-122"/>
                 <a:cs typeface="Consolas" pitchFamily="34" charset="-120"/>
               </a:rPr>
-              <a:t>}</a:t>
-            </a:r>
-            <a:endParaRPr lang="en-US" sz="1200" dirty="0"/>
-          </a:p>
-        </p:txBody>
-      </p:sp>
-      <p:sp>
-        <p:nvSpPr>
-          <p:cNvPr id="199" name="Text 11"/>
-          <p:cNvSpPr/>
-          <p:nvPr/>
-        </p:nvSpPr>
-        <p:spPr>
-          <a:xfrm>
-            <a:off x="473833" y="3241866"/>
+              <a:t>double salaire;</a:t>
+            </a:r>
+            <a:endParaRPr lang="en-US" sz="1200" b="1" dirty="0">
+              <a:solidFill>
+                <a:srgbClr val="FF0000"/>
+              </a:solidFill>
+            </a:endParaRPr>
+          </a:p>
+        </p:txBody>
+      </p:sp>
+      <p:sp>
+        <p:nvSpPr>
+          <p:cNvPr id="197" name="Text 9"/>
+          <p:cNvSpPr/>
+          <p:nvPr/>
+        </p:nvSpPr>
+        <p:spPr>
+          <a:xfrm>
+            <a:off x="473833" y="2894394"/>
             <a:ext cx="5029200" cy="182880"/>
           </a:xfrm>
           <a:prstGeom prst="rect">
@@ -12217,97 +11997,45 @@
             <a:pPr marL="0" indent="0">
               <a:buNone/>
             </a:pPr>
-            <a:endParaRPr lang="en-US" sz="1200" dirty="0"/>
-          </a:p>
-        </p:txBody>
-      </p:sp>
-      <p:sp>
-        <p:nvSpPr>
-          <p:cNvPr id="200" name="Text 12"/>
-          <p:cNvSpPr/>
-          <p:nvPr/>
-        </p:nvSpPr>
-        <p:spPr>
-          <a:xfrm>
-            <a:off x="473833" y="3415602"/>
-            <a:ext cx="5029200" cy="182880"/>
-          </a:xfrm>
-          <a:prstGeom prst="rect">
-            <a:avLst/>
-          </a:prstGeom>
-          <a:noFill/>
-          <a:ln/>
-        </p:spPr>
-        <p:txBody>
-          <a:bodyPr wrap="square" lIns="0" tIns="0" rIns="0" bIns="0" rtlCol="0" anchor="ctr"/>
-          <a:lstStyle/>
-          <a:p>
-            <a:pPr marL="0" indent="0">
-              <a:buNone/>
-            </a:pPr>
-            <a:r>
-              <a:rPr lang="en-US" sz="1200" dirty="0">
-                <a:solidFill>
-                  <a:srgbClr val="6A9955"/>
+            <a:r>
+              <a:rPr lang="en-US" sz="1200" b="1" dirty="0">
+                <a:solidFill>
+                  <a:srgbClr val="9CDCFE"/>
                 </a:solidFill>
                 <a:latin typeface="Consolas" pitchFamily="34" charset="0"/>
                 <a:ea typeface="Consolas" pitchFamily="34" charset="-122"/>
                 <a:cs typeface="Consolas" pitchFamily="34" charset="-120"/>
               </a:rPr>
-              <a:t>// Traitement avec Lambda + Stream</a:t>
-            </a:r>
-            <a:endParaRPr lang="en-US" sz="1200" dirty="0"/>
-          </a:p>
-        </p:txBody>
-      </p:sp>
-      <p:sp>
-        <p:nvSpPr>
-          <p:cNvPr id="201" name="Text 13"/>
-          <p:cNvSpPr/>
-          <p:nvPr/>
-        </p:nvSpPr>
-        <p:spPr>
-          <a:xfrm>
-            <a:off x="473833" y="3589338"/>
-            <a:ext cx="5029200" cy="182880"/>
-          </a:xfrm>
-          <a:prstGeom prst="rect">
-            <a:avLst/>
-          </a:prstGeom>
-          <a:noFill/>
-          <a:ln/>
-        </p:spPr>
-        <p:txBody>
-          <a:bodyPr wrap="square" lIns="0" tIns="0" rIns="0" bIns="0" rtlCol="0" anchor="ctr"/>
-          <a:lstStyle/>
-          <a:p>
-            <a:pPr marL="0" indent="0">
-              <a:buNone/>
-            </a:pPr>
-            <a:r>
-              <a:rPr lang="en-US" sz="1200" dirty="0">
-                <a:solidFill>
-                  <a:srgbClr val="D4D4D4"/>
+              <a:t>    </a:t>
+            </a:r>
+            <a:r>
+              <a:rPr lang="en-US" sz="1200" b="1" dirty="0">
+                <a:solidFill>
+                  <a:srgbClr val="FF0000"/>
                 </a:solidFill>
                 <a:latin typeface="Consolas" pitchFamily="34" charset="0"/>
                 <a:ea typeface="Consolas" pitchFamily="34" charset="-122"/>
                 <a:cs typeface="Consolas" pitchFamily="34" charset="-120"/>
               </a:rPr>
-              <a:t>List&lt;String&gt; nomsSeniors = employes</a:t>
-            </a:r>
-            <a:endParaRPr lang="en-US" sz="1200" dirty="0"/>
-          </a:p>
-        </p:txBody>
-      </p:sp>
-      <p:sp>
-        <p:nvSpPr>
-          <p:cNvPr id="202" name="Text 14"/>
-          <p:cNvSpPr/>
-          <p:nvPr/>
-        </p:nvSpPr>
-        <p:spPr>
-          <a:xfrm>
-            <a:off x="473833" y="3763074"/>
+              <a:t>String departement;</a:t>
+            </a:r>
+            <a:endParaRPr lang="en-US" sz="1200" b="1" dirty="0">
+              <a:solidFill>
+                <a:srgbClr val="FF0000"/>
+              </a:solidFill>
+            </a:endParaRPr>
+          </a:p>
+        </p:txBody>
+      </p:sp>
+      <p:sp>
+        <p:nvSpPr>
+          <p:cNvPr id="198" name="Text 10"/>
+          <p:cNvSpPr/>
+          <p:nvPr/>
+        </p:nvSpPr>
+        <p:spPr>
+          <a:xfrm>
+            <a:off x="473833" y="3068130"/>
             <a:ext cx="5029200" cy="182880"/>
           </a:xfrm>
           <a:prstGeom prst="rect">
@@ -12324,7 +12052,7 @@
               <a:buNone/>
             </a:pPr>
             <a:r>
-              <a:rPr lang="en-US" sz="1200" dirty="0">
+              <a:rPr lang="en-US" sz="1200" b="1" dirty="0">
                 <a:solidFill>
                   <a:srgbClr val="4EC9B0"/>
                 </a:solidFill>
@@ -12332,21 +12060,21 @@
                 <a:ea typeface="Consolas" pitchFamily="34" charset="-122"/>
                 <a:cs typeface="Consolas" pitchFamily="34" charset="-120"/>
               </a:rPr>
-              <a:t>    .stream()</a:t>
-            </a:r>
-            <a:endParaRPr lang="en-US" sz="1200" dirty="0"/>
-          </a:p>
-        </p:txBody>
-      </p:sp>
-      <p:sp>
-        <p:nvSpPr>
-          <p:cNvPr id="203" name="Text 15"/>
-          <p:cNvSpPr/>
-          <p:nvPr/>
-        </p:nvSpPr>
-        <p:spPr>
-          <a:xfrm>
-            <a:off x="473833" y="3936810"/>
+              <a:t>}</a:t>
+            </a:r>
+            <a:endParaRPr lang="en-US" sz="1200" b="1" dirty="0"/>
+          </a:p>
+        </p:txBody>
+      </p:sp>
+      <p:sp>
+        <p:nvSpPr>
+          <p:cNvPr id="199" name="Text 11"/>
+          <p:cNvSpPr/>
+          <p:nvPr/>
+        </p:nvSpPr>
+        <p:spPr>
+          <a:xfrm>
+            <a:off x="473833" y="3241866"/>
             <a:ext cx="5029200" cy="182880"/>
           </a:xfrm>
           <a:prstGeom prst="rect">
@@ -12362,30 +12090,58 @@
             <a:pPr marL="0" indent="0">
               <a:buNone/>
             </a:pPr>
-            <a:r>
-              <a:rPr lang="en-US" sz="1200" dirty="0">
-                <a:solidFill>
-                  <a:srgbClr val="58D68D"/>
+            <a:endParaRPr lang="en-US" sz="1200" b="1" dirty="0"/>
+          </a:p>
+        </p:txBody>
+      </p:sp>
+      <p:sp>
+        <p:nvSpPr>
+          <p:cNvPr id="200" name="Text 12"/>
+          <p:cNvSpPr/>
+          <p:nvPr/>
+        </p:nvSpPr>
+        <p:spPr>
+          <a:xfrm>
+            <a:off x="473833" y="3415602"/>
+            <a:ext cx="5029200" cy="182880"/>
+          </a:xfrm>
+          <a:prstGeom prst="rect">
+            <a:avLst/>
+          </a:prstGeom>
+          <a:noFill/>
+          <a:ln/>
+        </p:spPr>
+        <p:txBody>
+          <a:bodyPr wrap="square" lIns="0" tIns="0" rIns="0" bIns="0" rtlCol="0" anchor="ctr"/>
+          <a:lstStyle/>
+          <a:p>
+            <a:pPr marL="0" indent="0">
+              <a:buNone/>
+            </a:pPr>
+            <a:r>
+              <a:rPr lang="en-US" sz="1200" b="1" dirty="0">
+                <a:solidFill>
+                  <a:srgbClr val="6A9955"/>
                 </a:solidFill>
                 <a:latin typeface="Consolas" pitchFamily="34" charset="0"/>
                 <a:ea typeface="Consolas" pitchFamily="34" charset="-122"/>
                 <a:cs typeface="Consolas" pitchFamily="34" charset="-120"/>
               </a:rPr>
-              <a:t>    .filter(e -&gt; e.salaire &gt; 50_000)</a:t>
-            </a:r>
-            <a:endParaRPr lang="en-US" sz="1200" dirty="0"/>
-          </a:p>
-        </p:txBody>
-      </p:sp>
-      <p:sp>
-        <p:nvSpPr>
-          <p:cNvPr id="204" name="Text 16"/>
-          <p:cNvSpPr/>
-          <p:nvPr/>
-        </p:nvSpPr>
-        <p:spPr>
-          <a:xfrm>
-            <a:off x="473833" y="4110546"/>
+              <a:t>// Traitement avec Lambda + Stream</a:t>
+            </a:r>
+            <a:endParaRPr lang="en-US" sz="1200" b="1" dirty="0"/>
+          </a:p>
+        </p:txBody>
+      </p:sp>
+      <p:sp>
+        <p:nvSpPr>
+          <p:cNvPr id="201" name="Text 13"/>
+          <p:cNvSpPr/>
+          <p:nvPr/>
+        </p:nvSpPr>
+        <p:spPr>
+          <a:xfrm>
+            <a:off x="473833" y="3589338"/>
             <a:ext cx="5029200" cy="182880"/>
           </a:xfrm>
           <a:prstGeom prst="rect">
@@ -12402,29 +12158,33 @@
               <a:buNone/>
             </a:pPr>
             <a:r>
-              <a:rPr lang="en-US" sz="1200" dirty="0">
-                <a:solidFill>
-                  <a:srgbClr val="D4D4D4"/>
+              <a:rPr lang="en-US" sz="1200" b="1" dirty="0">
+                <a:solidFill>
+                  <a:srgbClr val="FF0000"/>
                 </a:solidFill>
                 <a:latin typeface="Consolas" pitchFamily="34" charset="0"/>
                 <a:ea typeface="Consolas" pitchFamily="34" charset="-122"/>
                 <a:cs typeface="Consolas" pitchFamily="34" charset="-120"/>
               </a:rPr>
-              <a:t>    .sorted(Comparator.comparing(</a:t>
-            </a:r>
-            <a:endParaRPr lang="en-US" sz="1200" dirty="0"/>
-          </a:p>
-        </p:txBody>
-      </p:sp>
-      <p:sp>
-        <p:nvSpPr>
-          <p:cNvPr id="205" name="Text 17"/>
-          <p:cNvSpPr/>
-          <p:nvPr/>
-        </p:nvSpPr>
-        <p:spPr>
-          <a:xfrm>
-            <a:off x="473833" y="4284282"/>
+              <a:t>List&lt;String&gt; nomsSeniors = employes</a:t>
+            </a:r>
+            <a:endParaRPr lang="en-US" sz="1200" b="1" dirty="0">
+              <a:solidFill>
+                <a:srgbClr val="FF0000"/>
+              </a:solidFill>
+            </a:endParaRPr>
+          </a:p>
+        </p:txBody>
+      </p:sp>
+      <p:sp>
+        <p:nvSpPr>
+          <p:cNvPr id="202" name="Text 14"/>
+          <p:cNvSpPr/>
+          <p:nvPr/>
+        </p:nvSpPr>
+        <p:spPr>
+          <a:xfrm>
+            <a:off x="473833" y="3763074"/>
             <a:ext cx="5029200" cy="182880"/>
           </a:xfrm>
           <a:prstGeom prst="rect">
@@ -12441,29 +12201,29 @@
               <a:buNone/>
             </a:pPr>
             <a:r>
-              <a:rPr lang="en-US" sz="1200" dirty="0">
-                <a:solidFill>
-                  <a:srgbClr val="9CDCFE"/>
+              <a:rPr lang="en-US" sz="1200" b="1" dirty="0">
+                <a:solidFill>
+                  <a:srgbClr val="4EC9B0"/>
                 </a:solidFill>
                 <a:latin typeface="Consolas" pitchFamily="34" charset="0"/>
                 <a:ea typeface="Consolas" pitchFamily="34" charset="-122"/>
                 <a:cs typeface="Consolas" pitchFamily="34" charset="-120"/>
               </a:rPr>
-              <a:t>        e -&gt; e.nom))</a:t>
-            </a:r>
-            <a:endParaRPr lang="en-US" sz="1200" dirty="0"/>
-          </a:p>
-        </p:txBody>
-      </p:sp>
-      <p:sp>
-        <p:nvSpPr>
-          <p:cNvPr id="206" name="Text 18"/>
-          <p:cNvSpPr/>
-          <p:nvPr/>
-        </p:nvSpPr>
-        <p:spPr>
-          <a:xfrm>
-            <a:off x="473833" y="4458018"/>
+              <a:t>    .stream()</a:t>
+            </a:r>
+            <a:endParaRPr lang="en-US" sz="1200" b="1" dirty="0"/>
+          </a:p>
+        </p:txBody>
+      </p:sp>
+      <p:sp>
+        <p:nvSpPr>
+          <p:cNvPr id="203" name="Text 15"/>
+          <p:cNvSpPr/>
+          <p:nvPr/>
+        </p:nvSpPr>
+        <p:spPr>
+          <a:xfrm>
+            <a:off x="473833" y="3936810"/>
             <a:ext cx="5029200" cy="182880"/>
           </a:xfrm>
           <a:prstGeom prst="rect">
@@ -12480,7 +12240,7 @@
               <a:buNone/>
             </a:pPr>
             <a:r>
-              <a:rPr lang="en-US" sz="1200" dirty="0">
+              <a:rPr lang="en-US" sz="1200" b="1" dirty="0">
                 <a:solidFill>
                   <a:srgbClr val="58D68D"/>
                 </a:solidFill>
@@ -12488,21 +12248,21 @@
                 <a:ea typeface="Consolas" pitchFamily="34" charset="-122"/>
                 <a:cs typeface="Consolas" pitchFamily="34" charset="-120"/>
               </a:rPr>
-              <a:t>    .map(e -&gt; e.nom)</a:t>
-            </a:r>
-            <a:endParaRPr lang="en-US" sz="1200" dirty="0"/>
-          </a:p>
-        </p:txBody>
-      </p:sp>
-      <p:sp>
-        <p:nvSpPr>
-          <p:cNvPr id="207" name="Text 19"/>
-          <p:cNvSpPr/>
-          <p:nvPr/>
-        </p:nvSpPr>
-        <p:spPr>
-          <a:xfrm>
-            <a:off x="473833" y="4631754"/>
+              <a:t>    .filter(e -&gt; e.salaire &gt; 50_000)</a:t>
+            </a:r>
+            <a:endParaRPr lang="en-US" sz="1200" b="1" dirty="0"/>
+          </a:p>
+        </p:txBody>
+      </p:sp>
+      <p:sp>
+        <p:nvSpPr>
+          <p:cNvPr id="204" name="Text 16"/>
+          <p:cNvSpPr/>
+          <p:nvPr/>
+        </p:nvSpPr>
+        <p:spPr>
+          <a:xfrm>
+            <a:off x="473833" y="4110546"/>
             <a:ext cx="5029200" cy="182880"/>
           </a:xfrm>
           <a:prstGeom prst="rect">
@@ -12519,96 +12279,44 @@
               <a:buNone/>
             </a:pPr>
             <a:r>
-              <a:rPr lang="en-US" sz="1200" dirty="0">
-                <a:solidFill>
-                  <a:srgbClr val="E74C3C"/>
+              <a:rPr lang="en-US" sz="1200" b="1" dirty="0">
+                <a:solidFill>
+                  <a:srgbClr val="D4D4D4"/>
                 </a:solidFill>
                 <a:latin typeface="Consolas" pitchFamily="34" charset="0"/>
                 <a:ea typeface="Consolas" pitchFamily="34" charset="-122"/>
                 <a:cs typeface="Consolas" pitchFamily="34" charset="-120"/>
               </a:rPr>
-              <a:t>    .collect(Collectors.toList());</a:t>
-            </a:r>
-            <a:endParaRPr lang="en-US" sz="1200" dirty="0"/>
-          </a:p>
-        </p:txBody>
-      </p:sp>
-      <p:sp>
-        <p:nvSpPr>
-          <p:cNvPr id="208" name="Text 20"/>
-          <p:cNvSpPr/>
-          <p:nvPr/>
-        </p:nvSpPr>
-        <p:spPr>
-          <a:xfrm>
-            <a:off x="473833" y="4805490"/>
-            <a:ext cx="5029200" cy="182880"/>
-          </a:xfrm>
-          <a:prstGeom prst="rect">
-            <a:avLst/>
-          </a:prstGeom>
-          <a:noFill/>
-          <a:ln/>
-        </p:spPr>
-        <p:txBody>
-          <a:bodyPr wrap="square" lIns="0" tIns="0" rIns="0" bIns="0" rtlCol="0" anchor="ctr"/>
-          <a:lstStyle/>
-          <a:p>
-            <a:pPr marL="0" indent="0">
-              <a:buNone/>
-            </a:pPr>
-            <a:endParaRPr lang="en-US" sz="1200" dirty="0"/>
-          </a:p>
-        </p:txBody>
-      </p:sp>
-      <p:sp>
-        <p:nvSpPr>
-          <p:cNvPr id="209" name="Text 21"/>
-          <p:cNvSpPr/>
-          <p:nvPr/>
-        </p:nvSpPr>
-        <p:spPr>
-          <a:xfrm>
-            <a:off x="473833" y="4979226"/>
-            <a:ext cx="5029200" cy="182880"/>
-          </a:xfrm>
-          <a:prstGeom prst="rect">
-            <a:avLst/>
-          </a:prstGeom>
-          <a:noFill/>
-          <a:ln/>
-        </p:spPr>
-        <p:txBody>
-          <a:bodyPr wrap="square" lIns="0" tIns="0" rIns="0" bIns="0" rtlCol="0" anchor="ctr"/>
-          <a:lstStyle/>
-          <a:p>
-            <a:pPr marL="0" indent="0">
-              <a:buNone/>
-            </a:pPr>
-            <a:r>
-              <a:rPr lang="en-US" sz="1200" dirty="0">
-                <a:solidFill>
-                  <a:srgbClr val="6A9955"/>
+              <a:t>    .</a:t>
+            </a:r>
+            <a:r>
+              <a:rPr lang="en-US" sz="1200" b="1" dirty="0">
+                <a:solidFill>
+                  <a:srgbClr val="00B050"/>
                 </a:solidFill>
                 <a:latin typeface="Consolas" pitchFamily="34" charset="0"/>
                 <a:ea typeface="Consolas" pitchFamily="34" charset="-122"/>
                 <a:cs typeface="Consolas" pitchFamily="34" charset="-120"/>
               </a:rPr>
-              <a:t>// Affichage</a:t>
-            </a:r>
-            <a:endParaRPr lang="en-US" sz="1200" dirty="0"/>
-          </a:p>
-        </p:txBody>
-      </p:sp>
-      <p:sp>
-        <p:nvSpPr>
-          <p:cNvPr id="210" name="Text 22"/>
-          <p:cNvSpPr/>
-          <p:nvPr/>
-        </p:nvSpPr>
-        <p:spPr>
-          <a:xfrm>
-            <a:off x="473833" y="5152962"/>
+              <a:t>sorted(Comparator.comparing(</a:t>
+            </a:r>
+            <a:endParaRPr lang="en-US" sz="1200" b="1" dirty="0">
+              <a:solidFill>
+                <a:srgbClr val="00B050"/>
+              </a:solidFill>
+            </a:endParaRPr>
+          </a:p>
+        </p:txBody>
+      </p:sp>
+      <p:sp>
+        <p:nvSpPr>
+          <p:cNvPr id="205" name="Text 17"/>
+          <p:cNvSpPr/>
+          <p:nvPr/>
+        </p:nvSpPr>
+        <p:spPr>
+          <a:xfrm>
+            <a:off x="473833" y="4284282"/>
             <a:ext cx="5029200" cy="182880"/>
           </a:xfrm>
           <a:prstGeom prst="rect">
@@ -12625,29 +12333,33 @@
               <a:buNone/>
             </a:pPr>
             <a:r>
-              <a:rPr lang="en-US" sz="1200" dirty="0">
-                <a:solidFill>
-                  <a:srgbClr val="D4D4D4"/>
+              <a:rPr lang="en-US" sz="1200" b="1" dirty="0">
+                <a:solidFill>
+                  <a:srgbClr val="00B050"/>
                 </a:solidFill>
                 <a:latin typeface="Consolas" pitchFamily="34" charset="0"/>
                 <a:ea typeface="Consolas" pitchFamily="34" charset="-122"/>
                 <a:cs typeface="Consolas" pitchFamily="34" charset="-120"/>
               </a:rPr>
-              <a:t>nomsSeniors.forEach(</a:t>
-            </a:r>
-            <a:endParaRPr lang="en-US" sz="1200" dirty="0"/>
-          </a:p>
-        </p:txBody>
-      </p:sp>
-      <p:sp>
-        <p:nvSpPr>
-          <p:cNvPr id="211" name="Text 23"/>
-          <p:cNvSpPr/>
-          <p:nvPr/>
-        </p:nvSpPr>
-        <p:spPr>
-          <a:xfrm>
-            <a:off x="473833" y="5326698"/>
+              <a:t>        e -&gt; e.nom))</a:t>
+            </a:r>
+            <a:endParaRPr lang="en-US" sz="1200" b="1" dirty="0">
+              <a:solidFill>
+                <a:srgbClr val="00B050"/>
+              </a:solidFill>
+            </a:endParaRPr>
+          </a:p>
+        </p:txBody>
+      </p:sp>
+      <p:sp>
+        <p:nvSpPr>
+          <p:cNvPr id="206" name="Text 18"/>
+          <p:cNvSpPr/>
+          <p:nvPr/>
+        </p:nvSpPr>
+        <p:spPr>
+          <a:xfrm>
+            <a:off x="473833" y="4458018"/>
             <a:ext cx="5029200" cy="182880"/>
           </a:xfrm>
           <a:prstGeom prst="rect">
@@ -12664,17 +12376,205 @@
               <a:buNone/>
             </a:pPr>
             <a:r>
-              <a:rPr lang="en-US" sz="1200" dirty="0">
-                <a:solidFill>
-                  <a:srgbClr val="4EC9B0"/>
+              <a:rPr lang="en-US" sz="1200" b="1" dirty="0">
+                <a:solidFill>
+                  <a:srgbClr val="58D68D"/>
                 </a:solidFill>
                 <a:latin typeface="Consolas" pitchFamily="34" charset="0"/>
                 <a:ea typeface="Consolas" pitchFamily="34" charset="-122"/>
                 <a:cs typeface="Consolas" pitchFamily="34" charset="-120"/>
               </a:rPr>
+              <a:t>    .map(e -&gt; e.nom)</a:t>
+            </a:r>
+            <a:endParaRPr lang="en-US" sz="1200" b="1" dirty="0"/>
+          </a:p>
+        </p:txBody>
+      </p:sp>
+      <p:sp>
+        <p:nvSpPr>
+          <p:cNvPr id="207" name="Text 19"/>
+          <p:cNvSpPr/>
+          <p:nvPr/>
+        </p:nvSpPr>
+        <p:spPr>
+          <a:xfrm>
+            <a:off x="473833" y="4631754"/>
+            <a:ext cx="5029200" cy="182880"/>
+          </a:xfrm>
+          <a:prstGeom prst="rect">
+            <a:avLst/>
+          </a:prstGeom>
+          <a:noFill/>
+          <a:ln/>
+        </p:spPr>
+        <p:txBody>
+          <a:bodyPr wrap="square" lIns="0" tIns="0" rIns="0" bIns="0" rtlCol="0" anchor="ctr"/>
+          <a:lstStyle/>
+          <a:p>
+            <a:pPr marL="0" indent="0">
+              <a:buNone/>
+            </a:pPr>
+            <a:r>
+              <a:rPr lang="en-US" sz="1200" b="1" dirty="0">
+                <a:solidFill>
+                  <a:srgbClr val="E74C3C"/>
+                </a:solidFill>
+                <a:latin typeface="Consolas" pitchFamily="34" charset="0"/>
+                <a:ea typeface="Consolas" pitchFamily="34" charset="-122"/>
+                <a:cs typeface="Consolas" pitchFamily="34" charset="-120"/>
+              </a:rPr>
+              <a:t>    .collect(Collectors.toList());</a:t>
+            </a:r>
+            <a:endParaRPr lang="en-US" sz="1200" b="1" dirty="0"/>
+          </a:p>
+        </p:txBody>
+      </p:sp>
+      <p:sp>
+        <p:nvSpPr>
+          <p:cNvPr id="208" name="Text 20"/>
+          <p:cNvSpPr/>
+          <p:nvPr/>
+        </p:nvSpPr>
+        <p:spPr>
+          <a:xfrm>
+            <a:off x="473833" y="4805490"/>
+            <a:ext cx="5029200" cy="182880"/>
+          </a:xfrm>
+          <a:prstGeom prst="rect">
+            <a:avLst/>
+          </a:prstGeom>
+          <a:noFill/>
+          <a:ln/>
+        </p:spPr>
+        <p:txBody>
+          <a:bodyPr wrap="square" lIns="0" tIns="0" rIns="0" bIns="0" rtlCol="0" anchor="ctr"/>
+          <a:lstStyle/>
+          <a:p>
+            <a:pPr marL="0" indent="0">
+              <a:buNone/>
+            </a:pPr>
+            <a:endParaRPr lang="en-US" sz="1200" b="1" dirty="0"/>
+          </a:p>
+        </p:txBody>
+      </p:sp>
+      <p:sp>
+        <p:nvSpPr>
+          <p:cNvPr id="209" name="Text 21"/>
+          <p:cNvSpPr/>
+          <p:nvPr/>
+        </p:nvSpPr>
+        <p:spPr>
+          <a:xfrm>
+            <a:off x="473833" y="4979226"/>
+            <a:ext cx="5029200" cy="182880"/>
+          </a:xfrm>
+          <a:prstGeom prst="rect">
+            <a:avLst/>
+          </a:prstGeom>
+          <a:noFill/>
+          <a:ln/>
+        </p:spPr>
+        <p:txBody>
+          <a:bodyPr wrap="square" lIns="0" tIns="0" rIns="0" bIns="0" rtlCol="0" anchor="ctr"/>
+          <a:lstStyle/>
+          <a:p>
+            <a:pPr marL="0" indent="0">
+              <a:buNone/>
+            </a:pPr>
+            <a:r>
+              <a:rPr lang="en-US" sz="1200" b="1" dirty="0">
+                <a:solidFill>
+                  <a:srgbClr val="6A9955"/>
+                </a:solidFill>
+                <a:latin typeface="Consolas" pitchFamily="34" charset="0"/>
+                <a:ea typeface="Consolas" pitchFamily="34" charset="-122"/>
+                <a:cs typeface="Consolas" pitchFamily="34" charset="-120"/>
+              </a:rPr>
+              <a:t>// Affichage</a:t>
+            </a:r>
+            <a:endParaRPr lang="en-US" sz="1200" b="1" dirty="0"/>
+          </a:p>
+        </p:txBody>
+      </p:sp>
+      <p:sp>
+        <p:nvSpPr>
+          <p:cNvPr id="210" name="Text 22"/>
+          <p:cNvSpPr/>
+          <p:nvPr/>
+        </p:nvSpPr>
+        <p:spPr>
+          <a:xfrm>
+            <a:off x="473833" y="5152962"/>
+            <a:ext cx="5029200" cy="182880"/>
+          </a:xfrm>
+          <a:prstGeom prst="rect">
+            <a:avLst/>
+          </a:prstGeom>
+          <a:noFill/>
+          <a:ln/>
+        </p:spPr>
+        <p:txBody>
+          <a:bodyPr wrap="square" lIns="0" tIns="0" rIns="0" bIns="0" rtlCol="0" anchor="ctr"/>
+          <a:lstStyle/>
+          <a:p>
+            <a:pPr marL="0" indent="0">
+              <a:buNone/>
+            </a:pPr>
+            <a:r>
+              <a:rPr lang="en-US" sz="1200" b="1" dirty="0">
+                <a:solidFill>
+                  <a:srgbClr val="00B050"/>
+                </a:solidFill>
+                <a:latin typeface="Consolas" pitchFamily="34" charset="0"/>
+                <a:ea typeface="Consolas" pitchFamily="34" charset="-122"/>
+                <a:cs typeface="Consolas" pitchFamily="34" charset="-120"/>
+              </a:rPr>
+              <a:t>nomsSeniors.forEach(</a:t>
+            </a:r>
+            <a:endParaRPr lang="en-US" sz="1200" b="1" dirty="0">
+              <a:solidFill>
+                <a:srgbClr val="00B050"/>
+              </a:solidFill>
+            </a:endParaRPr>
+          </a:p>
+        </p:txBody>
+      </p:sp>
+      <p:sp>
+        <p:nvSpPr>
+          <p:cNvPr id="211" name="Text 23"/>
+          <p:cNvSpPr/>
+          <p:nvPr/>
+        </p:nvSpPr>
+        <p:spPr>
+          <a:xfrm>
+            <a:off x="473833" y="5326698"/>
+            <a:ext cx="5029200" cy="182880"/>
+          </a:xfrm>
+          <a:prstGeom prst="rect">
+            <a:avLst/>
+          </a:prstGeom>
+          <a:noFill/>
+          <a:ln/>
+        </p:spPr>
+        <p:txBody>
+          <a:bodyPr wrap="square" lIns="0" tIns="0" rIns="0" bIns="0" rtlCol="0" anchor="ctr"/>
+          <a:lstStyle/>
+          <a:p>
+            <a:pPr marL="0" indent="0">
+              <a:buNone/>
+            </a:pPr>
+            <a:r>
+              <a:rPr lang="en-US" sz="1200" b="1" dirty="0">
+                <a:solidFill>
+                  <a:srgbClr val="4EC9B0"/>
+                </a:solidFill>
+                <a:latin typeface="Consolas" pitchFamily="34" charset="0"/>
+                <a:ea typeface="Consolas" pitchFamily="34" charset="-122"/>
+                <a:cs typeface="Consolas" pitchFamily="34" charset="-120"/>
+              </a:rPr>
               <a:t>    System.out::println);</a:t>
             </a:r>
-            <a:endParaRPr lang="en-US" sz="1200" dirty="0"/>
+            <a:endParaRPr lang="en-US" sz="1200" b="1" dirty="0"/>
           </a:p>
         </p:txBody>
       </p:sp>
@@ -12759,13 +12659,16 @@
                 <a:solidFill>
                   <a:srgbClr val="0A1628"/>
                 </a:solidFill>
-                <a:latin typeface="Consolas" pitchFamily="34" charset="0"/>
+                <a:latin typeface="Times New Roman" panose="02020603050405020304" pitchFamily="18" charset="0"/>
                 <a:ea typeface="Consolas" pitchFamily="34" charset="-122"/>
-                <a:cs typeface="Consolas" pitchFamily="34" charset="-120"/>
+                <a:cs typeface="Times New Roman" panose="02020603050405020304" pitchFamily="18" charset="0"/>
               </a:rPr>
               <a:t>1️⃣ .stream()</a:t>
             </a:r>
-            <a:endParaRPr lang="en-US" sz="1200" dirty="0"/>
+            <a:endParaRPr lang="en-US" sz="1200" b="1" dirty="0">
+              <a:latin typeface="Times New Roman" panose="02020603050405020304" pitchFamily="18" charset="0"/>
+              <a:cs typeface="Times New Roman" panose="02020603050405020304" pitchFamily="18" charset="0"/>
+            </a:endParaRPr>
           </a:p>
         </p:txBody>
       </p:sp>
@@ -12798,13 +12701,16 @@
                 <a:solidFill>
                   <a:srgbClr val="334455"/>
                 </a:solidFill>
-                <a:latin typeface="Calibri" pitchFamily="34" charset="0"/>
+                <a:latin typeface="Times New Roman" panose="02020603050405020304" pitchFamily="18" charset="0"/>
                 <a:ea typeface="Calibri" pitchFamily="34" charset="-122"/>
-                <a:cs typeface="Calibri" pitchFamily="34" charset="-120"/>
+                <a:cs typeface="Times New Roman" panose="02020603050405020304" pitchFamily="18" charset="0"/>
               </a:rPr>
               <a:t>Crée un Stream depuis la List&lt;Employe&gt;</a:t>
             </a:r>
-            <a:endParaRPr lang="en-US" sz="1200" dirty="0"/>
+            <a:endParaRPr lang="en-US" sz="1200" dirty="0">
+              <a:latin typeface="Times New Roman" panose="02020603050405020304" pitchFamily="18" charset="0"/>
+              <a:cs typeface="Times New Roman" panose="02020603050405020304" pitchFamily="18" charset="0"/>
+            </a:endParaRPr>
           </a:p>
         </p:txBody>
       </p:sp>
@@ -12889,13 +12795,16 @@
                 <a:solidFill>
                   <a:srgbClr val="0A1628"/>
                 </a:solidFill>
-                <a:latin typeface="Consolas" pitchFamily="34" charset="0"/>
+                <a:latin typeface="Times New Roman" panose="02020603050405020304" pitchFamily="18" charset="0"/>
                 <a:ea typeface="Consolas" pitchFamily="34" charset="-122"/>
-                <a:cs typeface="Consolas" pitchFamily="34" charset="-120"/>
+                <a:cs typeface="Times New Roman" panose="02020603050405020304" pitchFamily="18" charset="0"/>
               </a:rPr>
               <a:t>2️⃣ .filter()</a:t>
             </a:r>
-            <a:endParaRPr lang="en-US" sz="1200" dirty="0"/>
+            <a:endParaRPr lang="en-US" sz="1200" b="1" dirty="0">
+              <a:latin typeface="Times New Roman" panose="02020603050405020304" pitchFamily="18" charset="0"/>
+              <a:cs typeface="Times New Roman" panose="02020603050405020304" pitchFamily="18" charset="0"/>
+            </a:endParaRPr>
           </a:p>
         </p:txBody>
       </p:sp>
@@ -12928,13 +12837,16 @@
                 <a:solidFill>
                   <a:srgbClr val="334455"/>
                 </a:solidFill>
-                <a:latin typeface="Calibri" pitchFamily="34" charset="0"/>
+                <a:latin typeface="Times New Roman" panose="02020603050405020304" pitchFamily="18" charset="0"/>
                 <a:ea typeface="Calibri" pitchFamily="34" charset="-122"/>
-                <a:cs typeface="Calibri" pitchFamily="34" charset="-120"/>
+                <a:cs typeface="Times New Roman" panose="02020603050405020304" pitchFamily="18" charset="0"/>
               </a:rPr>
               <a:t>Garde uniquement les employés avec salaire &gt; 50 000€</a:t>
             </a:r>
-            <a:endParaRPr lang="en-US" sz="1200" dirty="0"/>
+            <a:endParaRPr lang="en-US" sz="1200" dirty="0">
+              <a:latin typeface="Times New Roman" panose="02020603050405020304" pitchFamily="18" charset="0"/>
+              <a:cs typeface="Times New Roman" panose="02020603050405020304" pitchFamily="18" charset="0"/>
+            </a:endParaRPr>
           </a:p>
         </p:txBody>
       </p:sp>
@@ -13019,13 +12931,16 @@
                 <a:solidFill>
                   <a:srgbClr val="0A1628"/>
                 </a:solidFill>
-                <a:latin typeface="Consolas" pitchFamily="34" charset="0"/>
+                <a:latin typeface="Times New Roman" panose="02020603050405020304" pitchFamily="18" charset="0"/>
                 <a:ea typeface="Consolas" pitchFamily="34" charset="-122"/>
-                <a:cs typeface="Consolas" pitchFamily="34" charset="-120"/>
+                <a:cs typeface="Times New Roman" panose="02020603050405020304" pitchFamily="18" charset="0"/>
               </a:rPr>
               <a:t>3️⃣ .sorted()</a:t>
             </a:r>
-            <a:endParaRPr lang="en-US" sz="1200" dirty="0"/>
+            <a:endParaRPr lang="en-US" sz="1200" b="1" dirty="0">
+              <a:latin typeface="Times New Roman" panose="02020603050405020304" pitchFamily="18" charset="0"/>
+              <a:cs typeface="Times New Roman" panose="02020603050405020304" pitchFamily="18" charset="0"/>
+            </a:endParaRPr>
           </a:p>
         </p:txBody>
       </p:sp>
@@ -13058,13 +12973,16 @@
                 <a:solidFill>
                   <a:srgbClr val="334455"/>
                 </a:solidFill>
-                <a:latin typeface="Calibri" pitchFamily="34" charset="0"/>
+                <a:latin typeface="Times New Roman" panose="02020603050405020304" pitchFamily="18" charset="0"/>
                 <a:ea typeface="Calibri" pitchFamily="34" charset="-122"/>
-                <a:cs typeface="Calibri" pitchFamily="34" charset="-120"/>
+                <a:cs typeface="Times New Roman" panose="02020603050405020304" pitchFamily="18" charset="0"/>
               </a:rPr>
               <a:t>Trie alphabétiquement par nom (Comparator lambda)</a:t>
             </a:r>
-            <a:endParaRPr lang="en-US" sz="1200" dirty="0"/>
+            <a:endParaRPr lang="en-US" sz="1200" dirty="0">
+              <a:latin typeface="Times New Roman" panose="02020603050405020304" pitchFamily="18" charset="0"/>
+              <a:cs typeface="Times New Roman" panose="02020603050405020304" pitchFamily="18" charset="0"/>
+            </a:endParaRPr>
           </a:p>
         </p:txBody>
       </p:sp>
@@ -13149,13 +13067,16 @@
                 <a:solidFill>
                   <a:srgbClr val="0A1628"/>
                 </a:solidFill>
-                <a:latin typeface="Consolas" pitchFamily="34" charset="0"/>
+                <a:latin typeface="Times New Roman" panose="02020603050405020304" pitchFamily="18" charset="0"/>
                 <a:ea typeface="Consolas" pitchFamily="34" charset="-122"/>
-                <a:cs typeface="Consolas" pitchFamily="34" charset="-120"/>
+                <a:cs typeface="Times New Roman" panose="02020603050405020304" pitchFamily="18" charset="0"/>
               </a:rPr>
               <a:t>4️⃣ .map()</a:t>
             </a:r>
-            <a:endParaRPr lang="en-US" sz="1200" dirty="0"/>
+            <a:endParaRPr lang="en-US" sz="1200" b="1" dirty="0">
+              <a:latin typeface="Times New Roman" panose="02020603050405020304" pitchFamily="18" charset="0"/>
+              <a:cs typeface="Times New Roman" panose="02020603050405020304" pitchFamily="18" charset="0"/>
+            </a:endParaRPr>
           </a:p>
         </p:txBody>
       </p:sp>
@@ -13188,9 +13109,9 @@
                 <a:solidFill>
                   <a:srgbClr val="334455"/>
                 </a:solidFill>
-                <a:latin typeface="Calibri" pitchFamily="34" charset="0"/>
+                <a:latin typeface="Times New Roman" panose="02020603050405020304" pitchFamily="18" charset="0"/>
                 <a:ea typeface="Calibri" pitchFamily="34" charset="-122"/>
-                <a:cs typeface="Calibri" pitchFamily="34" charset="-120"/>
+                <a:cs typeface="Times New Roman" panose="02020603050405020304" pitchFamily="18" charset="0"/>
               </a:rPr>
               <a:t>Transforme chaque Employe </a:t>
             </a:r>
@@ -13199,9 +13120,9 @@
                 <a:solidFill>
                   <a:srgbClr val="334455"/>
                 </a:solidFill>
-                <a:latin typeface="Calibri" pitchFamily="34" charset="0"/>
+                <a:latin typeface="Times New Roman" panose="02020603050405020304" pitchFamily="18" charset="0"/>
                 <a:ea typeface="Calibri" pitchFamily="34" charset="-122"/>
-                <a:cs typeface="Calibri" pitchFamily="34" charset="-120"/>
+                <a:cs typeface="Times New Roman" panose="02020603050405020304" pitchFamily="18" charset="0"/>
               </a:rPr>
               <a:t>en</a:t>
             </a:r>
@@ -13210,13 +13131,16 @@
                 <a:solidFill>
                   <a:srgbClr val="334455"/>
                 </a:solidFill>
-                <a:latin typeface="Calibri" pitchFamily="34" charset="0"/>
+                <a:latin typeface="Times New Roman" panose="02020603050405020304" pitchFamily="18" charset="0"/>
                 <a:ea typeface="Calibri" pitchFamily="34" charset="-122"/>
-                <a:cs typeface="Calibri" pitchFamily="34" charset="-120"/>
+                <a:cs typeface="Times New Roman" panose="02020603050405020304" pitchFamily="18" charset="0"/>
               </a:rPr>
               <a:t> String (son nom)</a:t>
             </a:r>
-            <a:endParaRPr lang="en-US" sz="1200" dirty="0"/>
+            <a:endParaRPr lang="en-US" sz="1200" dirty="0">
+              <a:latin typeface="Times New Roman" panose="02020603050405020304" pitchFamily="18" charset="0"/>
+              <a:cs typeface="Times New Roman" panose="02020603050405020304" pitchFamily="18" charset="0"/>
+            </a:endParaRPr>
           </a:p>
         </p:txBody>
       </p:sp>
@@ -13301,13 +13225,16 @@
                 <a:solidFill>
                   <a:srgbClr val="0A1628"/>
                 </a:solidFill>
-                <a:latin typeface="Consolas" pitchFamily="34" charset="0"/>
+                <a:latin typeface="Times New Roman" panose="02020603050405020304" pitchFamily="18" charset="0"/>
                 <a:ea typeface="Consolas" pitchFamily="34" charset="-122"/>
-                <a:cs typeface="Consolas" pitchFamily="34" charset="-120"/>
+                <a:cs typeface="Times New Roman" panose="02020603050405020304" pitchFamily="18" charset="0"/>
               </a:rPr>
               <a:t>5️⃣ .collect()</a:t>
             </a:r>
-            <a:endParaRPr lang="en-US" sz="1200" dirty="0"/>
+            <a:endParaRPr lang="en-US" sz="1200" b="1" dirty="0">
+              <a:latin typeface="Times New Roman" panose="02020603050405020304" pitchFamily="18" charset="0"/>
+              <a:cs typeface="Times New Roman" panose="02020603050405020304" pitchFamily="18" charset="0"/>
+            </a:endParaRPr>
           </a:p>
         </p:txBody>
       </p:sp>
@@ -13340,13 +13267,16 @@
                 <a:solidFill>
                   <a:srgbClr val="334455"/>
                 </a:solidFill>
-                <a:latin typeface="Calibri" pitchFamily="34" charset="0"/>
+                <a:latin typeface="Times New Roman" panose="02020603050405020304" pitchFamily="18" charset="0"/>
                 <a:ea typeface="Calibri" pitchFamily="34" charset="-122"/>
-                <a:cs typeface="Calibri" pitchFamily="34" charset="-120"/>
+                <a:cs typeface="Times New Roman" panose="02020603050405020304" pitchFamily="18" charset="0"/>
               </a:rPr>
               <a:t>Collecte les noms dans une List&lt;String&gt;</a:t>
             </a:r>
-            <a:endParaRPr lang="en-US" sz="1200" dirty="0"/>
+            <a:endParaRPr lang="en-US" sz="1200" dirty="0">
+              <a:latin typeface="Times New Roman" panose="02020603050405020304" pitchFamily="18" charset="0"/>
+              <a:cs typeface="Times New Roman" panose="02020603050405020304" pitchFamily="18" charset="0"/>
+            </a:endParaRPr>
           </a:p>
         </p:txBody>
       </p:sp>
@@ -15077,7 +15007,7 @@
             <a:avLst/>
           </a:prstGeom>
           <a:solidFill>
-            <a:srgbClr val="0D1B2A"/>
+            <a:schemeClr val="bg1"/>
           </a:solidFill>
           <a:ln/>
         </p:spPr>
@@ -15107,16 +15037,97 @@
               <a:buNone/>
             </a:pPr>
             <a:r>
+              <a:rPr lang="en-US" sz="1400" b="1" dirty="0">
+                <a:solidFill>
+                  <a:srgbClr val="4EC9B0"/>
+                </a:solidFill>
+                <a:latin typeface="Times New Roman" panose="02020603050405020304" pitchFamily="18" charset="0"/>
+                <a:ea typeface="Consolas" pitchFamily="34" charset="-122"/>
+                <a:cs typeface="Times New Roman" panose="02020603050405020304" pitchFamily="18" charset="0"/>
+              </a:rPr>
+              <a:t>class Voiture {</a:t>
+            </a:r>
+            <a:endParaRPr lang="en-US" sz="1400" b="1" dirty="0">
+              <a:latin typeface="Times New Roman" panose="02020603050405020304" pitchFamily="18" charset="0"/>
+              <a:cs typeface="Times New Roman" panose="02020603050405020304" pitchFamily="18" charset="0"/>
+            </a:endParaRPr>
+          </a:p>
+        </p:txBody>
+      </p:sp>
+      <p:sp>
+        <p:nvSpPr>
+          <p:cNvPr id="52" name="Text 6"/>
+          <p:cNvSpPr/>
+          <p:nvPr/>
+        </p:nvSpPr>
+        <p:spPr>
+          <a:xfrm>
+            <a:off x="316672" y="2264910"/>
+            <a:ext cx="3886200" cy="201168"/>
+          </a:xfrm>
+          <a:prstGeom prst="rect">
+            <a:avLst/>
+          </a:prstGeom>
+          <a:noFill/>
+          <a:ln/>
+        </p:spPr>
+        <p:txBody>
+          <a:bodyPr wrap="square" lIns="0" tIns="0" rIns="0" bIns="0" rtlCol="0" anchor="ctr"/>
+          <a:lstStyle/>
+          <a:p>
+            <a:pPr marL="0" indent="0">
+              <a:buNone/>
+            </a:pPr>
+            <a:r>
               <a:rPr lang="en-US" sz="1400" dirty="0">
                 <a:solidFill>
-                  <a:srgbClr val="4EC9B0"/>
+                  <a:srgbClr val="9CDCFE"/>
                 </a:solidFill>
                 <a:latin typeface="Times New Roman" panose="02020603050405020304" pitchFamily="18" charset="0"/>
                 <a:ea typeface="Consolas" pitchFamily="34" charset="-122"/>
                 <a:cs typeface="Times New Roman" panose="02020603050405020304" pitchFamily="18" charset="0"/>
               </a:rPr>
-              <a:t>class Voiture {</a:t>
-            </a:r>
+              <a:t>  </a:t>
+            </a:r>
+            <a:r>
+              <a:rPr lang="en-US" sz="1400" b="1" dirty="0">
+                <a:latin typeface="Times New Roman" panose="02020603050405020304" pitchFamily="18" charset="0"/>
+                <a:ea typeface="Consolas" pitchFamily="34" charset="-122"/>
+                <a:cs typeface="Times New Roman" panose="02020603050405020304" pitchFamily="18" charset="0"/>
+              </a:rPr>
+              <a:t>private String marque;</a:t>
+            </a:r>
+            <a:endParaRPr lang="en-US" sz="1400" b="1" dirty="0">
+              <a:latin typeface="Times New Roman" panose="02020603050405020304" pitchFamily="18" charset="0"/>
+              <a:cs typeface="Times New Roman" panose="02020603050405020304" pitchFamily="18" charset="0"/>
+            </a:endParaRPr>
+          </a:p>
+        </p:txBody>
+      </p:sp>
+      <p:sp>
+        <p:nvSpPr>
+          <p:cNvPr id="53" name="Text 7"/>
+          <p:cNvSpPr/>
+          <p:nvPr/>
+        </p:nvSpPr>
+        <p:spPr>
+          <a:xfrm>
+            <a:off x="316672" y="2470650"/>
+            <a:ext cx="3886200" cy="201168"/>
+          </a:xfrm>
+          <a:prstGeom prst="rect">
+            <a:avLst/>
+          </a:prstGeom>
+          <a:noFill/>
+          <a:ln/>
+        </p:spPr>
+        <p:txBody>
+          <a:bodyPr wrap="square" lIns="0" tIns="0" rIns="0" bIns="0" rtlCol="0" anchor="ctr"/>
+          <a:lstStyle/>
+          <a:p>
+            <a:pPr marL="0" indent="0">
+              <a:buNone/>
+            </a:pPr>
             <a:endParaRPr lang="en-US" sz="1400" dirty="0">
               <a:latin typeface="Times New Roman" panose="02020603050405020304" pitchFamily="18" charset="0"/>
               <a:cs typeface="Times New Roman" panose="02020603050405020304" pitchFamily="18" charset="0"/>
@@ -15126,13 +15137,13 @@
       </p:sp>
       <p:sp>
         <p:nvSpPr>
-          <p:cNvPr id="52" name="Text 6"/>
-          <p:cNvSpPr/>
-          <p:nvPr/>
-        </p:nvSpPr>
-        <p:spPr>
-          <a:xfrm>
-            <a:off x="316672" y="2264910"/>
+          <p:cNvPr id="54" name="Text 8"/>
+          <p:cNvSpPr/>
+          <p:nvPr/>
+        </p:nvSpPr>
+        <p:spPr>
+          <a:xfrm>
+            <a:off x="316672" y="2676390"/>
             <a:ext cx="3886200" cy="201168"/>
           </a:xfrm>
           <a:prstGeom prst="rect">
@@ -15151,13 +15162,66 @@
             <a:r>
               <a:rPr lang="en-US" sz="1400" dirty="0">
                 <a:solidFill>
-                  <a:srgbClr val="9CDCFE"/>
+                  <a:srgbClr val="6A9955"/>
                 </a:solidFill>
                 <a:latin typeface="Times New Roman" panose="02020603050405020304" pitchFamily="18" charset="0"/>
                 <a:ea typeface="Consolas" pitchFamily="34" charset="-122"/>
                 <a:cs typeface="Times New Roman" panose="02020603050405020304" pitchFamily="18" charset="0"/>
               </a:rPr>
-              <a:t>  private String marque;</a:t>
+              <a:t>  // </a:t>
+            </a:r>
+            <a:r>
+              <a:rPr lang="en-US" sz="1400" b="1" dirty="0">
+                <a:solidFill>
+                  <a:srgbClr val="6A9955"/>
+                </a:solidFill>
+                <a:latin typeface="Times New Roman" panose="02020603050405020304" pitchFamily="18" charset="0"/>
+                <a:ea typeface="Consolas" pitchFamily="34" charset="-122"/>
+                <a:cs typeface="Times New Roman" panose="02020603050405020304" pitchFamily="18" charset="0"/>
+              </a:rPr>
+              <a:t>Classe interne membre</a:t>
+            </a:r>
+            <a:endParaRPr lang="en-US" sz="1400" b="1" dirty="0">
+              <a:latin typeface="Times New Roman" panose="02020603050405020304" pitchFamily="18" charset="0"/>
+              <a:cs typeface="Times New Roman" panose="02020603050405020304" pitchFamily="18" charset="0"/>
+            </a:endParaRPr>
+          </a:p>
+        </p:txBody>
+      </p:sp>
+      <p:sp>
+        <p:nvSpPr>
+          <p:cNvPr id="55" name="Text 9"/>
+          <p:cNvSpPr/>
+          <p:nvPr/>
+        </p:nvSpPr>
+        <p:spPr>
+          <a:xfrm>
+            <a:off x="316672" y="2882130"/>
+            <a:ext cx="3886200" cy="201168"/>
+          </a:xfrm>
+          <a:prstGeom prst="rect">
+            <a:avLst/>
+          </a:prstGeom>
+          <a:noFill/>
+          <a:ln/>
+        </p:spPr>
+        <p:txBody>
+          <a:bodyPr wrap="square" lIns="0" tIns="0" rIns="0" bIns="0" rtlCol="0" anchor="ctr"/>
+          <a:lstStyle/>
+          <a:p>
+            <a:pPr marL="0" indent="0">
+              <a:buNone/>
+            </a:pPr>
+            <a:r>
+              <a:rPr lang="en-US" sz="1400" dirty="0">
+                <a:solidFill>
+                  <a:srgbClr val="4EC9B0"/>
+                </a:solidFill>
+                <a:latin typeface="Times New Roman" panose="02020603050405020304" pitchFamily="18" charset="0"/>
+                <a:ea typeface="Consolas" pitchFamily="34" charset="-122"/>
+                <a:cs typeface="Times New Roman" panose="02020603050405020304" pitchFamily="18" charset="0"/>
+              </a:rPr>
+              <a:t>  class Moteur {</a:t>
             </a:r>
             <a:endParaRPr lang="en-US" sz="1400" dirty="0">
               <a:latin typeface="Times New Roman" panose="02020603050405020304" pitchFamily="18" charset="0"/>
@@ -15168,13 +15232,13 @@
       </p:sp>
       <p:sp>
         <p:nvSpPr>
-          <p:cNvPr id="53" name="Text 7"/>
-          <p:cNvSpPr/>
-          <p:nvPr/>
-        </p:nvSpPr>
-        <p:spPr>
-          <a:xfrm>
-            <a:off x="316672" y="2470650"/>
+          <p:cNvPr id="56" name="Text 10"/>
+          <p:cNvSpPr/>
+          <p:nvPr/>
+        </p:nvSpPr>
+        <p:spPr>
+          <a:xfrm>
+            <a:off x="316672" y="3087870"/>
             <a:ext cx="3886200" cy="201168"/>
           </a:xfrm>
           <a:prstGeom prst="rect">
@@ -15190,6 +15254,28 @@
             <a:pPr marL="0" indent="0">
               <a:buNone/>
             </a:pPr>
+            <a:r>
+              <a:rPr lang="en-US" sz="1400" b="1" dirty="0">
+                <a:solidFill>
+                  <a:srgbClr val="9CDCFE"/>
+                </a:solidFill>
+                <a:latin typeface="Times New Roman" panose="02020603050405020304" pitchFamily="18" charset="0"/>
+                <a:ea typeface="Consolas" pitchFamily="34" charset="-122"/>
+                <a:cs typeface="Times New Roman" panose="02020603050405020304" pitchFamily="18" charset="0"/>
+              </a:rPr>
+              <a:t>    int chevaux</a:t>
+            </a:r>
+            <a:r>
+              <a:rPr lang="en-US" sz="1400" dirty="0">
+                <a:solidFill>
+                  <a:srgbClr val="9CDCFE"/>
+                </a:solidFill>
+                <a:latin typeface="Times New Roman" panose="02020603050405020304" pitchFamily="18" charset="0"/>
+                <a:ea typeface="Consolas" pitchFamily="34" charset="-122"/>
+                <a:cs typeface="Times New Roman" panose="02020603050405020304" pitchFamily="18" charset="0"/>
+              </a:rPr>
+              <a:t>;</a:t>
+            </a:r>
             <a:endParaRPr lang="en-US" sz="1400" dirty="0">
               <a:latin typeface="Times New Roman" panose="02020603050405020304" pitchFamily="18" charset="0"/>
               <a:cs typeface="Times New Roman" panose="02020603050405020304" pitchFamily="18" charset="0"/>
@@ -15199,13 +15285,13 @@
       </p:sp>
       <p:sp>
         <p:nvSpPr>
-          <p:cNvPr id="54" name="Text 8"/>
-          <p:cNvSpPr/>
-          <p:nvPr/>
-        </p:nvSpPr>
-        <p:spPr>
-          <a:xfrm>
-            <a:off x="316672" y="2676390"/>
+          <p:cNvPr id="57" name="Text 11"/>
+          <p:cNvSpPr/>
+          <p:nvPr/>
+        </p:nvSpPr>
+        <p:spPr>
+          <a:xfrm>
+            <a:off x="316672" y="3293610"/>
             <a:ext cx="3886200" cy="201168"/>
           </a:xfrm>
           <a:prstGeom prst="rect">
@@ -15221,17 +15307,6 @@
             <a:pPr marL="0" indent="0">
               <a:buNone/>
             </a:pPr>
-            <a:r>
-              <a:rPr lang="en-US" sz="1400" dirty="0">
-                <a:solidFill>
-                  <a:srgbClr val="6A9955"/>
-                </a:solidFill>
-                <a:latin typeface="Times New Roman" panose="02020603050405020304" pitchFamily="18" charset="0"/>
-                <a:ea typeface="Consolas" pitchFamily="34" charset="-122"/>
-                <a:cs typeface="Times New Roman" panose="02020603050405020304" pitchFamily="18" charset="0"/>
-              </a:rPr>
-              <a:t>  // Classe interne membre</a:t>
-            </a:r>
             <a:endParaRPr lang="en-US" sz="1400" dirty="0">
               <a:latin typeface="Times New Roman" panose="02020603050405020304" pitchFamily="18" charset="0"/>
               <a:cs typeface="Times New Roman" panose="02020603050405020304" pitchFamily="18" charset="0"/>
@@ -15241,13 +15316,13 @@
       </p:sp>
       <p:sp>
         <p:nvSpPr>
-          <p:cNvPr id="55" name="Text 9"/>
-          <p:cNvSpPr/>
-          <p:nvPr/>
-        </p:nvSpPr>
-        <p:spPr>
-          <a:xfrm>
-            <a:off x="316672" y="2882130"/>
+          <p:cNvPr id="58" name="Text 12"/>
+          <p:cNvSpPr/>
+          <p:nvPr/>
+        </p:nvSpPr>
+        <p:spPr>
+          <a:xfrm>
+            <a:off x="316672" y="3499350"/>
             <a:ext cx="3886200" cy="201168"/>
           </a:xfrm>
           <a:prstGeom prst="rect">
@@ -15266,13 +15341,69 @@
             <a:r>
               <a:rPr lang="en-US" sz="1400" dirty="0">
                 <a:solidFill>
-                  <a:srgbClr val="4EC9B0"/>
+                  <a:srgbClr val="DCDCAA"/>
                 </a:solidFill>
                 <a:latin typeface="Times New Roman" panose="02020603050405020304" pitchFamily="18" charset="0"/>
                 <a:ea typeface="Consolas" pitchFamily="34" charset="-122"/>
                 <a:cs typeface="Times New Roman" panose="02020603050405020304" pitchFamily="18" charset="0"/>
               </a:rPr>
-              <a:t>  class Moteur {</a:t>
+              <a:t>    </a:t>
+            </a:r>
+            <a:r>
+              <a:rPr lang="en-US" sz="1400" b="1" dirty="0">
+                <a:solidFill>
+                  <a:srgbClr val="FF0000"/>
+                </a:solidFill>
+                <a:latin typeface="Times New Roman" panose="02020603050405020304" pitchFamily="18" charset="0"/>
+                <a:ea typeface="Consolas" pitchFamily="34" charset="-122"/>
+                <a:cs typeface="Times New Roman" panose="02020603050405020304" pitchFamily="18" charset="0"/>
+              </a:rPr>
+              <a:t>void demarrer() {</a:t>
+            </a:r>
+            <a:endParaRPr lang="en-US" sz="1400" b="1" dirty="0">
+              <a:solidFill>
+                <a:srgbClr val="FF0000"/>
+              </a:solidFill>
+              <a:latin typeface="Times New Roman" panose="02020603050405020304" pitchFamily="18" charset="0"/>
+              <a:cs typeface="Times New Roman" panose="02020603050405020304" pitchFamily="18" charset="0"/>
+            </a:endParaRPr>
+          </a:p>
+        </p:txBody>
+      </p:sp>
+      <p:sp>
+        <p:nvSpPr>
+          <p:cNvPr id="59" name="Text 13"/>
+          <p:cNvSpPr/>
+          <p:nvPr/>
+        </p:nvSpPr>
+        <p:spPr>
+          <a:xfrm>
+            <a:off x="316672" y="3705090"/>
+            <a:ext cx="3886200" cy="201168"/>
+          </a:xfrm>
+          <a:prstGeom prst="rect">
+            <a:avLst/>
+          </a:prstGeom>
+          <a:noFill/>
+          <a:ln/>
+        </p:spPr>
+        <p:txBody>
+          <a:bodyPr wrap="square" lIns="0" tIns="0" rIns="0" bIns="0" rtlCol="0" anchor="ctr"/>
+          <a:lstStyle/>
+          <a:p>
+            <a:pPr marL="0" indent="0">
+              <a:buNone/>
+            </a:pPr>
+            <a:r>
+              <a:rPr lang="en-US" sz="1400" dirty="0">
+                <a:solidFill>
+                  <a:srgbClr val="6A9955"/>
+                </a:solidFill>
+                <a:latin typeface="Times New Roman" panose="02020603050405020304" pitchFamily="18" charset="0"/>
+                <a:ea typeface="Consolas" pitchFamily="34" charset="-122"/>
+                <a:cs typeface="Times New Roman" panose="02020603050405020304" pitchFamily="18" charset="0"/>
+              </a:rPr>
+              <a:t>      // accède à marque</a:t>
             </a:r>
             <a:endParaRPr lang="en-US" sz="1400" dirty="0">
               <a:latin typeface="Times New Roman" panose="02020603050405020304" pitchFamily="18" charset="0"/>
@@ -15283,13 +15414,13 @@
       </p:sp>
       <p:sp>
         <p:nvSpPr>
-          <p:cNvPr id="56" name="Text 10"/>
-          <p:cNvSpPr/>
-          <p:nvPr/>
-        </p:nvSpPr>
-        <p:spPr>
-          <a:xfrm>
-            <a:off x="316672" y="3087870"/>
+          <p:cNvPr id="60" name="Text 14"/>
+          <p:cNvSpPr/>
+          <p:nvPr/>
+        </p:nvSpPr>
+        <p:spPr>
+          <a:xfrm>
+            <a:off x="316672" y="3910830"/>
             <a:ext cx="3886200" cy="201168"/>
           </a:xfrm>
           <a:prstGeom prst="rect">
@@ -15308,13 +15439,21 @@
             <a:r>
               <a:rPr lang="en-US" sz="1400" dirty="0">
                 <a:solidFill>
-                  <a:srgbClr val="9CDCFE"/>
+                  <a:srgbClr val="D4D4D4"/>
                 </a:solidFill>
                 <a:latin typeface="Times New Roman" panose="02020603050405020304" pitchFamily="18" charset="0"/>
                 <a:ea typeface="Consolas" pitchFamily="34" charset="-122"/>
                 <a:cs typeface="Times New Roman" panose="02020603050405020304" pitchFamily="18" charset="0"/>
               </a:rPr>
-              <a:t>    int chevaux;</a:t>
+              <a:t>      </a:t>
+            </a:r>
+            <a:r>
+              <a:rPr lang="en-US" sz="1400" dirty="0">
+                <a:latin typeface="Times New Roman" panose="02020603050405020304" pitchFamily="18" charset="0"/>
+                <a:ea typeface="Consolas" pitchFamily="34" charset="-122"/>
+                <a:cs typeface="Times New Roman" panose="02020603050405020304" pitchFamily="18" charset="0"/>
+              </a:rPr>
+              <a:t>System.out.println(</a:t>
             </a:r>
             <a:endParaRPr lang="en-US" sz="1400" dirty="0">
               <a:latin typeface="Times New Roman" panose="02020603050405020304" pitchFamily="18" charset="0"/>
@@ -15325,163 +15464,6 @@
       </p:sp>
       <p:sp>
         <p:nvSpPr>
-          <p:cNvPr id="57" name="Text 11"/>
-          <p:cNvSpPr/>
-          <p:nvPr/>
-        </p:nvSpPr>
-        <p:spPr>
-          <a:xfrm>
-            <a:off x="316672" y="3293610"/>
-            <a:ext cx="3886200" cy="201168"/>
-          </a:xfrm>
-          <a:prstGeom prst="rect">
-            <a:avLst/>
-          </a:prstGeom>
-          <a:noFill/>
-          <a:ln/>
-        </p:spPr>
-        <p:txBody>
-          <a:bodyPr wrap="square" lIns="0" tIns="0" rIns="0" bIns="0" rtlCol="0" anchor="ctr"/>
-          <a:lstStyle/>
-          <a:p>
-            <a:pPr marL="0" indent="0">
-              <a:buNone/>
-            </a:pPr>
-            <a:endParaRPr lang="en-US" sz="1400" dirty="0">
-              <a:latin typeface="Times New Roman" panose="02020603050405020304" pitchFamily="18" charset="0"/>
-              <a:cs typeface="Times New Roman" panose="02020603050405020304" pitchFamily="18" charset="0"/>
-            </a:endParaRPr>
-          </a:p>
-        </p:txBody>
-      </p:sp>
-      <p:sp>
-        <p:nvSpPr>
-          <p:cNvPr id="58" name="Text 12"/>
-          <p:cNvSpPr/>
-          <p:nvPr/>
-        </p:nvSpPr>
-        <p:spPr>
-          <a:xfrm>
-            <a:off x="316672" y="3499350"/>
-            <a:ext cx="3886200" cy="201168"/>
-          </a:xfrm>
-          <a:prstGeom prst="rect">
-            <a:avLst/>
-          </a:prstGeom>
-          <a:noFill/>
-          <a:ln/>
-        </p:spPr>
-        <p:txBody>
-          <a:bodyPr wrap="square" lIns="0" tIns="0" rIns="0" bIns="0" rtlCol="0" anchor="ctr"/>
-          <a:lstStyle/>
-          <a:p>
-            <a:pPr marL="0" indent="0">
-              <a:buNone/>
-            </a:pPr>
-            <a:r>
-              <a:rPr lang="en-US" sz="1400" dirty="0">
-                <a:solidFill>
-                  <a:srgbClr val="DCDCAA"/>
-                </a:solidFill>
-                <a:latin typeface="Times New Roman" panose="02020603050405020304" pitchFamily="18" charset="0"/>
-                <a:ea typeface="Consolas" pitchFamily="34" charset="-122"/>
-                <a:cs typeface="Times New Roman" panose="02020603050405020304" pitchFamily="18" charset="0"/>
-              </a:rPr>
-              <a:t>    void demarrer() {</a:t>
-            </a:r>
-            <a:endParaRPr lang="en-US" sz="1400" dirty="0">
-              <a:latin typeface="Times New Roman" panose="02020603050405020304" pitchFamily="18" charset="0"/>
-              <a:cs typeface="Times New Roman" panose="02020603050405020304" pitchFamily="18" charset="0"/>
-            </a:endParaRPr>
-          </a:p>
-        </p:txBody>
-      </p:sp>
-      <p:sp>
-        <p:nvSpPr>
-          <p:cNvPr id="59" name="Text 13"/>
-          <p:cNvSpPr/>
-          <p:nvPr/>
-        </p:nvSpPr>
-        <p:spPr>
-          <a:xfrm>
-            <a:off x="316672" y="3705090"/>
-            <a:ext cx="3886200" cy="201168"/>
-          </a:xfrm>
-          <a:prstGeom prst="rect">
-            <a:avLst/>
-          </a:prstGeom>
-          <a:noFill/>
-          <a:ln/>
-        </p:spPr>
-        <p:txBody>
-          <a:bodyPr wrap="square" lIns="0" tIns="0" rIns="0" bIns="0" rtlCol="0" anchor="ctr"/>
-          <a:lstStyle/>
-          <a:p>
-            <a:pPr marL="0" indent="0">
-              <a:buNone/>
-            </a:pPr>
-            <a:r>
-              <a:rPr lang="en-US" sz="1400" dirty="0">
-                <a:solidFill>
-                  <a:srgbClr val="6A9955"/>
-                </a:solidFill>
-                <a:latin typeface="Times New Roman" panose="02020603050405020304" pitchFamily="18" charset="0"/>
-                <a:ea typeface="Consolas" pitchFamily="34" charset="-122"/>
-                <a:cs typeface="Times New Roman" panose="02020603050405020304" pitchFamily="18" charset="0"/>
-              </a:rPr>
-              <a:t>      // accède à marque</a:t>
-            </a:r>
-            <a:endParaRPr lang="en-US" sz="1400" dirty="0">
-              <a:latin typeface="Times New Roman" panose="02020603050405020304" pitchFamily="18" charset="0"/>
-              <a:cs typeface="Times New Roman" panose="02020603050405020304" pitchFamily="18" charset="0"/>
-            </a:endParaRPr>
-          </a:p>
-        </p:txBody>
-      </p:sp>
-      <p:sp>
-        <p:nvSpPr>
-          <p:cNvPr id="60" name="Text 14"/>
-          <p:cNvSpPr/>
-          <p:nvPr/>
-        </p:nvSpPr>
-        <p:spPr>
-          <a:xfrm>
-            <a:off x="316672" y="3910830"/>
-            <a:ext cx="3886200" cy="201168"/>
-          </a:xfrm>
-          <a:prstGeom prst="rect">
-            <a:avLst/>
-          </a:prstGeom>
-          <a:noFill/>
-          <a:ln/>
-        </p:spPr>
-        <p:txBody>
-          <a:bodyPr wrap="square" lIns="0" tIns="0" rIns="0" bIns="0" rtlCol="0" anchor="ctr"/>
-          <a:lstStyle/>
-          <a:p>
-            <a:pPr marL="0" indent="0">
-              <a:buNone/>
-            </a:pPr>
-            <a:r>
-              <a:rPr lang="en-US" sz="1400" dirty="0">
-                <a:solidFill>
-                  <a:srgbClr val="D4D4D4"/>
-                </a:solidFill>
-                <a:latin typeface="Times New Roman" panose="02020603050405020304" pitchFamily="18" charset="0"/>
-                <a:ea typeface="Consolas" pitchFamily="34" charset="-122"/>
-                <a:cs typeface="Times New Roman" panose="02020603050405020304" pitchFamily="18" charset="0"/>
-              </a:rPr>
-              <a:t>      System.out.println(</a:t>
-            </a:r>
-            <a:endParaRPr lang="en-US" sz="1400" dirty="0">
-              <a:latin typeface="Times New Roman" panose="02020603050405020304" pitchFamily="18" charset="0"/>
-              <a:cs typeface="Times New Roman" panose="02020603050405020304" pitchFamily="18" charset="0"/>
-            </a:endParaRPr>
-          </a:p>
-        </p:txBody>
-      </p:sp>
-      <p:sp>
-        <p:nvSpPr>
           <p:cNvPr id="61" name="Text 15"/>
           <p:cNvSpPr/>
           <p:nvPr/>
@@ -15513,9 +15495,17 @@
                 <a:ea typeface="Consolas" pitchFamily="34" charset="-122"/>
                 <a:cs typeface="Times New Roman" panose="02020603050405020304" pitchFamily="18" charset="0"/>
               </a:rPr>
-              <a:t>        marque);</a:t>
-            </a:r>
-            <a:endParaRPr lang="en-US" sz="1400" dirty="0">
+              <a:t>        </a:t>
+            </a:r>
+            <a:r>
+              <a:rPr lang="en-US" sz="1400" b="1" dirty="0">
+                <a:latin typeface="Times New Roman" panose="02020603050405020304" pitchFamily="18" charset="0"/>
+                <a:ea typeface="Consolas" pitchFamily="34" charset="-122"/>
+                <a:cs typeface="Times New Roman" panose="02020603050405020304" pitchFamily="18" charset="0"/>
+              </a:rPr>
+              <a:t>marque);</a:t>
+            </a:r>
+            <a:endParaRPr lang="en-US" sz="1400" b="1" dirty="0">
               <a:latin typeface="Times New Roman" panose="02020603050405020304" pitchFamily="18" charset="0"/>
               <a:cs typeface="Times New Roman" panose="02020603050405020304" pitchFamily="18" charset="0"/>
             </a:endParaRPr>
@@ -15730,7 +15720,7 @@
             <a:avLst/>
           </a:prstGeom>
           <a:solidFill>
-            <a:srgbClr val="0D1B2A"/>
+            <a:schemeClr val="bg1"/>
           </a:solidFill>
           <a:ln/>
         </p:spPr>
@@ -15760,16 +15750,97 @@
               <a:buNone/>
             </a:pPr>
             <a:r>
+              <a:rPr lang="en-US" sz="1400" b="1" dirty="0">
+                <a:solidFill>
+                  <a:srgbClr val="4EC9B0"/>
+                </a:solidFill>
+                <a:latin typeface="Times New Roman" panose="02020603050405020304" pitchFamily="18" charset="0"/>
+                <a:ea typeface="Consolas" pitchFamily="34" charset="-122"/>
+                <a:cs typeface="Times New Roman" panose="02020603050405020304" pitchFamily="18" charset="0"/>
+              </a:rPr>
+              <a:t>class Universite {</a:t>
+            </a:r>
+            <a:endParaRPr lang="en-US" sz="1400" b="1" dirty="0">
+              <a:latin typeface="Times New Roman" panose="02020603050405020304" pitchFamily="18" charset="0"/>
+              <a:cs typeface="Times New Roman" panose="02020603050405020304" pitchFamily="18" charset="0"/>
+            </a:endParaRPr>
+          </a:p>
+        </p:txBody>
+      </p:sp>
+      <p:sp>
+        <p:nvSpPr>
+          <p:cNvPr id="69" name="Text 23"/>
+          <p:cNvSpPr/>
+          <p:nvPr/>
+        </p:nvSpPr>
+        <p:spPr>
+          <a:xfrm>
+            <a:off x="4751512" y="2264910"/>
+            <a:ext cx="3886200" cy="201168"/>
+          </a:xfrm>
+          <a:prstGeom prst="rect">
+            <a:avLst/>
+          </a:prstGeom>
+          <a:noFill/>
+          <a:ln/>
+        </p:spPr>
+        <p:txBody>
+          <a:bodyPr wrap="square" lIns="0" tIns="0" rIns="0" bIns="0" rtlCol="0" anchor="ctr"/>
+          <a:lstStyle/>
+          <a:p>
+            <a:pPr marL="0" indent="0">
+              <a:buNone/>
+            </a:pPr>
+            <a:r>
               <a:rPr lang="en-US" sz="1400" dirty="0">
                 <a:solidFill>
-                  <a:srgbClr val="4EC9B0"/>
+                  <a:srgbClr val="9CDCFE"/>
                 </a:solidFill>
                 <a:latin typeface="Times New Roman" panose="02020603050405020304" pitchFamily="18" charset="0"/>
                 <a:ea typeface="Consolas" pitchFamily="34" charset="-122"/>
                 <a:cs typeface="Times New Roman" panose="02020603050405020304" pitchFamily="18" charset="0"/>
               </a:rPr>
-              <a:t>class Universite {</a:t>
-            </a:r>
+              <a:t>  </a:t>
+            </a:r>
+            <a:r>
+              <a:rPr lang="en-US" sz="1400" b="1" dirty="0">
+                <a:latin typeface="Times New Roman" panose="02020603050405020304" pitchFamily="18" charset="0"/>
+                <a:ea typeface="Consolas" pitchFamily="34" charset="-122"/>
+                <a:cs typeface="Times New Roman" panose="02020603050405020304" pitchFamily="18" charset="0"/>
+              </a:rPr>
+              <a:t>String nom;</a:t>
+            </a:r>
+            <a:endParaRPr lang="en-US" sz="1400" b="1" dirty="0">
+              <a:latin typeface="Times New Roman" panose="02020603050405020304" pitchFamily="18" charset="0"/>
+              <a:cs typeface="Times New Roman" panose="02020603050405020304" pitchFamily="18" charset="0"/>
+            </a:endParaRPr>
+          </a:p>
+        </p:txBody>
+      </p:sp>
+      <p:sp>
+        <p:nvSpPr>
+          <p:cNvPr id="70" name="Text 24"/>
+          <p:cNvSpPr/>
+          <p:nvPr/>
+        </p:nvSpPr>
+        <p:spPr>
+          <a:xfrm>
+            <a:off x="4751512" y="2470650"/>
+            <a:ext cx="3886200" cy="201168"/>
+          </a:xfrm>
+          <a:prstGeom prst="rect">
+            <a:avLst/>
+          </a:prstGeom>
+          <a:noFill/>
+          <a:ln/>
+        </p:spPr>
+        <p:txBody>
+          <a:bodyPr wrap="square" lIns="0" tIns="0" rIns="0" bIns="0" rtlCol="0" anchor="ctr"/>
+          <a:lstStyle/>
+          <a:p>
+            <a:pPr marL="0" indent="0">
+              <a:buNone/>
+            </a:pPr>
             <a:endParaRPr lang="en-US" sz="1400" dirty="0">
               <a:latin typeface="Times New Roman" panose="02020603050405020304" pitchFamily="18" charset="0"/>
               <a:cs typeface="Times New Roman" panose="02020603050405020304" pitchFamily="18" charset="0"/>
@@ -15779,13 +15850,13 @@
       </p:sp>
       <p:sp>
         <p:nvSpPr>
-          <p:cNvPr id="69" name="Text 23"/>
-          <p:cNvSpPr/>
-          <p:nvPr/>
-        </p:nvSpPr>
-        <p:spPr>
-          <a:xfrm>
-            <a:off x="4751512" y="2264910"/>
+          <p:cNvPr id="71" name="Text 25"/>
+          <p:cNvSpPr/>
+          <p:nvPr/>
+        </p:nvSpPr>
+        <p:spPr>
+          <a:xfrm>
+            <a:off x="4751512" y="2676390"/>
             <a:ext cx="3886200" cy="201168"/>
           </a:xfrm>
           <a:prstGeom prst="rect">
@@ -15804,14 +15875,187 @@
             <a:r>
               <a:rPr lang="en-US" sz="1400" dirty="0">
                 <a:solidFill>
+                  <a:srgbClr val="6A9955"/>
+                </a:solidFill>
+                <a:latin typeface="Times New Roman" panose="02020603050405020304" pitchFamily="18" charset="0"/>
+                <a:ea typeface="Consolas" pitchFamily="34" charset="-122"/>
+                <a:cs typeface="Times New Roman" panose="02020603050405020304" pitchFamily="18" charset="0"/>
+              </a:rPr>
+              <a:t>  // </a:t>
+            </a:r>
+            <a:r>
+              <a:rPr lang="en-US" sz="1400" b="1" dirty="0">
+                <a:solidFill>
+                  <a:srgbClr val="6A9955"/>
+                </a:solidFill>
+                <a:latin typeface="Times New Roman" panose="02020603050405020304" pitchFamily="18" charset="0"/>
+                <a:ea typeface="Consolas" pitchFamily="34" charset="-122"/>
+                <a:cs typeface="Times New Roman" panose="02020603050405020304" pitchFamily="18" charset="0"/>
+              </a:rPr>
+              <a:t>Classe statique</a:t>
+            </a:r>
+            <a:endParaRPr lang="en-US" sz="1400" b="1" dirty="0">
+              <a:latin typeface="Times New Roman" panose="02020603050405020304" pitchFamily="18" charset="0"/>
+              <a:cs typeface="Times New Roman" panose="02020603050405020304" pitchFamily="18" charset="0"/>
+            </a:endParaRPr>
+          </a:p>
+        </p:txBody>
+      </p:sp>
+      <p:sp>
+        <p:nvSpPr>
+          <p:cNvPr id="72" name="Text 26"/>
+          <p:cNvSpPr/>
+          <p:nvPr/>
+        </p:nvSpPr>
+        <p:spPr>
+          <a:xfrm>
+            <a:off x="4751512" y="2882130"/>
+            <a:ext cx="3886200" cy="201168"/>
+          </a:xfrm>
+          <a:prstGeom prst="rect">
+            <a:avLst/>
+          </a:prstGeom>
+          <a:noFill/>
+          <a:ln/>
+        </p:spPr>
+        <p:txBody>
+          <a:bodyPr wrap="square" lIns="0" tIns="0" rIns="0" bIns="0" rtlCol="0" anchor="ctr"/>
+          <a:lstStyle/>
+          <a:p>
+            <a:pPr marL="0" indent="0">
+              <a:buNone/>
+            </a:pPr>
+            <a:r>
+              <a:rPr lang="en-US" sz="1400" b="1" dirty="0">
+                <a:solidFill>
+                  <a:srgbClr val="4EC9B0"/>
+                </a:solidFill>
+                <a:latin typeface="Times New Roman" panose="02020603050405020304" pitchFamily="18" charset="0"/>
+                <a:ea typeface="Consolas" pitchFamily="34" charset="-122"/>
+                <a:cs typeface="Times New Roman" panose="02020603050405020304" pitchFamily="18" charset="0"/>
+              </a:rPr>
+              <a:t>  static class Etudiant {</a:t>
+            </a:r>
+            <a:endParaRPr lang="en-US" sz="1400" b="1" dirty="0">
+              <a:latin typeface="Times New Roman" panose="02020603050405020304" pitchFamily="18" charset="0"/>
+              <a:cs typeface="Times New Roman" panose="02020603050405020304" pitchFamily="18" charset="0"/>
+            </a:endParaRPr>
+          </a:p>
+        </p:txBody>
+      </p:sp>
+      <p:sp>
+        <p:nvSpPr>
+          <p:cNvPr id="73" name="Text 27"/>
+          <p:cNvSpPr/>
+          <p:nvPr/>
+        </p:nvSpPr>
+        <p:spPr>
+          <a:xfrm>
+            <a:off x="4751512" y="3087870"/>
+            <a:ext cx="3886200" cy="201168"/>
+          </a:xfrm>
+          <a:prstGeom prst="rect">
+            <a:avLst/>
+          </a:prstGeom>
+          <a:noFill/>
+          <a:ln/>
+        </p:spPr>
+        <p:txBody>
+          <a:bodyPr wrap="square" lIns="0" tIns="0" rIns="0" bIns="0" rtlCol="0" anchor="ctr"/>
+          <a:lstStyle/>
+          <a:p>
+            <a:pPr marL="0" indent="0">
+              <a:buNone/>
+            </a:pPr>
+            <a:r>
+              <a:rPr lang="en-US" sz="1400" b="1" dirty="0">
+                <a:latin typeface="Times New Roman" panose="02020603050405020304" pitchFamily="18" charset="0"/>
+                <a:ea typeface="Consolas" pitchFamily="34" charset="-122"/>
+                <a:cs typeface="Times New Roman" panose="02020603050405020304" pitchFamily="18" charset="0"/>
+              </a:rPr>
+              <a:t>    String prenom;</a:t>
+            </a:r>
+            <a:endParaRPr lang="en-US" sz="1400" b="1" dirty="0">
+              <a:latin typeface="Times New Roman" panose="02020603050405020304" pitchFamily="18" charset="0"/>
+              <a:cs typeface="Times New Roman" panose="02020603050405020304" pitchFamily="18" charset="0"/>
+            </a:endParaRPr>
+          </a:p>
+        </p:txBody>
+      </p:sp>
+      <p:sp>
+        <p:nvSpPr>
+          <p:cNvPr id="74" name="Text 28"/>
+          <p:cNvSpPr/>
+          <p:nvPr/>
+        </p:nvSpPr>
+        <p:spPr>
+          <a:xfrm>
+            <a:off x="4751512" y="3293610"/>
+            <a:ext cx="3886200" cy="201168"/>
+          </a:xfrm>
+          <a:prstGeom prst="rect">
+            <a:avLst/>
+          </a:prstGeom>
+          <a:noFill/>
+          <a:ln/>
+        </p:spPr>
+        <p:txBody>
+          <a:bodyPr wrap="square" lIns="0" tIns="0" rIns="0" bIns="0" rtlCol="0" anchor="ctr"/>
+          <a:lstStyle/>
+          <a:p>
+            <a:pPr marL="0" indent="0">
+              <a:buNone/>
+            </a:pPr>
+            <a:r>
+              <a:rPr lang="en-US" sz="1400" dirty="0">
+                <a:solidFill>
                   <a:srgbClr val="9CDCFE"/>
                 </a:solidFill>
                 <a:latin typeface="Times New Roman" panose="02020603050405020304" pitchFamily="18" charset="0"/>
                 <a:ea typeface="Consolas" pitchFamily="34" charset="-122"/>
                 <a:cs typeface="Times New Roman" panose="02020603050405020304" pitchFamily="18" charset="0"/>
               </a:rPr>
-              <a:t>  String nom;</a:t>
-            </a:r>
+              <a:t>    </a:t>
+            </a:r>
+            <a:r>
+              <a:rPr lang="en-US" sz="1400" b="1" dirty="0">
+                <a:latin typeface="Times New Roman" panose="02020603050405020304" pitchFamily="18" charset="0"/>
+                <a:ea typeface="Consolas" pitchFamily="34" charset="-122"/>
+                <a:cs typeface="Times New Roman" panose="02020603050405020304" pitchFamily="18" charset="0"/>
+              </a:rPr>
+              <a:t>int age;</a:t>
+            </a:r>
+            <a:endParaRPr lang="en-US" sz="1400" b="1" dirty="0">
+              <a:latin typeface="Times New Roman" panose="02020603050405020304" pitchFamily="18" charset="0"/>
+              <a:cs typeface="Times New Roman" panose="02020603050405020304" pitchFamily="18" charset="0"/>
+            </a:endParaRPr>
+          </a:p>
+        </p:txBody>
+      </p:sp>
+      <p:sp>
+        <p:nvSpPr>
+          <p:cNvPr id="75" name="Text 29"/>
+          <p:cNvSpPr/>
+          <p:nvPr/>
+        </p:nvSpPr>
+        <p:spPr>
+          <a:xfrm>
+            <a:off x="4751512" y="3499350"/>
+            <a:ext cx="3886200" cy="201168"/>
+          </a:xfrm>
+          <a:prstGeom prst="rect">
+            <a:avLst/>
+          </a:prstGeom>
+          <a:noFill/>
+          <a:ln/>
+        </p:spPr>
+        <p:txBody>
+          <a:bodyPr wrap="square" lIns="0" tIns="0" rIns="0" bIns="0" rtlCol="0" anchor="ctr"/>
+          <a:lstStyle/>
+          <a:p>
+            <a:pPr marL="0" indent="0">
+              <a:buNone/>
+            </a:pPr>
             <a:endParaRPr lang="en-US" sz="1400" dirty="0">
               <a:latin typeface="Times New Roman" panose="02020603050405020304" pitchFamily="18" charset="0"/>
               <a:cs typeface="Times New Roman" panose="02020603050405020304" pitchFamily="18" charset="0"/>
@@ -15821,13 +16065,13 @@
       </p:sp>
       <p:sp>
         <p:nvSpPr>
-          <p:cNvPr id="70" name="Text 24"/>
-          <p:cNvSpPr/>
-          <p:nvPr/>
-        </p:nvSpPr>
-        <p:spPr>
-          <a:xfrm>
-            <a:off x="4751512" y="2470650"/>
+          <p:cNvPr id="76" name="Text 30"/>
+          <p:cNvSpPr/>
+          <p:nvPr/>
+        </p:nvSpPr>
+        <p:spPr>
+          <a:xfrm>
+            <a:off x="4751512" y="3705090"/>
             <a:ext cx="3886200" cy="201168"/>
           </a:xfrm>
           <a:prstGeom prst="rect">
@@ -15843,7 +16087,21 @@
             <a:pPr marL="0" indent="0">
               <a:buNone/>
             </a:pPr>
-            <a:endParaRPr lang="en-US" sz="1400" dirty="0">
+            <a:r>
+              <a:rPr lang="en-US" sz="1400" b="1" dirty="0">
+                <a:solidFill>
+                  <a:srgbClr val="FF0000"/>
+                </a:solidFill>
+                <a:latin typeface="Times New Roman" panose="02020603050405020304" pitchFamily="18" charset="0"/>
+                <a:ea typeface="Consolas" pitchFamily="34" charset="-122"/>
+                <a:cs typeface="Times New Roman" panose="02020603050405020304" pitchFamily="18" charset="0"/>
+              </a:rPr>
+              <a:t>    void afficher() {</a:t>
+            </a:r>
+            <a:endParaRPr lang="en-US" sz="1400" b="1" dirty="0">
+              <a:solidFill>
+                <a:srgbClr val="FF0000"/>
+              </a:solidFill>
               <a:latin typeface="Times New Roman" panose="02020603050405020304" pitchFamily="18" charset="0"/>
               <a:cs typeface="Times New Roman" panose="02020603050405020304" pitchFamily="18" charset="0"/>
             </a:endParaRPr>
@@ -15852,13 +16110,13 @@
       </p:sp>
       <p:sp>
         <p:nvSpPr>
-          <p:cNvPr id="71" name="Text 25"/>
-          <p:cNvSpPr/>
-          <p:nvPr/>
-        </p:nvSpPr>
-        <p:spPr>
-          <a:xfrm>
-            <a:off x="4751512" y="2676390"/>
+          <p:cNvPr id="77" name="Text 31"/>
+          <p:cNvSpPr/>
+          <p:nvPr/>
+        </p:nvSpPr>
+        <p:spPr>
+          <a:xfrm>
+            <a:off x="4751512" y="3910830"/>
             <a:ext cx="3886200" cy="201168"/>
           </a:xfrm>
           <a:prstGeom prst="rect">
@@ -15877,15 +16135,23 @@
             <a:r>
               <a:rPr lang="en-US" sz="1400" dirty="0">
                 <a:solidFill>
-                  <a:srgbClr val="6A9955"/>
+                  <a:srgbClr val="D4D4D4"/>
                 </a:solidFill>
                 <a:latin typeface="Times New Roman" panose="02020603050405020304" pitchFamily="18" charset="0"/>
                 <a:ea typeface="Consolas" pitchFamily="34" charset="-122"/>
                 <a:cs typeface="Times New Roman" panose="02020603050405020304" pitchFamily="18" charset="0"/>
               </a:rPr>
-              <a:t>  // Classe statique</a:t>
-            </a:r>
-            <a:endParaRPr lang="en-US" sz="1400" dirty="0">
+              <a:t>      </a:t>
+            </a:r>
+            <a:r>
+              <a:rPr lang="en-US" sz="1400" b="1" dirty="0">
+                <a:latin typeface="Times New Roman" panose="02020603050405020304" pitchFamily="18" charset="0"/>
+                <a:ea typeface="Consolas" pitchFamily="34" charset="-122"/>
+                <a:cs typeface="Times New Roman" panose="02020603050405020304" pitchFamily="18" charset="0"/>
+              </a:rPr>
+              <a:t>System.out.println(</a:t>
+            </a:r>
+            <a:endParaRPr lang="en-US" sz="1400" b="1" dirty="0">
               <a:latin typeface="Times New Roman" panose="02020603050405020304" pitchFamily="18" charset="0"/>
               <a:cs typeface="Times New Roman" panose="02020603050405020304" pitchFamily="18" charset="0"/>
             </a:endParaRPr>
@@ -15894,247 +16160,6 @@
       </p:sp>
       <p:sp>
         <p:nvSpPr>
-          <p:cNvPr id="72" name="Text 26"/>
-          <p:cNvSpPr/>
-          <p:nvPr/>
-        </p:nvSpPr>
-        <p:spPr>
-          <a:xfrm>
-            <a:off x="4751512" y="2882130"/>
-            <a:ext cx="3886200" cy="201168"/>
-          </a:xfrm>
-          <a:prstGeom prst="rect">
-            <a:avLst/>
-          </a:prstGeom>
-          <a:noFill/>
-          <a:ln/>
-        </p:spPr>
-        <p:txBody>
-          <a:bodyPr wrap="square" lIns="0" tIns="0" rIns="0" bIns="0" rtlCol="0" anchor="ctr"/>
-          <a:lstStyle/>
-          <a:p>
-            <a:pPr marL="0" indent="0">
-              <a:buNone/>
-            </a:pPr>
-            <a:r>
-              <a:rPr lang="en-US" sz="1400" dirty="0">
-                <a:solidFill>
-                  <a:srgbClr val="4EC9B0"/>
-                </a:solidFill>
-                <a:latin typeface="Times New Roman" panose="02020603050405020304" pitchFamily="18" charset="0"/>
-                <a:ea typeface="Consolas" pitchFamily="34" charset="-122"/>
-                <a:cs typeface="Times New Roman" panose="02020603050405020304" pitchFamily="18" charset="0"/>
-              </a:rPr>
-              <a:t>  static class Etudiant {</a:t>
-            </a:r>
-            <a:endParaRPr lang="en-US" sz="1400" dirty="0">
-              <a:latin typeface="Times New Roman" panose="02020603050405020304" pitchFamily="18" charset="0"/>
-              <a:cs typeface="Times New Roman" panose="02020603050405020304" pitchFamily="18" charset="0"/>
-            </a:endParaRPr>
-          </a:p>
-        </p:txBody>
-      </p:sp>
-      <p:sp>
-        <p:nvSpPr>
-          <p:cNvPr id="73" name="Text 27"/>
-          <p:cNvSpPr/>
-          <p:nvPr/>
-        </p:nvSpPr>
-        <p:spPr>
-          <a:xfrm>
-            <a:off x="4751512" y="3087870"/>
-            <a:ext cx="3886200" cy="201168"/>
-          </a:xfrm>
-          <a:prstGeom prst="rect">
-            <a:avLst/>
-          </a:prstGeom>
-          <a:noFill/>
-          <a:ln/>
-        </p:spPr>
-        <p:txBody>
-          <a:bodyPr wrap="square" lIns="0" tIns="0" rIns="0" bIns="0" rtlCol="0" anchor="ctr"/>
-          <a:lstStyle/>
-          <a:p>
-            <a:pPr marL="0" indent="0">
-              <a:buNone/>
-            </a:pPr>
-            <a:r>
-              <a:rPr lang="en-US" sz="1400" dirty="0">
-                <a:solidFill>
-                  <a:srgbClr val="9CDCFE"/>
-                </a:solidFill>
-                <a:latin typeface="Times New Roman" panose="02020603050405020304" pitchFamily="18" charset="0"/>
-                <a:ea typeface="Consolas" pitchFamily="34" charset="-122"/>
-                <a:cs typeface="Times New Roman" panose="02020603050405020304" pitchFamily="18" charset="0"/>
-              </a:rPr>
-              <a:t>    String prenom;</a:t>
-            </a:r>
-            <a:endParaRPr lang="en-US" sz="1400" dirty="0">
-              <a:latin typeface="Times New Roman" panose="02020603050405020304" pitchFamily="18" charset="0"/>
-              <a:cs typeface="Times New Roman" panose="02020603050405020304" pitchFamily="18" charset="0"/>
-            </a:endParaRPr>
-          </a:p>
-        </p:txBody>
-      </p:sp>
-      <p:sp>
-        <p:nvSpPr>
-          <p:cNvPr id="74" name="Text 28"/>
-          <p:cNvSpPr/>
-          <p:nvPr/>
-        </p:nvSpPr>
-        <p:spPr>
-          <a:xfrm>
-            <a:off x="4751512" y="3293610"/>
-            <a:ext cx="3886200" cy="201168"/>
-          </a:xfrm>
-          <a:prstGeom prst="rect">
-            <a:avLst/>
-          </a:prstGeom>
-          <a:noFill/>
-          <a:ln/>
-        </p:spPr>
-        <p:txBody>
-          <a:bodyPr wrap="square" lIns="0" tIns="0" rIns="0" bIns="0" rtlCol="0" anchor="ctr"/>
-          <a:lstStyle/>
-          <a:p>
-            <a:pPr marL="0" indent="0">
-              <a:buNone/>
-            </a:pPr>
-            <a:r>
-              <a:rPr lang="en-US" sz="1400" dirty="0">
-                <a:solidFill>
-                  <a:srgbClr val="9CDCFE"/>
-                </a:solidFill>
-                <a:latin typeface="Times New Roman" panose="02020603050405020304" pitchFamily="18" charset="0"/>
-                <a:ea typeface="Consolas" pitchFamily="34" charset="-122"/>
-                <a:cs typeface="Times New Roman" panose="02020603050405020304" pitchFamily="18" charset="0"/>
-              </a:rPr>
-              <a:t>    int age;</a:t>
-            </a:r>
-            <a:endParaRPr lang="en-US" sz="1400" dirty="0">
-              <a:latin typeface="Times New Roman" panose="02020603050405020304" pitchFamily="18" charset="0"/>
-              <a:cs typeface="Times New Roman" panose="02020603050405020304" pitchFamily="18" charset="0"/>
-            </a:endParaRPr>
-          </a:p>
-        </p:txBody>
-      </p:sp>
-      <p:sp>
-        <p:nvSpPr>
-          <p:cNvPr id="75" name="Text 29"/>
-          <p:cNvSpPr/>
-          <p:nvPr/>
-        </p:nvSpPr>
-        <p:spPr>
-          <a:xfrm>
-            <a:off x="4751512" y="3499350"/>
-            <a:ext cx="3886200" cy="201168"/>
-          </a:xfrm>
-          <a:prstGeom prst="rect">
-            <a:avLst/>
-          </a:prstGeom>
-          <a:noFill/>
-          <a:ln/>
-        </p:spPr>
-        <p:txBody>
-          <a:bodyPr wrap="square" lIns="0" tIns="0" rIns="0" bIns="0" rtlCol="0" anchor="ctr"/>
-          <a:lstStyle/>
-          <a:p>
-            <a:pPr marL="0" indent="0">
-              <a:buNone/>
-            </a:pPr>
-            <a:endParaRPr lang="en-US" sz="1400" dirty="0">
-              <a:latin typeface="Times New Roman" panose="02020603050405020304" pitchFamily="18" charset="0"/>
-              <a:cs typeface="Times New Roman" panose="02020603050405020304" pitchFamily="18" charset="0"/>
-            </a:endParaRPr>
-          </a:p>
-        </p:txBody>
-      </p:sp>
-      <p:sp>
-        <p:nvSpPr>
-          <p:cNvPr id="76" name="Text 30"/>
-          <p:cNvSpPr/>
-          <p:nvPr/>
-        </p:nvSpPr>
-        <p:spPr>
-          <a:xfrm>
-            <a:off x="4751512" y="3705090"/>
-            <a:ext cx="3886200" cy="201168"/>
-          </a:xfrm>
-          <a:prstGeom prst="rect">
-            <a:avLst/>
-          </a:prstGeom>
-          <a:noFill/>
-          <a:ln/>
-        </p:spPr>
-        <p:txBody>
-          <a:bodyPr wrap="square" lIns="0" tIns="0" rIns="0" bIns="0" rtlCol="0" anchor="ctr"/>
-          <a:lstStyle/>
-          <a:p>
-            <a:pPr marL="0" indent="0">
-              <a:buNone/>
-            </a:pPr>
-            <a:r>
-              <a:rPr lang="en-US" sz="1400" dirty="0">
-                <a:solidFill>
-                  <a:srgbClr val="DCDCAA"/>
-                </a:solidFill>
-                <a:latin typeface="Times New Roman" panose="02020603050405020304" pitchFamily="18" charset="0"/>
-                <a:ea typeface="Consolas" pitchFamily="34" charset="-122"/>
-                <a:cs typeface="Times New Roman" panose="02020603050405020304" pitchFamily="18" charset="0"/>
-              </a:rPr>
-              <a:t>    void afficher() {</a:t>
-            </a:r>
-            <a:endParaRPr lang="en-US" sz="1400" dirty="0">
-              <a:latin typeface="Times New Roman" panose="02020603050405020304" pitchFamily="18" charset="0"/>
-              <a:cs typeface="Times New Roman" panose="02020603050405020304" pitchFamily="18" charset="0"/>
-            </a:endParaRPr>
-          </a:p>
-        </p:txBody>
-      </p:sp>
-      <p:sp>
-        <p:nvSpPr>
-          <p:cNvPr id="77" name="Text 31"/>
-          <p:cNvSpPr/>
-          <p:nvPr/>
-        </p:nvSpPr>
-        <p:spPr>
-          <a:xfrm>
-            <a:off x="4751512" y="3910830"/>
-            <a:ext cx="3886200" cy="201168"/>
-          </a:xfrm>
-          <a:prstGeom prst="rect">
-            <a:avLst/>
-          </a:prstGeom>
-          <a:noFill/>
-          <a:ln/>
-        </p:spPr>
-        <p:txBody>
-          <a:bodyPr wrap="square" lIns="0" tIns="0" rIns="0" bIns="0" rtlCol="0" anchor="ctr"/>
-          <a:lstStyle/>
-          <a:p>
-            <a:pPr marL="0" indent="0">
-              <a:buNone/>
-            </a:pPr>
-            <a:r>
-              <a:rPr lang="en-US" sz="1400" dirty="0">
-                <a:solidFill>
-                  <a:srgbClr val="D4D4D4"/>
-                </a:solidFill>
-                <a:latin typeface="Times New Roman" panose="02020603050405020304" pitchFamily="18" charset="0"/>
-                <a:ea typeface="Consolas" pitchFamily="34" charset="-122"/>
-                <a:cs typeface="Times New Roman" panose="02020603050405020304" pitchFamily="18" charset="0"/>
-              </a:rPr>
-              <a:t>      System.out.println(</a:t>
-            </a:r>
-            <a:endParaRPr lang="en-US" sz="1400" dirty="0">
-              <a:latin typeface="Times New Roman" panose="02020603050405020304" pitchFamily="18" charset="0"/>
-              <a:cs typeface="Times New Roman" panose="02020603050405020304" pitchFamily="18" charset="0"/>
-            </a:endParaRPr>
-          </a:p>
-        </p:txBody>
-      </p:sp>
-      <p:sp>
-        <p:nvSpPr>
           <p:cNvPr id="78" name="Text 32"/>
           <p:cNvSpPr/>
           <p:nvPr/>
@@ -16166,9 +16191,20 @@
                 <a:ea typeface="Consolas" pitchFamily="34" charset="-122"/>
                 <a:cs typeface="Times New Roman" panose="02020603050405020304" pitchFamily="18" charset="0"/>
               </a:rPr>
-              <a:t>        prenom);</a:t>
-            </a:r>
-            <a:endParaRPr lang="en-US" sz="1400" dirty="0">
+              <a:t>        </a:t>
+            </a:r>
+            <a:r>
+              <a:rPr lang="en-US" sz="1400" b="1" dirty="0">
+                <a:solidFill>
+                  <a:srgbClr val="9CDCFE"/>
+                </a:solidFill>
+                <a:latin typeface="Times New Roman" panose="02020603050405020304" pitchFamily="18" charset="0"/>
+                <a:ea typeface="Consolas" pitchFamily="34" charset="-122"/>
+                <a:cs typeface="Times New Roman" panose="02020603050405020304" pitchFamily="18" charset="0"/>
+              </a:rPr>
+              <a:t>prenom);</a:t>
+            </a:r>
+            <a:endParaRPr lang="en-US" sz="1400" b="1" dirty="0">
               <a:latin typeface="Times New Roman" panose="02020603050405020304" pitchFamily="18" charset="0"/>
               <a:cs typeface="Times New Roman" panose="02020603050405020304" pitchFamily="18" charset="0"/>
             </a:endParaRPr>
@@ -16594,7 +16630,7 @@
             <a:avLst/>
           </a:prstGeom>
           <a:solidFill>
-            <a:srgbClr val="0D1B2A"/>
+            <a:schemeClr val="bg1"/>
           </a:solidFill>
           <a:ln/>
         </p:spPr>
@@ -16624,9 +16660,9 @@
               <a:buNone/>
             </a:pPr>
             <a:r>
-              <a:rPr lang="en-US" sz="1200" dirty="0">
-                <a:solidFill>
-                  <a:srgbClr val="4EC9B0"/>
+              <a:rPr lang="en-US" sz="1200" b="1" dirty="0">
+                <a:solidFill>
+                  <a:srgbClr val="00B0F0"/>
                 </a:solidFill>
                 <a:latin typeface="Consolas" pitchFamily="34" charset="0"/>
                 <a:ea typeface="Consolas" pitchFamily="34" charset="-122"/>
@@ -16634,7 +16670,11 @@
               </a:rPr>
               <a:t>class CompteBancaire {</a:t>
             </a:r>
-            <a:endParaRPr lang="en-US" sz="1200" dirty="0"/>
+            <a:endParaRPr lang="en-US" sz="1200" b="1" dirty="0">
+              <a:solidFill>
+                <a:srgbClr val="00B0F0"/>
+              </a:solidFill>
+            </a:endParaRPr>
           </a:p>
         </p:txBody>
       </p:sp>
@@ -16663,7 +16703,7 @@
               <a:buNone/>
             </a:pPr>
             <a:r>
-              <a:rPr lang="en-US" sz="1200" dirty="0">
+              <a:rPr lang="en-US" sz="1200" b="1" dirty="0">
                 <a:solidFill>
                   <a:srgbClr val="9CDCFE"/>
                 </a:solidFill>
@@ -16671,60 +16711,29 @@
                 <a:ea typeface="Consolas" pitchFamily="34" charset="-122"/>
                 <a:cs typeface="Consolas" pitchFamily="34" charset="-120"/>
               </a:rPr>
-              <a:t>  private double solde;</a:t>
-            </a:r>
-            <a:endParaRPr lang="en-US" sz="1200" dirty="0"/>
-          </a:p>
-        </p:txBody>
-      </p:sp>
-      <p:sp>
-        <p:nvSpPr>
-          <p:cNvPr id="44" name="Text 7"/>
-          <p:cNvSpPr/>
-          <p:nvPr/>
-        </p:nvSpPr>
-        <p:spPr>
-          <a:xfrm>
-            <a:off x="388680" y="2818296"/>
-            <a:ext cx="5029200" cy="182880"/>
-          </a:xfrm>
-          <a:prstGeom prst="rect">
-            <a:avLst/>
-          </a:prstGeom>
-          <a:noFill/>
-          <a:ln/>
-        </p:spPr>
-        <p:txBody>
-          <a:bodyPr wrap="square" lIns="0" tIns="0" rIns="0" bIns="0" rtlCol="0" anchor="ctr"/>
-          <a:lstStyle/>
-          <a:p>
-            <a:pPr marL="0" indent="0">
-              <a:buNone/>
-            </a:pPr>
-            <a:r>
-              <a:rPr lang="en-US" sz="1200" dirty="0">
-                <a:solidFill>
-                  <a:srgbClr val="9CDCFE"/>
-                </a:solidFill>
+              <a:t>  </a:t>
+            </a:r>
+            <a:r>
+              <a:rPr lang="en-US" sz="1200" b="1" dirty="0">
                 <a:latin typeface="Consolas" pitchFamily="34" charset="0"/>
                 <a:ea typeface="Consolas" pitchFamily="34" charset="-122"/>
                 <a:cs typeface="Consolas" pitchFamily="34" charset="-120"/>
               </a:rPr>
-              <a:t>  private String titulaire;</a:t>
-            </a:r>
-            <a:endParaRPr lang="en-US" sz="1200" dirty="0"/>
-          </a:p>
-        </p:txBody>
-      </p:sp>
-      <p:sp>
-        <p:nvSpPr>
-          <p:cNvPr id="45" name="Text 8"/>
-          <p:cNvSpPr/>
-          <p:nvPr/>
-        </p:nvSpPr>
-        <p:spPr>
-          <a:xfrm>
-            <a:off x="388680" y="2992032"/>
+              <a:t>private double solde;</a:t>
+            </a:r>
+            <a:endParaRPr lang="en-US" sz="1200" b="1" dirty="0"/>
+          </a:p>
+        </p:txBody>
+      </p:sp>
+      <p:sp>
+        <p:nvSpPr>
+          <p:cNvPr id="44" name="Text 7"/>
+          <p:cNvSpPr/>
+          <p:nvPr/>
+        </p:nvSpPr>
+        <p:spPr>
+          <a:xfrm>
+            <a:off x="388680" y="2818296"/>
             <a:ext cx="5029200" cy="182880"/>
           </a:xfrm>
           <a:prstGeom prst="rect">
@@ -16740,97 +16749,38 @@
             <a:pPr marL="0" indent="0">
               <a:buNone/>
             </a:pPr>
-            <a:endParaRPr lang="en-US" sz="1200" dirty="0"/>
-          </a:p>
-        </p:txBody>
-      </p:sp>
-      <p:sp>
-        <p:nvSpPr>
-          <p:cNvPr id="46" name="Text 9"/>
-          <p:cNvSpPr/>
-          <p:nvPr/>
-        </p:nvSpPr>
-        <p:spPr>
-          <a:xfrm>
-            <a:off x="388680" y="3165768"/>
-            <a:ext cx="5029200" cy="182880"/>
-          </a:xfrm>
-          <a:prstGeom prst="rect">
-            <a:avLst/>
-          </a:prstGeom>
-          <a:noFill/>
-          <a:ln/>
-        </p:spPr>
-        <p:txBody>
-          <a:bodyPr wrap="square" lIns="0" tIns="0" rIns="0" bIns="0" rtlCol="0" anchor="ctr"/>
-          <a:lstStyle/>
-          <a:p>
-            <a:pPr marL="0" indent="0">
-              <a:buNone/>
-            </a:pPr>
-            <a:r>
-              <a:rPr lang="en-US" sz="1200" dirty="0">
-                <a:solidFill>
-                  <a:srgbClr val="6A9955"/>
+            <a:r>
+              <a:rPr lang="en-US" sz="1200" b="1" dirty="0">
+                <a:solidFill>
+                  <a:srgbClr val="9CDCFE"/>
                 </a:solidFill>
                 <a:latin typeface="Consolas" pitchFamily="34" charset="0"/>
                 <a:ea typeface="Consolas" pitchFamily="34" charset="-122"/>
                 <a:cs typeface="Consolas" pitchFamily="34" charset="-120"/>
               </a:rPr>
-              <a:t>  // Classe interne membre</a:t>
-            </a:r>
-            <a:endParaRPr lang="en-US" sz="1200" dirty="0"/>
-          </a:p>
-        </p:txBody>
-      </p:sp>
-      <p:sp>
-        <p:nvSpPr>
-          <p:cNvPr id="47" name="Text 10"/>
-          <p:cNvSpPr/>
-          <p:nvPr/>
-        </p:nvSpPr>
-        <p:spPr>
-          <a:xfrm>
-            <a:off x="388680" y="3339504"/>
-            <a:ext cx="5029200" cy="182880"/>
-          </a:xfrm>
-          <a:prstGeom prst="rect">
-            <a:avLst/>
-          </a:prstGeom>
-          <a:noFill/>
-          <a:ln/>
-        </p:spPr>
-        <p:txBody>
-          <a:bodyPr wrap="square" lIns="0" tIns="0" rIns="0" bIns="0" rtlCol="0" anchor="ctr"/>
-          <a:lstStyle/>
-          <a:p>
-            <a:pPr marL="0" indent="0">
-              <a:buNone/>
-            </a:pPr>
-            <a:r>
-              <a:rPr lang="en-US" sz="1200" dirty="0">
-                <a:solidFill>
-                  <a:srgbClr val="4EC9B0"/>
-                </a:solidFill>
+              <a:t>  </a:t>
+            </a:r>
+            <a:r>
+              <a:rPr lang="en-US" sz="1200" b="1" dirty="0">
                 <a:latin typeface="Consolas" pitchFamily="34" charset="0"/>
                 <a:ea typeface="Consolas" pitchFamily="34" charset="-122"/>
                 <a:cs typeface="Consolas" pitchFamily="34" charset="-120"/>
               </a:rPr>
-              <a:t>  class Transaction {</a:t>
-            </a:r>
-            <a:endParaRPr lang="en-US" sz="1200" dirty="0"/>
-          </a:p>
-        </p:txBody>
-      </p:sp>
-      <p:sp>
-        <p:nvSpPr>
-          <p:cNvPr id="82" name="Text 11"/>
-          <p:cNvSpPr/>
-          <p:nvPr/>
-        </p:nvSpPr>
-        <p:spPr>
-          <a:xfrm>
-            <a:off x="388680" y="3513240"/>
+              <a:t>private String titulaire;</a:t>
+            </a:r>
+            <a:endParaRPr lang="en-US" sz="1200" b="1" dirty="0"/>
+          </a:p>
+        </p:txBody>
+      </p:sp>
+      <p:sp>
+        <p:nvSpPr>
+          <p:cNvPr id="45" name="Text 8"/>
+          <p:cNvSpPr/>
+          <p:nvPr/>
+        </p:nvSpPr>
+        <p:spPr>
+          <a:xfrm>
+            <a:off x="388680" y="2992032"/>
             <a:ext cx="5029200" cy="182880"/>
           </a:xfrm>
           <a:prstGeom prst="rect">
@@ -16846,30 +16796,58 @@
             <a:pPr marL="0" indent="0">
               <a:buNone/>
             </a:pPr>
-            <a:r>
-              <a:rPr lang="en-US" sz="1200" dirty="0">
-                <a:solidFill>
-                  <a:srgbClr val="9CDCFE"/>
+            <a:endParaRPr lang="en-US" sz="1200" b="1" dirty="0"/>
+          </a:p>
+        </p:txBody>
+      </p:sp>
+      <p:sp>
+        <p:nvSpPr>
+          <p:cNvPr id="46" name="Text 9"/>
+          <p:cNvSpPr/>
+          <p:nvPr/>
+        </p:nvSpPr>
+        <p:spPr>
+          <a:xfrm>
+            <a:off x="388680" y="3165768"/>
+            <a:ext cx="5029200" cy="182880"/>
+          </a:xfrm>
+          <a:prstGeom prst="rect">
+            <a:avLst/>
+          </a:prstGeom>
+          <a:noFill/>
+          <a:ln/>
+        </p:spPr>
+        <p:txBody>
+          <a:bodyPr wrap="square" lIns="0" tIns="0" rIns="0" bIns="0" rtlCol="0" anchor="ctr"/>
+          <a:lstStyle/>
+          <a:p>
+            <a:pPr marL="0" indent="0">
+              <a:buNone/>
+            </a:pPr>
+            <a:r>
+              <a:rPr lang="en-US" sz="1200" b="1" dirty="0">
+                <a:solidFill>
+                  <a:srgbClr val="6A9955"/>
                 </a:solidFill>
                 <a:latin typeface="Consolas" pitchFamily="34" charset="0"/>
                 <a:ea typeface="Consolas" pitchFamily="34" charset="-122"/>
                 <a:cs typeface="Consolas" pitchFamily="34" charset="-120"/>
               </a:rPr>
-              <a:t>    double montant;</a:t>
-            </a:r>
-            <a:endParaRPr lang="en-US" sz="1200" dirty="0"/>
-          </a:p>
-        </p:txBody>
-      </p:sp>
-      <p:sp>
-        <p:nvSpPr>
-          <p:cNvPr id="83" name="Text 12"/>
-          <p:cNvSpPr/>
-          <p:nvPr/>
-        </p:nvSpPr>
-        <p:spPr>
-          <a:xfrm>
-            <a:off x="388680" y="3686976"/>
+              <a:t>  // Classe interne membre</a:t>
+            </a:r>
+            <a:endParaRPr lang="en-US" sz="1200" b="1" dirty="0"/>
+          </a:p>
+        </p:txBody>
+      </p:sp>
+      <p:sp>
+        <p:nvSpPr>
+          <p:cNvPr id="47" name="Text 10"/>
+          <p:cNvSpPr/>
+          <p:nvPr/>
+        </p:nvSpPr>
+        <p:spPr>
+          <a:xfrm>
+            <a:off x="388680" y="3339504"/>
             <a:ext cx="5029200" cy="182880"/>
           </a:xfrm>
           <a:prstGeom prst="rect">
@@ -16886,29 +16864,29 @@
               <a:buNone/>
             </a:pPr>
             <a:r>
-              <a:rPr lang="en-US" sz="1200" dirty="0">
-                <a:solidFill>
-                  <a:srgbClr val="9CDCFE"/>
+              <a:rPr lang="en-US" sz="1200" b="1" dirty="0">
+                <a:solidFill>
+                  <a:srgbClr val="4EC9B0"/>
                 </a:solidFill>
                 <a:latin typeface="Consolas" pitchFamily="34" charset="0"/>
                 <a:ea typeface="Consolas" pitchFamily="34" charset="-122"/>
                 <a:cs typeface="Consolas" pitchFamily="34" charset="-120"/>
               </a:rPr>
-              <a:t>    String type; // "debit"/"credit"</a:t>
-            </a:r>
-            <a:endParaRPr lang="en-US" sz="1200" dirty="0"/>
-          </a:p>
-        </p:txBody>
-      </p:sp>
-      <p:sp>
-        <p:nvSpPr>
-          <p:cNvPr id="84" name="Text 13"/>
-          <p:cNvSpPr/>
-          <p:nvPr/>
-        </p:nvSpPr>
-        <p:spPr>
-          <a:xfrm>
-            <a:off x="388680" y="3860712"/>
+              <a:t>  class Transaction {</a:t>
+            </a:r>
+            <a:endParaRPr lang="en-US" sz="1200" b="1" dirty="0"/>
+          </a:p>
+        </p:txBody>
+      </p:sp>
+      <p:sp>
+        <p:nvSpPr>
+          <p:cNvPr id="82" name="Text 11"/>
+          <p:cNvSpPr/>
+          <p:nvPr/>
+        </p:nvSpPr>
+        <p:spPr>
+          <a:xfrm>
+            <a:off x="388680" y="3513240"/>
             <a:ext cx="5029200" cy="182880"/>
           </a:xfrm>
           <a:prstGeom prst="rect">
@@ -16924,97 +16902,38 @@
             <a:pPr marL="0" indent="0">
               <a:buNone/>
             </a:pPr>
-            <a:endParaRPr lang="en-US" sz="1200" dirty="0"/>
-          </a:p>
-        </p:txBody>
-      </p:sp>
-      <p:sp>
-        <p:nvSpPr>
-          <p:cNvPr id="85" name="Text 14"/>
-          <p:cNvSpPr/>
-          <p:nvPr/>
-        </p:nvSpPr>
-        <p:spPr>
-          <a:xfrm>
-            <a:off x="388680" y="4034448"/>
-            <a:ext cx="5029200" cy="182880"/>
-          </a:xfrm>
-          <a:prstGeom prst="rect">
-            <a:avLst/>
-          </a:prstGeom>
-          <a:noFill/>
-          <a:ln/>
-        </p:spPr>
-        <p:txBody>
-          <a:bodyPr wrap="square" lIns="0" tIns="0" rIns="0" bIns="0" rtlCol="0" anchor="ctr"/>
-          <a:lstStyle/>
-          <a:p>
-            <a:pPr marL="0" indent="0">
-              <a:buNone/>
-            </a:pPr>
-            <a:r>
-              <a:rPr lang="en-US" sz="1200" dirty="0">
-                <a:solidFill>
-                  <a:srgbClr val="DCDCAA"/>
+            <a:r>
+              <a:rPr lang="en-US" sz="1200" b="1" dirty="0">
+                <a:solidFill>
+                  <a:srgbClr val="9CDCFE"/>
                 </a:solidFill>
                 <a:latin typeface="Consolas" pitchFamily="34" charset="0"/>
                 <a:ea typeface="Consolas" pitchFamily="34" charset="-122"/>
                 <a:cs typeface="Consolas" pitchFamily="34" charset="-120"/>
               </a:rPr>
-              <a:t>    void executer() {</a:t>
-            </a:r>
-            <a:endParaRPr lang="en-US" sz="1200" dirty="0"/>
-          </a:p>
-        </p:txBody>
-      </p:sp>
-      <p:sp>
-        <p:nvSpPr>
-          <p:cNvPr id="86" name="Text 15"/>
-          <p:cNvSpPr/>
-          <p:nvPr/>
-        </p:nvSpPr>
-        <p:spPr>
-          <a:xfrm>
-            <a:off x="388680" y="4208184"/>
-            <a:ext cx="5029200" cy="182880"/>
-          </a:xfrm>
-          <a:prstGeom prst="rect">
-            <a:avLst/>
-          </a:prstGeom>
-          <a:noFill/>
-          <a:ln/>
-        </p:spPr>
-        <p:txBody>
-          <a:bodyPr wrap="square" lIns="0" tIns="0" rIns="0" bIns="0" rtlCol="0" anchor="ctr"/>
-          <a:lstStyle/>
-          <a:p>
-            <a:pPr marL="0" indent="0">
-              <a:buNone/>
-            </a:pPr>
-            <a:r>
-              <a:rPr lang="en-US" sz="1200" dirty="0">
-                <a:solidFill>
-                  <a:srgbClr val="D4D4D4"/>
-                </a:solidFill>
+              <a:t>    </a:t>
+            </a:r>
+            <a:r>
+              <a:rPr lang="en-US" sz="1200" b="1" dirty="0">
                 <a:latin typeface="Consolas" pitchFamily="34" charset="0"/>
                 <a:ea typeface="Consolas" pitchFamily="34" charset="-122"/>
                 <a:cs typeface="Consolas" pitchFamily="34" charset="-120"/>
               </a:rPr>
-              <a:t>      if (type.equals("credit")) {</a:t>
-            </a:r>
-            <a:endParaRPr lang="en-US" sz="1200" dirty="0"/>
-          </a:p>
-        </p:txBody>
-      </p:sp>
-      <p:sp>
-        <p:nvSpPr>
-          <p:cNvPr id="87" name="Text 16"/>
-          <p:cNvSpPr/>
-          <p:nvPr/>
-        </p:nvSpPr>
-        <p:spPr>
-          <a:xfrm>
-            <a:off x="388680" y="4381920"/>
+              <a:t>double montant;</a:t>
+            </a:r>
+            <a:endParaRPr lang="en-US" sz="1200" b="1" dirty="0"/>
+          </a:p>
+        </p:txBody>
+      </p:sp>
+      <p:sp>
+        <p:nvSpPr>
+          <p:cNvPr id="83" name="Text 12"/>
+          <p:cNvSpPr/>
+          <p:nvPr/>
+        </p:nvSpPr>
+        <p:spPr>
+          <a:xfrm>
+            <a:off x="388680" y="3686976"/>
             <a:ext cx="5029200" cy="182880"/>
           </a:xfrm>
           <a:prstGeom prst="rect">
@@ -17031,29 +16950,26 @@
               <a:buNone/>
             </a:pPr>
             <a:r>
-              <a:rPr lang="en-US" sz="1200" dirty="0">
-                <a:solidFill>
-                  <a:srgbClr val="9CDCFE"/>
-                </a:solidFill>
+              <a:rPr lang="en-US" sz="1200" b="1" dirty="0">
                 <a:latin typeface="Consolas" pitchFamily="34" charset="0"/>
                 <a:ea typeface="Consolas" pitchFamily="34" charset="-122"/>
                 <a:cs typeface="Consolas" pitchFamily="34" charset="-120"/>
               </a:rPr>
-              <a:t>        solde += montant;</a:t>
-            </a:r>
-            <a:endParaRPr lang="en-US" sz="1200" dirty="0"/>
-          </a:p>
-        </p:txBody>
-      </p:sp>
-      <p:sp>
-        <p:nvSpPr>
-          <p:cNvPr id="88" name="Text 17"/>
-          <p:cNvSpPr/>
-          <p:nvPr/>
-        </p:nvSpPr>
-        <p:spPr>
-          <a:xfrm>
-            <a:off x="388680" y="4555656"/>
+              <a:t>    String type; // "debit"/"credit"</a:t>
+            </a:r>
+            <a:endParaRPr lang="en-US" sz="1200" b="1" dirty="0"/>
+          </a:p>
+        </p:txBody>
+      </p:sp>
+      <p:sp>
+        <p:nvSpPr>
+          <p:cNvPr id="84" name="Text 13"/>
+          <p:cNvSpPr/>
+          <p:nvPr/>
+        </p:nvSpPr>
+        <p:spPr>
+          <a:xfrm>
+            <a:off x="388680" y="3860712"/>
             <a:ext cx="5029200" cy="182880"/>
           </a:xfrm>
           <a:prstGeom prst="rect">
@@ -17069,69 +16985,73 @@
             <a:pPr marL="0" indent="0">
               <a:buNone/>
             </a:pPr>
-            <a:r>
-              <a:rPr lang="en-US" sz="1200" dirty="0">
-                <a:solidFill>
-                  <a:srgbClr val="D4D4D4"/>
+            <a:endParaRPr lang="en-US" sz="1200" b="1" dirty="0"/>
+          </a:p>
+        </p:txBody>
+      </p:sp>
+      <p:sp>
+        <p:nvSpPr>
+          <p:cNvPr id="85" name="Text 14"/>
+          <p:cNvSpPr/>
+          <p:nvPr/>
+        </p:nvSpPr>
+        <p:spPr>
+          <a:xfrm>
+            <a:off x="388680" y="4034448"/>
+            <a:ext cx="5029200" cy="182880"/>
+          </a:xfrm>
+          <a:prstGeom prst="rect">
+            <a:avLst/>
+          </a:prstGeom>
+          <a:noFill/>
+          <a:ln/>
+        </p:spPr>
+        <p:txBody>
+          <a:bodyPr wrap="square" lIns="0" tIns="0" rIns="0" bIns="0" rtlCol="0" anchor="ctr"/>
+          <a:lstStyle/>
+          <a:p>
+            <a:pPr marL="0" indent="0">
+              <a:buNone/>
+            </a:pPr>
+            <a:r>
+              <a:rPr lang="en-US" sz="1200" b="1" dirty="0">
+                <a:solidFill>
+                  <a:srgbClr val="DCDCAA"/>
                 </a:solidFill>
                 <a:latin typeface="Consolas" pitchFamily="34" charset="0"/>
                 <a:ea typeface="Consolas" pitchFamily="34" charset="-122"/>
                 <a:cs typeface="Consolas" pitchFamily="34" charset="-120"/>
               </a:rPr>
-              <a:t>      } else {</a:t>
-            </a:r>
-            <a:endParaRPr lang="en-US" sz="1200" dirty="0"/>
-          </a:p>
-        </p:txBody>
-      </p:sp>
-      <p:sp>
-        <p:nvSpPr>
-          <p:cNvPr id="89" name="Text 18"/>
-          <p:cNvSpPr/>
-          <p:nvPr/>
-        </p:nvSpPr>
-        <p:spPr>
-          <a:xfrm>
-            <a:off x="388680" y="4729392"/>
-            <a:ext cx="5029200" cy="182880"/>
-          </a:xfrm>
-          <a:prstGeom prst="rect">
-            <a:avLst/>
-          </a:prstGeom>
-          <a:noFill/>
-          <a:ln/>
-        </p:spPr>
-        <p:txBody>
-          <a:bodyPr wrap="square" lIns="0" tIns="0" rIns="0" bIns="0" rtlCol="0" anchor="ctr"/>
-          <a:lstStyle/>
-          <a:p>
-            <a:pPr marL="0" indent="0">
-              <a:buNone/>
-            </a:pPr>
-            <a:r>
-              <a:rPr lang="en-US" sz="1200" dirty="0">
-                <a:solidFill>
-                  <a:srgbClr val="9CDCFE"/>
+              <a:t>    </a:t>
+            </a:r>
+            <a:r>
+              <a:rPr lang="en-US" sz="1200" b="1" dirty="0">
+                <a:solidFill>
+                  <a:srgbClr val="FF0000"/>
                 </a:solidFill>
                 <a:latin typeface="Consolas" pitchFamily="34" charset="0"/>
                 <a:ea typeface="Consolas" pitchFamily="34" charset="-122"/>
                 <a:cs typeface="Consolas" pitchFamily="34" charset="-120"/>
               </a:rPr>
-              <a:t>        solde -= montant;</a:t>
-            </a:r>
-            <a:endParaRPr lang="en-US" sz="1200" dirty="0"/>
-          </a:p>
-        </p:txBody>
-      </p:sp>
-      <p:sp>
-        <p:nvSpPr>
-          <p:cNvPr id="90" name="Text 19"/>
-          <p:cNvSpPr/>
-          <p:nvPr/>
-        </p:nvSpPr>
-        <p:spPr>
-          <a:xfrm>
-            <a:off x="388680" y="4903128"/>
+              <a:t>void executer() {</a:t>
+            </a:r>
+            <a:endParaRPr lang="en-US" sz="1200" b="1" dirty="0">
+              <a:solidFill>
+                <a:srgbClr val="FF0000"/>
+              </a:solidFill>
+            </a:endParaRPr>
+          </a:p>
+        </p:txBody>
+      </p:sp>
+      <p:sp>
+        <p:nvSpPr>
+          <p:cNvPr id="86" name="Text 15"/>
+          <p:cNvSpPr/>
+          <p:nvPr/>
+        </p:nvSpPr>
+        <p:spPr>
+          <a:xfrm>
+            <a:off x="388680" y="4208184"/>
             <a:ext cx="5029200" cy="182880"/>
           </a:xfrm>
           <a:prstGeom prst="rect">
@@ -17148,29 +17068,33 @@
               <a:buNone/>
             </a:pPr>
             <a:r>
-              <a:rPr lang="en-US" sz="1200" dirty="0">
-                <a:solidFill>
-                  <a:srgbClr val="D4D4D4"/>
+              <a:rPr lang="en-US" sz="1200" b="1" dirty="0">
+                <a:solidFill>
+                  <a:srgbClr val="FF0000"/>
                 </a:solidFill>
                 <a:latin typeface="Consolas" pitchFamily="34" charset="0"/>
                 <a:ea typeface="Consolas" pitchFamily="34" charset="-122"/>
                 <a:cs typeface="Consolas" pitchFamily="34" charset="-120"/>
               </a:rPr>
-              <a:t>      }</a:t>
-            </a:r>
-            <a:endParaRPr lang="en-US" sz="1200" dirty="0"/>
-          </a:p>
-        </p:txBody>
-      </p:sp>
-      <p:sp>
-        <p:nvSpPr>
-          <p:cNvPr id="91" name="Text 20"/>
-          <p:cNvSpPr/>
-          <p:nvPr/>
-        </p:nvSpPr>
-        <p:spPr>
-          <a:xfrm>
-            <a:off x="388680" y="5076864"/>
+              <a:t>      if (type.equals("credit")) {</a:t>
+            </a:r>
+            <a:endParaRPr lang="en-US" sz="1200" b="1" dirty="0">
+              <a:solidFill>
+                <a:srgbClr val="FF0000"/>
+              </a:solidFill>
+            </a:endParaRPr>
+          </a:p>
+        </p:txBody>
+      </p:sp>
+      <p:sp>
+        <p:nvSpPr>
+          <p:cNvPr id="87" name="Text 16"/>
+          <p:cNvSpPr/>
+          <p:nvPr/>
+        </p:nvSpPr>
+        <p:spPr>
+          <a:xfrm>
+            <a:off x="388680" y="4381920"/>
             <a:ext cx="5029200" cy="182880"/>
           </a:xfrm>
           <a:prstGeom prst="rect">
@@ -17187,68 +17111,37 @@
               <a:buNone/>
             </a:pPr>
             <a:r>
-              <a:rPr lang="en-US" sz="1200" dirty="0">
-                <a:solidFill>
-                  <a:srgbClr val="D4D4D4"/>
+              <a:rPr lang="en-US" sz="1200" b="1" dirty="0">
+                <a:solidFill>
+                  <a:srgbClr val="9CDCFE"/>
                 </a:solidFill>
                 <a:latin typeface="Consolas" pitchFamily="34" charset="0"/>
                 <a:ea typeface="Consolas" pitchFamily="34" charset="-122"/>
                 <a:cs typeface="Consolas" pitchFamily="34" charset="-120"/>
               </a:rPr>
-              <a:t>    }</a:t>
-            </a:r>
-            <a:endParaRPr lang="en-US" sz="1200" dirty="0"/>
-          </a:p>
-        </p:txBody>
-      </p:sp>
-      <p:sp>
-        <p:nvSpPr>
-          <p:cNvPr id="92" name="Text 21"/>
-          <p:cNvSpPr/>
-          <p:nvPr/>
-        </p:nvSpPr>
-        <p:spPr>
-          <a:xfrm>
-            <a:off x="388680" y="5250600"/>
-            <a:ext cx="5029200" cy="182880"/>
-          </a:xfrm>
-          <a:prstGeom prst="rect">
-            <a:avLst/>
-          </a:prstGeom>
-          <a:noFill/>
-          <a:ln/>
-        </p:spPr>
-        <p:txBody>
-          <a:bodyPr wrap="square" lIns="0" tIns="0" rIns="0" bIns="0" rtlCol="0" anchor="ctr"/>
-          <a:lstStyle/>
-          <a:p>
-            <a:pPr marL="0" indent="0">
-              <a:buNone/>
-            </a:pPr>
-            <a:r>
-              <a:rPr lang="en-US" sz="1200" dirty="0">
-                <a:solidFill>
-                  <a:srgbClr val="4EC9B0"/>
-                </a:solidFill>
+              <a:t>        </a:t>
+            </a:r>
+            <a:r>
+              <a:rPr lang="en-US" sz="1200" b="1" dirty="0">
                 <a:latin typeface="Consolas" pitchFamily="34" charset="0"/>
                 <a:ea typeface="Consolas" pitchFamily="34" charset="-122"/>
                 <a:cs typeface="Consolas" pitchFamily="34" charset="-120"/>
               </a:rPr>
-              <a:t>  }</a:t>
-            </a:r>
-            <a:endParaRPr lang="en-US" sz="1200" dirty="0"/>
-          </a:p>
-        </p:txBody>
-      </p:sp>
-      <p:sp>
-        <p:nvSpPr>
-          <p:cNvPr id="93" name="Text 22"/>
-          <p:cNvSpPr/>
-          <p:nvPr/>
-        </p:nvSpPr>
-        <p:spPr>
-          <a:xfrm>
-            <a:off x="388680" y="5424336"/>
+              <a:t>solde += montant;</a:t>
+            </a:r>
+            <a:endParaRPr lang="en-US" sz="1200" b="1" dirty="0"/>
+          </a:p>
+        </p:txBody>
+      </p:sp>
+      <p:sp>
+        <p:nvSpPr>
+          <p:cNvPr id="88" name="Text 17"/>
+          <p:cNvSpPr/>
+          <p:nvPr/>
+        </p:nvSpPr>
+        <p:spPr>
+          <a:xfrm>
+            <a:off x="388680" y="4555656"/>
             <a:ext cx="5029200" cy="182880"/>
           </a:xfrm>
           <a:prstGeom prst="rect">
@@ -17265,17 +17158,228 @@
               <a:buNone/>
             </a:pPr>
             <a:r>
-              <a:rPr lang="en-US" sz="1200" dirty="0">
-                <a:solidFill>
-                  <a:srgbClr val="4EC9B0"/>
+              <a:rPr lang="en-US" sz="1200" b="1" dirty="0">
+                <a:solidFill>
+                  <a:srgbClr val="D4D4D4"/>
                 </a:solidFill>
                 <a:latin typeface="Consolas" pitchFamily="34" charset="0"/>
                 <a:ea typeface="Consolas" pitchFamily="34" charset="-122"/>
                 <a:cs typeface="Consolas" pitchFamily="34" charset="-120"/>
               </a:rPr>
+              <a:t>      </a:t>
+            </a:r>
+            <a:r>
+              <a:rPr lang="en-US" sz="1200" b="1" dirty="0">
+                <a:latin typeface="Consolas" pitchFamily="34" charset="0"/>
+                <a:ea typeface="Consolas" pitchFamily="34" charset="-122"/>
+                <a:cs typeface="Consolas" pitchFamily="34" charset="-120"/>
+              </a:rPr>
+              <a:t>} else {</a:t>
+            </a:r>
+            <a:endParaRPr lang="en-US" sz="1200" b="1" dirty="0"/>
+          </a:p>
+        </p:txBody>
+      </p:sp>
+      <p:sp>
+        <p:nvSpPr>
+          <p:cNvPr id="89" name="Text 18"/>
+          <p:cNvSpPr/>
+          <p:nvPr/>
+        </p:nvSpPr>
+        <p:spPr>
+          <a:xfrm>
+            <a:off x="388680" y="4729392"/>
+            <a:ext cx="5029200" cy="182880"/>
+          </a:xfrm>
+          <a:prstGeom prst="rect">
+            <a:avLst/>
+          </a:prstGeom>
+          <a:noFill/>
+          <a:ln/>
+        </p:spPr>
+        <p:txBody>
+          <a:bodyPr wrap="square" lIns="0" tIns="0" rIns="0" bIns="0" rtlCol="0" anchor="ctr"/>
+          <a:lstStyle/>
+          <a:p>
+            <a:pPr marL="0" indent="0">
+              <a:buNone/>
+            </a:pPr>
+            <a:r>
+              <a:rPr lang="en-US" sz="1200" b="1" dirty="0">
+                <a:solidFill>
+                  <a:srgbClr val="9CDCFE"/>
+                </a:solidFill>
+                <a:latin typeface="Consolas" pitchFamily="34" charset="0"/>
+                <a:ea typeface="Consolas" pitchFamily="34" charset="-122"/>
+                <a:cs typeface="Consolas" pitchFamily="34" charset="-120"/>
+              </a:rPr>
+              <a:t>        </a:t>
+            </a:r>
+            <a:r>
+              <a:rPr lang="en-US" sz="1200" b="1" dirty="0">
+                <a:latin typeface="Consolas" pitchFamily="34" charset="0"/>
+                <a:ea typeface="Consolas" pitchFamily="34" charset="-122"/>
+                <a:cs typeface="Consolas" pitchFamily="34" charset="-120"/>
+              </a:rPr>
+              <a:t>solde -= montant;</a:t>
+            </a:r>
+            <a:endParaRPr lang="en-US" sz="1200" b="1" dirty="0"/>
+          </a:p>
+        </p:txBody>
+      </p:sp>
+      <p:sp>
+        <p:nvSpPr>
+          <p:cNvPr id="90" name="Text 19"/>
+          <p:cNvSpPr/>
+          <p:nvPr/>
+        </p:nvSpPr>
+        <p:spPr>
+          <a:xfrm>
+            <a:off x="388680" y="4903128"/>
+            <a:ext cx="5029200" cy="182880"/>
+          </a:xfrm>
+          <a:prstGeom prst="rect">
+            <a:avLst/>
+          </a:prstGeom>
+          <a:noFill/>
+          <a:ln/>
+        </p:spPr>
+        <p:txBody>
+          <a:bodyPr wrap="square" lIns="0" tIns="0" rIns="0" bIns="0" rtlCol="0" anchor="ctr"/>
+          <a:lstStyle/>
+          <a:p>
+            <a:pPr marL="0" indent="0">
+              <a:buNone/>
+            </a:pPr>
+            <a:r>
+              <a:rPr lang="en-US" sz="1200" b="1" dirty="0">
+                <a:solidFill>
+                  <a:srgbClr val="D4D4D4"/>
+                </a:solidFill>
+                <a:latin typeface="Consolas" pitchFamily="34" charset="0"/>
+                <a:ea typeface="Consolas" pitchFamily="34" charset="-122"/>
+                <a:cs typeface="Consolas" pitchFamily="34" charset="-120"/>
+              </a:rPr>
+              <a:t>      }</a:t>
+            </a:r>
+            <a:endParaRPr lang="en-US" sz="1200" b="1" dirty="0"/>
+          </a:p>
+        </p:txBody>
+      </p:sp>
+      <p:sp>
+        <p:nvSpPr>
+          <p:cNvPr id="91" name="Text 20"/>
+          <p:cNvSpPr/>
+          <p:nvPr/>
+        </p:nvSpPr>
+        <p:spPr>
+          <a:xfrm>
+            <a:off x="388680" y="5076864"/>
+            <a:ext cx="5029200" cy="182880"/>
+          </a:xfrm>
+          <a:prstGeom prst="rect">
+            <a:avLst/>
+          </a:prstGeom>
+          <a:noFill/>
+          <a:ln/>
+        </p:spPr>
+        <p:txBody>
+          <a:bodyPr wrap="square" lIns="0" tIns="0" rIns="0" bIns="0" rtlCol="0" anchor="ctr"/>
+          <a:lstStyle/>
+          <a:p>
+            <a:pPr marL="0" indent="0">
+              <a:buNone/>
+            </a:pPr>
+            <a:r>
+              <a:rPr lang="en-US" sz="1200" b="1" dirty="0">
+                <a:solidFill>
+                  <a:srgbClr val="D4D4D4"/>
+                </a:solidFill>
+                <a:latin typeface="Consolas" pitchFamily="34" charset="0"/>
+                <a:ea typeface="Consolas" pitchFamily="34" charset="-122"/>
+                <a:cs typeface="Consolas" pitchFamily="34" charset="-120"/>
+              </a:rPr>
+              <a:t>    }</a:t>
+            </a:r>
+            <a:endParaRPr lang="en-US" sz="1200" b="1" dirty="0"/>
+          </a:p>
+        </p:txBody>
+      </p:sp>
+      <p:sp>
+        <p:nvSpPr>
+          <p:cNvPr id="92" name="Text 21"/>
+          <p:cNvSpPr/>
+          <p:nvPr/>
+        </p:nvSpPr>
+        <p:spPr>
+          <a:xfrm>
+            <a:off x="388680" y="5250600"/>
+            <a:ext cx="5029200" cy="182880"/>
+          </a:xfrm>
+          <a:prstGeom prst="rect">
+            <a:avLst/>
+          </a:prstGeom>
+          <a:noFill/>
+          <a:ln/>
+        </p:spPr>
+        <p:txBody>
+          <a:bodyPr wrap="square" lIns="0" tIns="0" rIns="0" bIns="0" rtlCol="0" anchor="ctr"/>
+          <a:lstStyle/>
+          <a:p>
+            <a:pPr marL="0" indent="0">
+              <a:buNone/>
+            </a:pPr>
+            <a:r>
+              <a:rPr lang="en-US" sz="1200" b="1" dirty="0">
+                <a:solidFill>
+                  <a:srgbClr val="4EC9B0"/>
+                </a:solidFill>
+                <a:latin typeface="Consolas" pitchFamily="34" charset="0"/>
+                <a:ea typeface="Consolas" pitchFamily="34" charset="-122"/>
+                <a:cs typeface="Consolas" pitchFamily="34" charset="-120"/>
+              </a:rPr>
+              <a:t>  }</a:t>
+            </a:r>
+            <a:endParaRPr lang="en-US" sz="1200" b="1" dirty="0"/>
+          </a:p>
+        </p:txBody>
+      </p:sp>
+      <p:sp>
+        <p:nvSpPr>
+          <p:cNvPr id="93" name="Text 22"/>
+          <p:cNvSpPr/>
+          <p:nvPr/>
+        </p:nvSpPr>
+        <p:spPr>
+          <a:xfrm>
+            <a:off x="388680" y="5424336"/>
+            <a:ext cx="5029200" cy="182880"/>
+          </a:xfrm>
+          <a:prstGeom prst="rect">
+            <a:avLst/>
+          </a:prstGeom>
+          <a:noFill/>
+          <a:ln/>
+        </p:spPr>
+        <p:txBody>
+          <a:bodyPr wrap="square" lIns="0" tIns="0" rIns="0" bIns="0" rtlCol="0" anchor="ctr"/>
+          <a:lstStyle/>
+          <a:p>
+            <a:pPr marL="0" indent="0">
+              <a:buNone/>
+            </a:pPr>
+            <a:r>
+              <a:rPr lang="en-US" sz="1200" b="1" dirty="0">
+                <a:solidFill>
+                  <a:srgbClr val="4EC9B0"/>
+                </a:solidFill>
+                <a:latin typeface="Consolas" pitchFamily="34" charset="0"/>
+                <a:ea typeface="Consolas" pitchFamily="34" charset="-122"/>
+                <a:cs typeface="Consolas" pitchFamily="34" charset="-120"/>
+              </a:rPr>
               <a:t>}</a:t>
             </a:r>
-            <a:endParaRPr lang="en-US" sz="1200" dirty="0"/>
+            <a:endParaRPr lang="en-US" sz="1200" b="1" dirty="0"/>
           </a:p>
         </p:txBody>
       </p:sp>
@@ -18850,14 +18954,14 @@
         </p:nvSpPr>
         <p:spPr>
           <a:xfrm>
-            <a:off x="4366117" y="941831"/>
+            <a:off x="4251960" y="892690"/>
             <a:ext cx="4434840" cy="4431385"/>
           </a:xfrm>
           <a:prstGeom prst="rect">
             <a:avLst/>
           </a:prstGeom>
           <a:solidFill>
-            <a:srgbClr val="1E1E3F"/>
+            <a:schemeClr val="bg1"/>
           </a:solidFill>
           <a:ln/>
           <a:effectLst>
@@ -18894,7 +18998,7 @@
               <a:buNone/>
             </a:pPr>
             <a:r>
-              <a:rPr lang="en-US" sz="1300" b="1" dirty="0">
+              <a:rPr lang="en-US" sz="1400" b="1" dirty="0">
                 <a:solidFill>
                   <a:srgbClr val="7F8FD6"/>
                 </a:solidFill>
@@ -18904,7 +19008,7 @@
               </a:rPr>
               <a:t>Syntaxe générale</a:t>
             </a:r>
-            <a:endParaRPr lang="en-US" sz="1300" dirty="0"/>
+            <a:endParaRPr lang="en-US" sz="1400" dirty="0"/>
           </a:p>
         </p:txBody>
       </p:sp>
@@ -18933,7 +19037,7 @@
               <a:buNone/>
             </a:pPr>
             <a:r>
-              <a:rPr lang="en-US" sz="1150" dirty="0">
+              <a:rPr lang="en-US" sz="1400" dirty="0">
                 <a:solidFill>
                   <a:srgbClr val="569CD6"/>
                 </a:solidFill>
@@ -18943,7 +19047,7 @@
               </a:rPr>
               <a:t>Interface</a:t>
             </a:r>
-            <a:endParaRPr lang="en-US" sz="1150" dirty="0"/>
+            <a:endParaRPr lang="en-US" sz="1400" dirty="0"/>
           </a:p>
         </p:txBody>
       </p:sp>
@@ -18972,7 +19076,7 @@
               <a:buNone/>
             </a:pPr>
             <a:r>
-              <a:rPr lang="en-US" sz="1150" dirty="0">
+              <a:rPr lang="en-US" sz="1400" dirty="0">
                 <a:solidFill>
                   <a:srgbClr val="D4D4D4"/>
                 </a:solidFill>
@@ -18980,60 +19084,29 @@
                 <a:ea typeface="Consolas" pitchFamily="34" charset="-122"/>
                 <a:cs typeface="Consolas" pitchFamily="34" charset="-120"/>
               </a:rPr>
-              <a:t>  monObjet = new</a:t>
-            </a:r>
-            <a:endParaRPr lang="en-US" sz="1150" dirty="0"/>
-          </a:p>
-        </p:txBody>
-      </p:sp>
-      <p:sp>
-        <p:nvSpPr>
-          <p:cNvPr id="28" name="Text 18"/>
-          <p:cNvSpPr/>
-          <p:nvPr/>
-        </p:nvSpPr>
-        <p:spPr>
-          <a:xfrm>
-            <a:off x="4617720" y="1883663"/>
-            <a:ext cx="4160520" cy="401185"/>
-          </a:xfrm>
-          <a:prstGeom prst="rect">
-            <a:avLst/>
-          </a:prstGeom>
-          <a:noFill/>
-          <a:ln/>
-        </p:spPr>
-        <p:txBody>
-          <a:bodyPr wrap="square" lIns="0" tIns="0" rIns="0" bIns="0" rtlCol="0" anchor="ctr"/>
-          <a:lstStyle/>
-          <a:p>
-            <a:pPr marL="0" indent="0">
-              <a:buNone/>
-            </a:pPr>
-            <a:r>
-              <a:rPr lang="en-US" sz="1150" dirty="0">
-                <a:solidFill>
-                  <a:srgbClr val="4EC9B0"/>
-                </a:solidFill>
+              <a:t>  </a:t>
+            </a:r>
+            <a:r>
+              <a:rPr lang="en-US" sz="1400" dirty="0">
                 <a:latin typeface="Consolas" pitchFamily="34" charset="0"/>
                 <a:ea typeface="Consolas" pitchFamily="34" charset="-122"/>
                 <a:cs typeface="Consolas" pitchFamily="34" charset="-120"/>
               </a:rPr>
-              <a:t>  Interface()</a:t>
-            </a:r>
-            <a:endParaRPr lang="en-US" sz="1150" dirty="0"/>
-          </a:p>
-        </p:txBody>
-      </p:sp>
-      <p:sp>
-        <p:nvSpPr>
-          <p:cNvPr id="29" name="Text 19"/>
-          <p:cNvSpPr/>
-          <p:nvPr/>
-        </p:nvSpPr>
-        <p:spPr>
-          <a:xfrm>
-            <a:off x="4617720" y="2139695"/>
+              <a:t>monObjet = new</a:t>
+            </a:r>
+            <a:endParaRPr lang="en-US" sz="1400" dirty="0"/>
+          </a:p>
+        </p:txBody>
+      </p:sp>
+      <p:sp>
+        <p:nvSpPr>
+          <p:cNvPr id="28" name="Text 18"/>
+          <p:cNvSpPr/>
+          <p:nvPr/>
+        </p:nvSpPr>
+        <p:spPr>
+          <a:xfrm>
+            <a:off x="6300192" y="1625998"/>
             <a:ext cx="4160520" cy="401185"/>
           </a:xfrm>
           <a:prstGeom prst="rect">
@@ -19050,29 +19123,29 @@
               <a:buNone/>
             </a:pPr>
             <a:r>
-              <a:rPr lang="en-US" sz="1150" dirty="0">
-                <a:solidFill>
-                  <a:srgbClr val="D4D4D4"/>
+              <a:rPr lang="en-US" sz="1400" dirty="0">
+                <a:solidFill>
+                  <a:srgbClr val="4EC9B0"/>
                 </a:solidFill>
                 <a:latin typeface="Consolas" pitchFamily="34" charset="0"/>
                 <a:ea typeface="Consolas" pitchFamily="34" charset="-122"/>
                 <a:cs typeface="Consolas" pitchFamily="34" charset="-120"/>
               </a:rPr>
-              <a:t>  {</a:t>
-            </a:r>
-            <a:endParaRPr lang="en-US" sz="1150" dirty="0"/>
-          </a:p>
-        </p:txBody>
-      </p:sp>
-      <p:sp>
-        <p:nvSpPr>
-          <p:cNvPr id="30" name="Text 20"/>
-          <p:cNvSpPr/>
-          <p:nvPr/>
-        </p:nvSpPr>
-        <p:spPr>
-          <a:xfrm>
-            <a:off x="4617720" y="2395727"/>
+              <a:t>  Interface()</a:t>
+            </a:r>
+            <a:endParaRPr lang="en-US" sz="1400" dirty="0"/>
+          </a:p>
+        </p:txBody>
+      </p:sp>
+      <p:sp>
+        <p:nvSpPr>
+          <p:cNvPr id="29" name="Text 19"/>
+          <p:cNvSpPr/>
+          <p:nvPr/>
+        </p:nvSpPr>
+        <p:spPr>
+          <a:xfrm>
+            <a:off x="4617720" y="2139695"/>
             <a:ext cx="4160520" cy="401185"/>
           </a:xfrm>
           <a:prstGeom prst="rect">
@@ -19089,29 +19162,29 @@
               <a:buNone/>
             </a:pPr>
             <a:r>
-              <a:rPr lang="en-US" sz="1150" dirty="0">
-                <a:solidFill>
-                  <a:srgbClr val="C586C0"/>
+              <a:rPr lang="en-US" sz="1400" dirty="0">
+                <a:solidFill>
+                  <a:srgbClr val="D4D4D4"/>
                 </a:solidFill>
                 <a:latin typeface="Consolas" pitchFamily="34" charset="0"/>
                 <a:ea typeface="Consolas" pitchFamily="34" charset="-122"/>
                 <a:cs typeface="Consolas" pitchFamily="34" charset="-120"/>
               </a:rPr>
-              <a:t>    @Override</a:t>
-            </a:r>
-            <a:endParaRPr lang="en-US" sz="1150" dirty="0"/>
-          </a:p>
-        </p:txBody>
-      </p:sp>
-      <p:sp>
-        <p:nvSpPr>
-          <p:cNvPr id="31" name="Text 21"/>
-          <p:cNvSpPr/>
-          <p:nvPr/>
-        </p:nvSpPr>
-        <p:spPr>
-          <a:xfrm>
-            <a:off x="4617720" y="2651759"/>
+              <a:t>  {</a:t>
+            </a:r>
+            <a:endParaRPr lang="en-US" sz="1400" dirty="0"/>
+          </a:p>
+        </p:txBody>
+      </p:sp>
+      <p:sp>
+        <p:nvSpPr>
+          <p:cNvPr id="30" name="Text 20"/>
+          <p:cNvSpPr/>
+          <p:nvPr/>
+        </p:nvSpPr>
+        <p:spPr>
+          <a:xfrm>
+            <a:off x="4617720" y="2395727"/>
             <a:ext cx="4160520" cy="401185"/>
           </a:xfrm>
           <a:prstGeom prst="rect">
@@ -19128,29 +19201,29 @@
               <a:buNone/>
             </a:pPr>
             <a:r>
-              <a:rPr lang="en-US" sz="1150" dirty="0">
-                <a:solidFill>
-                  <a:srgbClr val="569CD6"/>
+              <a:rPr lang="en-US" sz="1400" dirty="0">
+                <a:solidFill>
+                  <a:srgbClr val="C586C0"/>
                 </a:solidFill>
                 <a:latin typeface="Consolas" pitchFamily="34" charset="0"/>
                 <a:ea typeface="Consolas" pitchFamily="34" charset="-122"/>
                 <a:cs typeface="Consolas" pitchFamily="34" charset="-120"/>
               </a:rPr>
-              <a:t>    public void</a:t>
-            </a:r>
-            <a:endParaRPr lang="en-US" sz="1150" dirty="0"/>
-          </a:p>
-        </p:txBody>
-      </p:sp>
-      <p:sp>
-        <p:nvSpPr>
-          <p:cNvPr id="32" name="Text 22"/>
-          <p:cNvSpPr/>
-          <p:nvPr/>
-        </p:nvSpPr>
-        <p:spPr>
-          <a:xfrm>
-            <a:off x="4617720" y="2907791"/>
+              <a:t>    @Override</a:t>
+            </a:r>
+            <a:endParaRPr lang="en-US" sz="1400" dirty="0"/>
+          </a:p>
+        </p:txBody>
+      </p:sp>
+      <p:sp>
+        <p:nvSpPr>
+          <p:cNvPr id="31" name="Text 21"/>
+          <p:cNvSpPr/>
+          <p:nvPr/>
+        </p:nvSpPr>
+        <p:spPr>
+          <a:xfrm>
+            <a:off x="4617720" y="2651759"/>
             <a:ext cx="4160520" cy="401185"/>
           </a:xfrm>
           <a:prstGeom prst="rect">
@@ -19167,29 +19240,29 @@
               <a:buNone/>
             </a:pPr>
             <a:r>
-              <a:rPr lang="en-US" sz="1150" dirty="0">
-                <a:solidFill>
-                  <a:srgbClr val="D4D4D4"/>
+              <a:rPr lang="en-US" sz="1400" dirty="0">
+                <a:solidFill>
+                  <a:srgbClr val="569CD6"/>
                 </a:solidFill>
                 <a:latin typeface="Consolas" pitchFamily="34" charset="0"/>
                 <a:ea typeface="Consolas" pitchFamily="34" charset="-122"/>
                 <a:cs typeface="Consolas" pitchFamily="34" charset="-120"/>
               </a:rPr>
-              <a:t>    methode() {</a:t>
-            </a:r>
-            <a:endParaRPr lang="en-US" sz="1150" dirty="0"/>
-          </a:p>
-        </p:txBody>
-      </p:sp>
-      <p:sp>
-        <p:nvSpPr>
-          <p:cNvPr id="33" name="Text 23"/>
-          <p:cNvSpPr/>
-          <p:nvPr/>
-        </p:nvSpPr>
-        <p:spPr>
-          <a:xfrm>
-            <a:off x="4617720" y="3163823"/>
+              <a:t>    public void</a:t>
+            </a:r>
+            <a:endParaRPr lang="en-US" sz="1400" dirty="0"/>
+          </a:p>
+        </p:txBody>
+      </p:sp>
+      <p:sp>
+        <p:nvSpPr>
+          <p:cNvPr id="32" name="Text 22"/>
+          <p:cNvSpPr/>
+          <p:nvPr/>
+        </p:nvSpPr>
+        <p:spPr>
+          <a:xfrm>
+            <a:off x="4617720" y="2907791"/>
             <a:ext cx="4160520" cy="401185"/>
           </a:xfrm>
           <a:prstGeom prst="rect">
@@ -19206,68 +19279,37 @@
               <a:buNone/>
             </a:pPr>
             <a:r>
-              <a:rPr lang="en-US" sz="1150" dirty="0">
-                <a:solidFill>
-                  <a:srgbClr val="6A9955"/>
+              <a:rPr lang="en-US" sz="1400" dirty="0">
+                <a:solidFill>
+                  <a:srgbClr val="D4D4D4"/>
                 </a:solidFill>
                 <a:latin typeface="Consolas" pitchFamily="34" charset="0"/>
                 <a:ea typeface="Consolas" pitchFamily="34" charset="-122"/>
                 <a:cs typeface="Consolas" pitchFamily="34" charset="-120"/>
               </a:rPr>
-              <a:t>      // Code</a:t>
-            </a:r>
-            <a:endParaRPr lang="en-US" sz="1150" dirty="0"/>
-          </a:p>
-        </p:txBody>
-      </p:sp>
-      <p:sp>
-        <p:nvSpPr>
-          <p:cNvPr id="34" name="Text 24"/>
-          <p:cNvSpPr/>
-          <p:nvPr/>
-        </p:nvSpPr>
-        <p:spPr>
-          <a:xfrm>
-            <a:off x="4617720" y="3419855"/>
-            <a:ext cx="4160520" cy="401185"/>
-          </a:xfrm>
-          <a:prstGeom prst="rect">
-            <a:avLst/>
-          </a:prstGeom>
-          <a:noFill/>
-          <a:ln/>
-        </p:spPr>
-        <p:txBody>
-          <a:bodyPr wrap="square" lIns="0" tIns="0" rIns="0" bIns="0" rtlCol="0" anchor="ctr"/>
-          <a:lstStyle/>
-          <a:p>
-            <a:pPr marL="0" indent="0">
-              <a:buNone/>
-            </a:pPr>
-            <a:r>
-              <a:rPr lang="en-US" sz="1150" dirty="0">
-                <a:solidFill>
-                  <a:srgbClr val="D4D4D4"/>
-                </a:solidFill>
+              <a:t>    </a:t>
+            </a:r>
+            <a:r>
+              <a:rPr lang="en-US" sz="1400" b="1" dirty="0">
                 <a:latin typeface="Consolas" pitchFamily="34" charset="0"/>
                 <a:ea typeface="Consolas" pitchFamily="34" charset="-122"/>
                 <a:cs typeface="Consolas" pitchFamily="34" charset="-120"/>
               </a:rPr>
-              <a:t>    }</a:t>
-            </a:r>
-            <a:endParaRPr lang="en-US" sz="1150" dirty="0"/>
-          </a:p>
-        </p:txBody>
-      </p:sp>
-      <p:sp>
-        <p:nvSpPr>
-          <p:cNvPr id="35" name="Text 25"/>
-          <p:cNvSpPr/>
-          <p:nvPr/>
-        </p:nvSpPr>
-        <p:spPr>
-          <a:xfrm>
-            <a:off x="4617720" y="3675887"/>
+              <a:t>methode() {</a:t>
+            </a:r>
+            <a:endParaRPr lang="en-US" sz="1400" b="1" dirty="0"/>
+          </a:p>
+        </p:txBody>
+      </p:sp>
+      <p:sp>
+        <p:nvSpPr>
+          <p:cNvPr id="33" name="Text 23"/>
+          <p:cNvSpPr/>
+          <p:nvPr/>
+        </p:nvSpPr>
+        <p:spPr>
+          <a:xfrm>
+            <a:off x="4617720" y="3163823"/>
             <a:ext cx="4160520" cy="401185"/>
           </a:xfrm>
           <a:prstGeom prst="rect">
@@ -19284,17 +19326,95 @@
               <a:buNone/>
             </a:pPr>
             <a:r>
-              <a:rPr lang="en-US" sz="1150" dirty="0">
-                <a:solidFill>
-                  <a:srgbClr val="D4D4D4"/>
+              <a:rPr lang="en-US" sz="1400" dirty="0">
+                <a:solidFill>
+                  <a:srgbClr val="6A9955"/>
                 </a:solidFill>
                 <a:latin typeface="Consolas" pitchFamily="34" charset="0"/>
                 <a:ea typeface="Consolas" pitchFamily="34" charset="-122"/>
                 <a:cs typeface="Consolas" pitchFamily="34" charset="-120"/>
               </a:rPr>
+              <a:t>      // Code</a:t>
+            </a:r>
+            <a:endParaRPr lang="en-US" sz="1400" dirty="0"/>
+          </a:p>
+        </p:txBody>
+      </p:sp>
+      <p:sp>
+        <p:nvSpPr>
+          <p:cNvPr id="34" name="Text 24"/>
+          <p:cNvSpPr/>
+          <p:nvPr/>
+        </p:nvSpPr>
+        <p:spPr>
+          <a:xfrm>
+            <a:off x="4617720" y="3419855"/>
+            <a:ext cx="4160520" cy="401185"/>
+          </a:xfrm>
+          <a:prstGeom prst="rect">
+            <a:avLst/>
+          </a:prstGeom>
+          <a:noFill/>
+          <a:ln/>
+        </p:spPr>
+        <p:txBody>
+          <a:bodyPr wrap="square" lIns="0" tIns="0" rIns="0" bIns="0" rtlCol="0" anchor="ctr"/>
+          <a:lstStyle/>
+          <a:p>
+            <a:pPr marL="0" indent="0">
+              <a:buNone/>
+            </a:pPr>
+            <a:r>
+              <a:rPr lang="en-US" sz="1400" dirty="0">
+                <a:solidFill>
+                  <a:srgbClr val="D4D4D4"/>
+                </a:solidFill>
+                <a:latin typeface="Consolas" pitchFamily="34" charset="0"/>
+                <a:ea typeface="Consolas" pitchFamily="34" charset="-122"/>
+                <a:cs typeface="Consolas" pitchFamily="34" charset="-120"/>
+              </a:rPr>
+              <a:t>    }</a:t>
+            </a:r>
+            <a:endParaRPr lang="en-US" sz="1400" dirty="0"/>
+          </a:p>
+        </p:txBody>
+      </p:sp>
+      <p:sp>
+        <p:nvSpPr>
+          <p:cNvPr id="35" name="Text 25"/>
+          <p:cNvSpPr/>
+          <p:nvPr/>
+        </p:nvSpPr>
+        <p:spPr>
+          <a:xfrm>
+            <a:off x="4617720" y="3675887"/>
+            <a:ext cx="4160520" cy="401185"/>
+          </a:xfrm>
+          <a:prstGeom prst="rect">
+            <a:avLst/>
+          </a:prstGeom>
+          <a:noFill/>
+          <a:ln/>
+        </p:spPr>
+        <p:txBody>
+          <a:bodyPr wrap="square" lIns="0" tIns="0" rIns="0" bIns="0" rtlCol="0" anchor="ctr"/>
+          <a:lstStyle/>
+          <a:p>
+            <a:pPr marL="0" indent="0">
+              <a:buNone/>
+            </a:pPr>
+            <a:r>
+              <a:rPr lang="en-US" sz="1400" dirty="0">
+                <a:solidFill>
+                  <a:srgbClr val="D4D4D4"/>
+                </a:solidFill>
+                <a:latin typeface="Consolas" pitchFamily="34" charset="0"/>
+                <a:ea typeface="Consolas" pitchFamily="34" charset="-122"/>
+                <a:cs typeface="Consolas" pitchFamily="34" charset="-120"/>
+              </a:rPr>
               <a:t>  };</a:t>
             </a:r>
-            <a:endParaRPr lang="en-US" sz="1150" dirty="0"/>
+            <a:endParaRPr lang="en-US" sz="1400" dirty="0"/>
           </a:p>
         </p:txBody>
       </p:sp>
@@ -19447,11 +19567,6 @@
               </a:rPr>
               <a:t> Class</a:t>
             </a:r>
-            <a:endParaRPr lang="fr-CA" sz="2400" cap="none" dirty="0">
-              <a:solidFill>
-                <a:srgbClr val="FF0000"/>
-              </a:solidFill>
-            </a:endParaRPr>
           </a:p>
         </p:txBody>
       </p:sp>
@@ -19499,7 +19614,7 @@
         </p:nvSpPr>
         <p:spPr>
           <a:xfrm>
-            <a:off x="434400" y="1231032"/>
+            <a:off x="516696" y="1027578"/>
             <a:ext cx="8229600" cy="566928"/>
           </a:xfrm>
           <a:prstGeom prst="rect">
@@ -19548,7 +19663,7 @@
             <a:avLst/>
           </a:prstGeom>
           <a:solidFill>
-            <a:srgbClr val="1E1E3F"/>
+            <a:schemeClr val="bg1"/>
           </a:solidFill>
           <a:ln/>
         </p:spPr>
@@ -19578,7 +19693,7 @@
               <a:buNone/>
             </a:pPr>
             <a:r>
-              <a:rPr lang="en-US" sz="1400" dirty="0">
+              <a:rPr lang="en-US" dirty="0">
                 <a:solidFill>
                   <a:srgbClr val="6A9955"/>
                 </a:solidFill>
@@ -19588,7 +19703,7 @@
               </a:rPr>
               <a:t>// Classe Anonyme — clic bouton</a:t>
             </a:r>
-            <a:endParaRPr lang="en-US" sz="1400" dirty="0">
+            <a:endParaRPr lang="en-US" dirty="0">
               <a:latin typeface="Times New Roman" panose="02020603050405020304" pitchFamily="18" charset="0"/>
               <a:cs typeface="Times New Roman" panose="02020603050405020304" pitchFamily="18" charset="0"/>
             </a:endParaRPr>
@@ -19620,17 +19735,14 @@
               <a:buNone/>
             </a:pPr>
             <a:r>
-              <a:rPr lang="en-US" sz="1400" dirty="0">
-                <a:solidFill>
-                  <a:srgbClr val="D4D4D4"/>
-                </a:solidFill>
+              <a:rPr lang="en-US" b="1" dirty="0">
                 <a:latin typeface="Times New Roman" panose="02020603050405020304" pitchFamily="18" charset="0"/>
                 <a:ea typeface="Consolas" pitchFamily="34" charset="-122"/>
                 <a:cs typeface="Times New Roman" panose="02020603050405020304" pitchFamily="18" charset="0"/>
               </a:rPr>
               <a:t>Button btn = findViewById(</a:t>
             </a:r>
-            <a:endParaRPr lang="en-US" sz="1400" dirty="0">
+            <a:endParaRPr lang="en-US" b="1" dirty="0">
               <a:latin typeface="Times New Roman" panose="02020603050405020304" pitchFamily="18" charset="0"/>
               <a:cs typeface="Times New Roman" panose="02020603050405020304" pitchFamily="18" charset="0"/>
             </a:endParaRPr>
@@ -19662,7 +19774,7 @@
               <a:buNone/>
             </a:pPr>
             <a:r>
-              <a:rPr lang="en-US" sz="1400" dirty="0">
+              <a:rPr lang="en-US" dirty="0">
                 <a:solidFill>
                   <a:srgbClr val="9CDCFE"/>
                 </a:solidFill>
@@ -19670,9 +19782,17 @@
                 <a:ea typeface="Consolas" pitchFamily="34" charset="-122"/>
                 <a:cs typeface="Times New Roman" panose="02020603050405020304" pitchFamily="18" charset="0"/>
               </a:rPr>
-              <a:t>    R.id.monBouton);</a:t>
-            </a:r>
-            <a:endParaRPr lang="en-US" sz="1400" dirty="0">
+              <a:t>    </a:t>
+            </a:r>
+            <a:r>
+              <a:rPr lang="en-US" b="1" dirty="0">
+                <a:latin typeface="Times New Roman" panose="02020603050405020304" pitchFamily="18" charset="0"/>
+                <a:ea typeface="Consolas" pitchFamily="34" charset="-122"/>
+                <a:cs typeface="Times New Roman" panose="02020603050405020304" pitchFamily="18" charset="0"/>
+              </a:rPr>
+              <a:t>R.id.monBouton);</a:t>
+            </a:r>
+            <a:endParaRPr lang="en-US" b="1" dirty="0">
               <a:latin typeface="Times New Roman" panose="02020603050405020304" pitchFamily="18" charset="0"/>
               <a:cs typeface="Times New Roman" panose="02020603050405020304" pitchFamily="18" charset="0"/>
             </a:endParaRPr>
@@ -19703,7 +19823,7 @@
             <a:pPr marL="0" indent="0">
               <a:buNone/>
             </a:pPr>
-            <a:endParaRPr lang="en-US" sz="1400" dirty="0">
+            <a:endParaRPr lang="en-US" dirty="0">
               <a:latin typeface="Times New Roman" panose="02020603050405020304" pitchFamily="18" charset="0"/>
               <a:cs typeface="Times New Roman" panose="02020603050405020304" pitchFamily="18" charset="0"/>
             </a:endParaRPr>
@@ -19735,17 +19855,14 @@
               <a:buNone/>
             </a:pPr>
             <a:r>
-              <a:rPr lang="en-US" sz="1400" dirty="0">
-                <a:solidFill>
-                  <a:srgbClr val="D4D4D4"/>
-                </a:solidFill>
+              <a:rPr lang="en-US" b="1" dirty="0">
                 <a:latin typeface="Times New Roman" panose="02020603050405020304" pitchFamily="18" charset="0"/>
                 <a:ea typeface="Consolas" pitchFamily="34" charset="-122"/>
                 <a:cs typeface="Times New Roman" panose="02020603050405020304" pitchFamily="18" charset="0"/>
               </a:rPr>
               <a:t>btn.setOnClickListener(</a:t>
             </a:r>
-            <a:endParaRPr lang="en-US" sz="1400" dirty="0">
+            <a:endParaRPr lang="en-US" b="1" dirty="0">
               <a:latin typeface="Times New Roman" panose="02020603050405020304" pitchFamily="18" charset="0"/>
               <a:cs typeface="Times New Roman" panose="02020603050405020304" pitchFamily="18" charset="0"/>
             </a:endParaRPr>
@@ -19777,7 +19894,7 @@
               <a:buNone/>
             </a:pPr>
             <a:r>
-              <a:rPr lang="en-US" sz="1400" dirty="0">
+              <a:rPr lang="en-US" dirty="0">
                 <a:solidFill>
                   <a:srgbClr val="4EC9B0"/>
                 </a:solidFill>
@@ -19785,9 +19902,23 @@
                 <a:ea typeface="Consolas" pitchFamily="34" charset="-122"/>
                 <a:cs typeface="Times New Roman" panose="02020603050405020304" pitchFamily="18" charset="0"/>
               </a:rPr>
-              <a:t>  new View.OnClickListener() {</a:t>
-            </a:r>
-            <a:endParaRPr lang="en-US" sz="1400" dirty="0">
+              <a:t>  </a:t>
+            </a:r>
+            <a:r>
+              <a:rPr lang="en-US" b="1" dirty="0">
+                <a:solidFill>
+                  <a:srgbClr val="00B050"/>
+                </a:solidFill>
+                <a:latin typeface="Times New Roman" panose="02020603050405020304" pitchFamily="18" charset="0"/>
+                <a:ea typeface="Consolas" pitchFamily="34" charset="-122"/>
+                <a:cs typeface="Times New Roman" panose="02020603050405020304" pitchFamily="18" charset="0"/>
+              </a:rPr>
+              <a:t>new View.OnClickListener() {</a:t>
+            </a:r>
+            <a:endParaRPr lang="en-US" b="1" dirty="0">
+              <a:solidFill>
+                <a:srgbClr val="00B050"/>
+              </a:solidFill>
               <a:latin typeface="Times New Roman" panose="02020603050405020304" pitchFamily="18" charset="0"/>
               <a:cs typeface="Times New Roman" panose="02020603050405020304" pitchFamily="18" charset="0"/>
             </a:endParaRPr>
@@ -19818,7 +19949,7 @@
             <a:pPr marL="0" indent="0">
               <a:buNone/>
             </a:pPr>
-            <a:endParaRPr lang="en-US" sz="1400" dirty="0">
+            <a:endParaRPr lang="en-US" dirty="0">
               <a:latin typeface="Times New Roman" panose="02020603050405020304" pitchFamily="18" charset="0"/>
               <a:cs typeface="Times New Roman" panose="02020603050405020304" pitchFamily="18" charset="0"/>
             </a:endParaRPr>
@@ -19850,7 +19981,7 @@
               <a:buNone/>
             </a:pPr>
             <a:r>
-              <a:rPr lang="en-US" sz="1400" dirty="0">
+              <a:rPr lang="en-US" dirty="0">
                 <a:solidFill>
                   <a:srgbClr val="C586C0"/>
                 </a:solidFill>
@@ -19860,7 +19991,7 @@
               </a:rPr>
               <a:t>    @Override</a:t>
             </a:r>
-            <a:endParaRPr lang="en-US" sz="1400" dirty="0">
+            <a:endParaRPr lang="en-US" dirty="0">
               <a:latin typeface="Times New Roman" panose="02020603050405020304" pitchFamily="18" charset="0"/>
               <a:cs typeface="Times New Roman" panose="02020603050405020304" pitchFamily="18" charset="0"/>
             </a:endParaRPr>
@@ -19892,7 +20023,7 @@
               <a:buNone/>
             </a:pPr>
             <a:r>
-              <a:rPr lang="en-US" sz="1400" dirty="0">
+              <a:rPr lang="en-US" dirty="0">
                 <a:solidFill>
                   <a:srgbClr val="569CD6"/>
                 </a:solidFill>
@@ -19902,7 +20033,7 @@
               </a:rPr>
               <a:t>    public void onClick(</a:t>
             </a:r>
-            <a:endParaRPr lang="en-US" sz="1400" dirty="0">
+            <a:endParaRPr lang="en-US" dirty="0">
               <a:latin typeface="Times New Roman" panose="02020603050405020304" pitchFamily="18" charset="0"/>
               <a:cs typeface="Times New Roman" panose="02020603050405020304" pitchFamily="18" charset="0"/>
             </a:endParaRPr>
@@ -19934,17 +20065,31 @@
               <a:buNone/>
             </a:pPr>
             <a:r>
-              <a:rPr lang="en-US" sz="1400" dirty="0">
-                <a:solidFill>
-                  <a:srgbClr val="D4D4D4"/>
+              <a:rPr lang="en-US" dirty="0">
+                <a:solidFill>
+                  <a:srgbClr val="00B050"/>
                 </a:solidFill>
                 <a:latin typeface="Times New Roman" panose="02020603050405020304" pitchFamily="18" charset="0"/>
                 <a:ea typeface="Consolas" pitchFamily="34" charset="-122"/>
                 <a:cs typeface="Times New Roman" panose="02020603050405020304" pitchFamily="18" charset="0"/>
               </a:rPr>
-              <a:t>        View v) {</a:t>
-            </a:r>
-            <a:endParaRPr lang="en-US" sz="1400" dirty="0">
+              <a:t>        </a:t>
+            </a:r>
+            <a:r>
+              <a:rPr lang="en-US" b="1" dirty="0">
+                <a:solidFill>
+                  <a:srgbClr val="00B050"/>
+                </a:solidFill>
+                <a:latin typeface="Times New Roman" panose="02020603050405020304" pitchFamily="18" charset="0"/>
+                <a:ea typeface="Consolas" pitchFamily="34" charset="-122"/>
+                <a:cs typeface="Times New Roman" panose="02020603050405020304" pitchFamily="18" charset="0"/>
+              </a:rPr>
+              <a:t>View v) {</a:t>
+            </a:r>
+            <a:endParaRPr lang="en-US" b="1" dirty="0">
+              <a:solidFill>
+                <a:srgbClr val="00B050"/>
+              </a:solidFill>
               <a:latin typeface="Times New Roman" panose="02020603050405020304" pitchFamily="18" charset="0"/>
               <a:cs typeface="Times New Roman" panose="02020603050405020304" pitchFamily="18" charset="0"/>
             </a:endParaRPr>
@@ -19976,9 +20121,9 @@
               <a:buNone/>
             </a:pPr>
             <a:r>
-              <a:rPr lang="en-US" sz="1400" dirty="0">
-                <a:solidFill>
-                  <a:srgbClr val="D4D4D4"/>
+              <a:rPr lang="en-US" b="1" dirty="0">
+                <a:solidFill>
+                  <a:srgbClr val="00B050"/>
                 </a:solidFill>
                 <a:latin typeface="Times New Roman" panose="02020603050405020304" pitchFamily="18" charset="0"/>
                 <a:ea typeface="Consolas" pitchFamily="34" charset="-122"/>
@@ -19986,7 +20131,10 @@
               </a:rPr>
               <a:t>      Toast.makeText(ctx,</a:t>
             </a:r>
-            <a:endParaRPr lang="en-US" sz="1400" dirty="0">
+            <a:endParaRPr lang="en-US" b="1" dirty="0">
+              <a:solidFill>
+                <a:srgbClr val="00B050"/>
+              </a:solidFill>
               <a:latin typeface="Times New Roman" panose="02020603050405020304" pitchFamily="18" charset="0"/>
               <a:cs typeface="Times New Roman" panose="02020603050405020304" pitchFamily="18" charset="0"/>
             </a:endParaRPr>
@@ -20018,7 +20166,7 @@
               <a:buNone/>
             </a:pPr>
             <a:r>
-              <a:rPr lang="en-US" sz="1400" dirty="0">
+              <a:rPr lang="en-US" dirty="0">
                 <a:solidFill>
                   <a:srgbClr val="CE9178"/>
                 </a:solidFill>
@@ -20028,7 +20176,7 @@
               </a:rPr>
               <a:t>        "Bouton cliqué !",</a:t>
             </a:r>
-            <a:endParaRPr lang="en-US" sz="1400" dirty="0">
+            <a:endParaRPr lang="en-US" dirty="0">
               <a:latin typeface="Times New Roman" panose="02020603050405020304" pitchFamily="18" charset="0"/>
               <a:cs typeface="Times New Roman" panose="02020603050405020304" pitchFamily="18" charset="0"/>
             </a:endParaRPr>
@@ -20060,7 +20208,7 @@
               <a:buNone/>
             </a:pPr>
             <a:r>
-              <a:rPr lang="en-US" sz="1400" dirty="0">
+              <a:rPr lang="en-US" dirty="0">
                 <a:solidFill>
                   <a:srgbClr val="9CDCFE"/>
                 </a:solidFill>
@@ -20070,7 +20218,7 @@
               </a:rPr>
               <a:t>        Toast.LENGTH_SHORT)</a:t>
             </a:r>
-            <a:endParaRPr lang="en-US" sz="1400" dirty="0">
+            <a:endParaRPr lang="en-US" dirty="0">
               <a:latin typeface="Times New Roman" panose="02020603050405020304" pitchFamily="18" charset="0"/>
               <a:cs typeface="Times New Roman" panose="02020603050405020304" pitchFamily="18" charset="0"/>
             </a:endParaRPr>
@@ -20102,7 +20250,7 @@
               <a:buNone/>
             </a:pPr>
             <a:r>
-              <a:rPr lang="en-US" sz="1400" dirty="0">
+              <a:rPr lang="en-US" dirty="0">
                 <a:solidFill>
                   <a:srgbClr val="D4D4D4"/>
                 </a:solidFill>
@@ -20110,9 +20258,17 @@
                 <a:ea typeface="Consolas" pitchFamily="34" charset="-122"/>
                 <a:cs typeface="Times New Roman" panose="02020603050405020304" pitchFamily="18" charset="0"/>
               </a:rPr>
-              <a:t>        .show();</a:t>
-            </a:r>
-            <a:endParaRPr lang="en-US" sz="1400" dirty="0">
+              <a:t>        </a:t>
+            </a:r>
+            <a:r>
+              <a:rPr lang="en-US" b="1" dirty="0">
+                <a:latin typeface="Times New Roman" panose="02020603050405020304" pitchFamily="18" charset="0"/>
+                <a:ea typeface="Consolas" pitchFamily="34" charset="-122"/>
+                <a:cs typeface="Times New Roman" panose="02020603050405020304" pitchFamily="18" charset="0"/>
+              </a:rPr>
+              <a:t>.show();</a:t>
+            </a:r>
+            <a:endParaRPr lang="en-US" b="1" dirty="0">
               <a:latin typeface="Times New Roman" panose="02020603050405020304" pitchFamily="18" charset="0"/>
               <a:cs typeface="Times New Roman" panose="02020603050405020304" pitchFamily="18" charset="0"/>
             </a:endParaRPr>
@@ -20144,7 +20300,7 @@
               <a:buNone/>
             </a:pPr>
             <a:r>
-              <a:rPr lang="en-US" sz="1400" dirty="0">
+              <a:rPr lang="en-US" dirty="0">
                 <a:solidFill>
                   <a:srgbClr val="D4D4D4"/>
                 </a:solidFill>
@@ -20154,7 +20310,7 @@
               </a:rPr>
               <a:t>    }</a:t>
             </a:r>
-            <a:endParaRPr lang="en-US" sz="1400" dirty="0">
+            <a:endParaRPr lang="en-US" dirty="0">
               <a:latin typeface="Times New Roman" panose="02020603050405020304" pitchFamily="18" charset="0"/>
               <a:cs typeface="Times New Roman" panose="02020603050405020304" pitchFamily="18" charset="0"/>
             </a:endParaRPr>
@@ -20186,7 +20342,7 @@
               <a:buNone/>
             </a:pPr>
             <a:r>
-              <a:rPr lang="en-US" sz="1400" dirty="0">
+              <a:rPr lang="en-US" dirty="0">
                 <a:solidFill>
                   <a:srgbClr val="D4D4D4"/>
                 </a:solidFill>
@@ -20196,7 +20352,7 @@
               </a:rPr>
               <a:t>  }</a:t>
             </a:r>
-            <a:endParaRPr lang="en-US" sz="1400" dirty="0">
+            <a:endParaRPr lang="en-US" dirty="0">
               <a:latin typeface="Times New Roman" panose="02020603050405020304" pitchFamily="18" charset="0"/>
               <a:cs typeface="Times New Roman" panose="02020603050405020304" pitchFamily="18" charset="0"/>
             </a:endParaRPr>
@@ -20228,7 +20384,7 @@
               <a:buNone/>
             </a:pPr>
             <a:r>
-              <a:rPr lang="en-US" sz="1400" dirty="0">
+              <a:rPr lang="en-US" dirty="0">
                 <a:solidFill>
                   <a:srgbClr val="D4D4D4"/>
                 </a:solidFill>
@@ -20238,7 +20394,7 @@
               </a:rPr>
               <a:t>);</a:t>
             </a:r>
-            <a:endParaRPr lang="en-US" sz="1400" dirty="0">
+            <a:endParaRPr lang="en-US" dirty="0">
               <a:latin typeface="Times New Roman" panose="02020603050405020304" pitchFamily="18" charset="0"/>
               <a:cs typeface="Times New Roman" panose="02020603050405020304" pitchFamily="18" charset="0"/>
             </a:endParaRPr>
@@ -21451,6 +21607,13 @@
   <p:clrMapOvr>
     <a:masterClrMapping/>
   </p:clrMapOvr>
+  <p:timing>
+    <p:tnLst>
+      <p:par>
+        <p:cTn id="1" dur="indefinite" restart="never" nodeType="tmRoot"/>
+      </p:par>
+    </p:tnLst>
+  </p:timing>
 </p:sld>
 </file>
 
@@ -22493,7 +22656,7 @@
             <a:avLst/>
           </a:prstGeom>
           <a:solidFill>
-            <a:srgbClr val="FFF5F5"/>
+            <a:schemeClr val="bg1"/>
           </a:solidFill>
           <a:ln w="12700">
             <a:solidFill>
@@ -23474,7 +23637,7 @@
             <a:avLst/>
           </a:prstGeom>
           <a:solidFill>
-            <a:srgbClr val="F0FDF4"/>
+            <a:schemeClr val="bg1"/>
           </a:solidFill>
           <a:ln w="12700">
             <a:solidFill>
@@ -24734,11 +24897,6 @@
               </a:rPr>
               <a:t>(Syntaxe de base) </a:t>
             </a:r>
-            <a:endParaRPr lang="fr-CA" sz="2400" cap="none" dirty="0">
-              <a:solidFill>
-                <a:srgbClr val="FF0000"/>
-              </a:solidFill>
-            </a:endParaRPr>
           </a:p>
         </p:txBody>
       </p:sp>
@@ -25719,11 +25877,6 @@
               </a:rPr>
               <a:t>(Syntaxe de base) </a:t>
             </a:r>
-            <a:endParaRPr lang="fr-CA" sz="2400" cap="none" dirty="0">
-              <a:solidFill>
-                <a:srgbClr val="FF0000"/>
-              </a:solidFill>
-            </a:endParaRPr>
           </a:p>
         </p:txBody>
       </p:sp>
@@ -25878,14 +26031,7 @@
                 <a:latin typeface="Times New Roman" panose="02020603050405020304" pitchFamily="18" charset="0"/>
                 <a:cs typeface="Times New Roman" panose="02020603050405020304" pitchFamily="18" charset="0"/>
               </a:rPr>
-              <a:t>Le carton est toujours le même — seul le contenu</a:t>
-            </a:r>
-            <a:r>
-              <a:rPr lang="en-US" sz="1400" dirty="0">
-                <a:latin typeface="Times New Roman" panose="02020603050405020304" pitchFamily="18" charset="0"/>
-                <a:cs typeface="Times New Roman" panose="02020603050405020304" pitchFamily="18" charset="0"/>
-              </a:rPr>
-              <a:t> change </a:t>
+              <a:t>Le carton est toujours le même — seul le contenu change </a:t>
             </a:r>
             <a:r>
               <a:rPr lang="en-US" sz="1400" dirty="0" err="1" smtClean="0">
@@ -27044,11 +27190,6 @@
               </a:rPr>
               <a:t>(Syntaxe de base) </a:t>
             </a:r>
-            <a:endParaRPr lang="fr-CA" sz="2400" cap="none" dirty="0">
-              <a:solidFill>
-                <a:srgbClr val="FF0000"/>
-              </a:solidFill>
-            </a:endParaRPr>
           </a:p>
         </p:txBody>
       </p:sp>
@@ -28207,14 +28348,7 @@
                 <a:latin typeface="Times New Roman" panose="02020603050405020304" pitchFamily="18" charset="0"/>
                 <a:cs typeface="Times New Roman" panose="02020603050405020304" pitchFamily="18" charset="0"/>
               </a:rPr>
-              <a:t>comme une boîte fixe : tu dois décider la taille à l'avance. Une Collection, c'est comme</a:t>
-            </a:r>
-            <a:r>
-              <a:rPr lang="en-US" sz="1600" dirty="0">
-                <a:latin typeface="Times New Roman" panose="02020603050405020304" pitchFamily="18" charset="0"/>
-                <a:cs typeface="Times New Roman" panose="02020603050405020304" pitchFamily="18" charset="0"/>
-              </a:rPr>
-              <a:t> un sac à </a:t>
+              <a:t>comme une boîte fixe : tu dois décider la taille à l'avance. Une Collection, c'est comme un sac à </a:t>
             </a:r>
             <a:r>
               <a:rPr lang="en-US" sz="1600" dirty="0" smtClean="0">

--- a/osis_presentation_Ibrahim_SAVADOGO_S3.pptx
+++ b/osis_presentation_Ibrahim_SAVADOGO_S3.pptx
@@ -928,6 +928,280 @@
     <p:extLst>
       <p:ext uri="{BB962C8B-B14F-4D97-AF65-F5344CB8AC3E}">
         <p14:creationId xmlns:p14="http://schemas.microsoft.com/office/powerpoint/2010/main" val="1541517177"/>
+      </p:ext>
+    </p:extLst>
+  </p:cSld>
+  <p:clrMapOvr>
+    <a:masterClrMapping/>
+  </p:clrMapOvr>
+</p:notes>
+</file>
+
+<file path=ppt/notesSlides/notesSlide2.xml><?xml version="1.0" encoding="utf-8"?>
+<p:notes xmlns:a="http://schemas.openxmlformats.org/drawingml/2006/main" xmlns:r="http://schemas.openxmlformats.org/officeDocument/2006/relationships" xmlns:p="http://schemas.openxmlformats.org/presentationml/2006/main">
+  <p:cSld>
+    <p:spTree>
+      <p:nvGrpSpPr>
+        <p:cNvPr id="1" name=""/>
+        <p:cNvGrpSpPr/>
+        <p:nvPr/>
+      </p:nvGrpSpPr>
+      <p:grpSpPr>
+        <a:xfrm>
+          <a:off x="0" y="0"/>
+          <a:ext cx="0" cy="0"/>
+          <a:chOff x="0" y="0"/>
+          <a:chExt cx="0" cy="0"/>
+        </a:xfrm>
+      </p:grpSpPr>
+      <p:sp>
+        <p:nvSpPr>
+          <p:cNvPr id="2" name="Slide Image Placeholder 1"/>
+          <p:cNvSpPr>
+            <a:spLocks noGrp="1" noRot="1" noChangeAspect="1"/>
+          </p:cNvSpPr>
+          <p:nvPr>
+            <p:ph type="sldImg"/>
+          </p:nvPr>
+        </p:nvSpPr>
+        <p:spPr/>
+      </p:sp>
+      <p:sp>
+        <p:nvSpPr>
+          <p:cNvPr id="3" name="Notes Placeholder 2"/>
+          <p:cNvSpPr>
+            <a:spLocks noGrp="1"/>
+          </p:cNvSpPr>
+          <p:nvPr>
+            <p:ph type="body" idx="1"/>
+          </p:nvPr>
+        </p:nvSpPr>
+        <p:spPr/>
+        <p:txBody>
+          <a:bodyPr/>
+          <a:lstStyle/>
+          <a:p>
+            <a:r>
+              <a:rPr lang="en-US" dirty="0" smtClean="0"/>
+              <a:t>Collection </a:t>
+            </a:r>
+            <a:r>
+              <a:rPr lang="en-US" dirty="0" err="1" smtClean="0"/>
+              <a:t>etais</a:t>
+            </a:r>
+            <a:r>
+              <a:rPr lang="en-US" dirty="0" smtClean="0"/>
+              <a:t> pas</a:t>
+            </a:r>
+            <a:r>
+              <a:rPr lang="en-US" baseline="0" dirty="0" smtClean="0"/>
+              <a:t> la </a:t>
+            </a:r>
+            <a:r>
+              <a:rPr lang="en-US" baseline="0" dirty="0" err="1" smtClean="0"/>
+              <a:t>en</a:t>
+            </a:r>
+            <a:r>
+              <a:rPr lang="en-US" baseline="0" dirty="0" smtClean="0"/>
+              <a:t> 1.0</a:t>
+            </a:r>
+          </a:p>
+          <a:p>
+            <a:r>
+              <a:rPr lang="en-US" baseline="0" dirty="0" smtClean="0"/>
+              <a:t>Vu jour 1.2</a:t>
+            </a:r>
+          </a:p>
+          <a:p>
+            <a:r>
+              <a:rPr lang="en-US" baseline="0" dirty="0" smtClean="0"/>
+              <a:t>Et generic en1.5</a:t>
+            </a:r>
+          </a:p>
+          <a:p>
+            <a:endParaRPr lang="en-US" dirty="0"/>
+          </a:p>
+        </p:txBody>
+      </p:sp>
+      <p:sp>
+        <p:nvSpPr>
+          <p:cNvPr id="4" name="Slide Number Placeholder 3"/>
+          <p:cNvSpPr>
+            <a:spLocks noGrp="1"/>
+          </p:cNvSpPr>
+          <p:nvPr>
+            <p:ph type="sldNum" sz="quarter" idx="10"/>
+          </p:nvPr>
+        </p:nvSpPr>
+        <p:spPr/>
+        <p:txBody>
+          <a:bodyPr/>
+          <a:lstStyle/>
+          <a:p>
+            <a:pPr>
+              <a:defRPr/>
+            </a:pPr>
+            <a:fld id="{4824BCD5-7DB3-4570-95FB-D6BD68920CD5}" type="slidenum">
+              <a:rPr lang="fr-CA" smtClean="0"/>
+              <a:pPr>
+                <a:defRPr/>
+              </a:pPr>
+              <a:t>3</a:t>
+            </a:fld>
+            <a:endParaRPr lang="fr-CA"/>
+          </a:p>
+        </p:txBody>
+      </p:sp>
+    </p:spTree>
+    <p:extLst>
+      <p:ext uri="{BB962C8B-B14F-4D97-AF65-F5344CB8AC3E}">
+        <p14:creationId xmlns:p14="http://schemas.microsoft.com/office/powerpoint/2010/main" val="1738060137"/>
+      </p:ext>
+    </p:extLst>
+  </p:cSld>
+  <p:clrMapOvr>
+    <a:masterClrMapping/>
+  </p:clrMapOvr>
+</p:notes>
+</file>
+
+<file path=ppt/notesSlides/notesSlide3.xml><?xml version="1.0" encoding="utf-8"?>
+<p:notes xmlns:a="http://schemas.openxmlformats.org/drawingml/2006/main" xmlns:r="http://schemas.openxmlformats.org/officeDocument/2006/relationships" xmlns:p="http://schemas.openxmlformats.org/presentationml/2006/main">
+  <p:cSld>
+    <p:spTree>
+      <p:nvGrpSpPr>
+        <p:cNvPr id="1" name=""/>
+        <p:cNvGrpSpPr/>
+        <p:nvPr/>
+      </p:nvGrpSpPr>
+      <p:grpSpPr>
+        <a:xfrm>
+          <a:off x="0" y="0"/>
+          <a:ext cx="0" cy="0"/>
+          <a:chOff x="0" y="0"/>
+          <a:chExt cx="0" cy="0"/>
+        </a:xfrm>
+      </p:grpSpPr>
+      <p:sp>
+        <p:nvSpPr>
+          <p:cNvPr id="2" name="Slide Image Placeholder 1"/>
+          <p:cNvSpPr>
+            <a:spLocks noGrp="1" noRot="1" noChangeAspect="1"/>
+          </p:cNvSpPr>
+          <p:nvPr>
+            <p:ph type="sldImg"/>
+          </p:nvPr>
+        </p:nvSpPr>
+        <p:spPr/>
+      </p:sp>
+      <p:sp>
+        <p:nvSpPr>
+          <p:cNvPr id="3" name="Notes Placeholder 2"/>
+          <p:cNvSpPr>
+            <a:spLocks noGrp="1"/>
+          </p:cNvSpPr>
+          <p:nvPr>
+            <p:ph type="body" idx="1"/>
+          </p:nvPr>
+        </p:nvSpPr>
+        <p:spPr/>
+        <p:txBody>
+          <a:bodyPr/>
+          <a:lstStyle/>
+          <a:p>
+            <a:r>
+              <a:rPr lang="en-US" dirty="0" smtClean="0"/>
+              <a:t>Bien</a:t>
+            </a:r>
+            <a:r>
+              <a:rPr lang="en-US" baseline="0" dirty="0" smtClean="0"/>
+              <a:t> </a:t>
+            </a:r>
+            <a:r>
+              <a:rPr lang="en-US" baseline="0" dirty="0" err="1" smtClean="0"/>
+              <a:t>vrai</a:t>
+            </a:r>
+            <a:r>
+              <a:rPr lang="en-US" baseline="0" dirty="0" smtClean="0"/>
+              <a:t> que Map fait </a:t>
+            </a:r>
+            <a:r>
+              <a:rPr lang="en-US" baseline="0" dirty="0" err="1" smtClean="0"/>
+              <a:t>partie</a:t>
+            </a:r>
+            <a:r>
+              <a:rPr lang="en-US" baseline="0" dirty="0" smtClean="0"/>
+              <a:t> du </a:t>
+            </a:r>
+            <a:r>
+              <a:rPr lang="en-US" baseline="0" dirty="0" err="1" smtClean="0"/>
+              <a:t>frsmewok</a:t>
+            </a:r>
+            <a:r>
+              <a:rPr lang="en-US" baseline="0" dirty="0" smtClean="0"/>
+              <a:t> </a:t>
+            </a:r>
+            <a:r>
+              <a:rPr lang="en-US" baseline="0" dirty="0" err="1" smtClean="0"/>
+              <a:t>mais</a:t>
+            </a:r>
+            <a:r>
+              <a:rPr lang="en-US" baseline="0" dirty="0" smtClean="0"/>
+              <a:t> </a:t>
+            </a:r>
+            <a:r>
+              <a:rPr lang="en-US" baseline="0" dirty="0" err="1" smtClean="0"/>
+              <a:t>elle</a:t>
+            </a:r>
+            <a:r>
+              <a:rPr lang="en-US" baseline="0" dirty="0" smtClean="0"/>
+              <a:t> </a:t>
+            </a:r>
+            <a:r>
+              <a:rPr lang="en-US" baseline="0" dirty="0" err="1" smtClean="0"/>
+              <a:t>nherite</a:t>
+            </a:r>
+            <a:r>
+              <a:rPr lang="en-US" baseline="0" dirty="0" smtClean="0"/>
+              <a:t> pas de collections </a:t>
+            </a:r>
+            <a:endParaRPr lang="en-US" dirty="0"/>
+          </a:p>
+        </p:txBody>
+      </p:sp>
+      <p:sp>
+        <p:nvSpPr>
+          <p:cNvPr id="4" name="Slide Number Placeholder 3"/>
+          <p:cNvSpPr>
+            <a:spLocks noGrp="1"/>
+          </p:cNvSpPr>
+          <p:nvPr>
+            <p:ph type="sldNum" sz="quarter" idx="10"/>
+          </p:nvPr>
+        </p:nvSpPr>
+        <p:spPr/>
+        <p:txBody>
+          <a:bodyPr/>
+          <a:lstStyle/>
+          <a:p>
+            <a:pPr>
+              <a:defRPr/>
+            </a:pPr>
+            <a:fld id="{4824BCD5-7DB3-4570-95FB-D6BD68920CD5}" type="slidenum">
+              <a:rPr lang="fr-CA" smtClean="0"/>
+              <a:pPr>
+                <a:defRPr/>
+              </a:pPr>
+              <a:t>11</a:t>
+            </a:fld>
+            <a:endParaRPr lang="fr-CA"/>
+          </a:p>
+        </p:txBody>
+      </p:sp>
+    </p:spTree>
+    <p:extLst>
+      <p:ext uri="{BB962C8B-B14F-4D97-AF65-F5344CB8AC3E}">
+        <p14:creationId xmlns:p14="http://schemas.microsoft.com/office/powerpoint/2010/main" val="2179087017"/>
       </p:ext>
     </p:extLst>
   </p:cSld>
@@ -4209,7 +4483,7 @@
           <p:nvPr/>
         </p:nvPicPr>
         <p:blipFill>
-          <a:blip r:embed="rId2">
+          <a:blip r:embed="rId3">
             <a:extLst>
               <a:ext uri="{28A0092B-C50C-407E-A947-70E740481C1C}">
                 <a14:useLocalDpi xmlns:a14="http://schemas.microsoft.com/office/drawing/2010/main" val="0"/>
@@ -4335,7 +4609,7 @@
           <p:nvPr/>
         </p:nvPicPr>
         <p:blipFill>
-          <a:blip r:embed="rId3" cstate="print">
+          <a:blip r:embed="rId4" cstate="print">
             <a:extLst>
               <a:ext uri="{28A0092B-C50C-407E-A947-70E740481C1C}">
                 <a14:useLocalDpi xmlns:a14="http://schemas.microsoft.com/office/drawing/2010/main" val="0"/>
@@ -4365,7 +4639,7 @@
           <p:nvPr/>
         </p:nvPicPr>
         <p:blipFill>
-          <a:blip r:embed="rId4">
+          <a:blip r:embed="rId5">
             <a:extLst>
               <a:ext uri="{28A0092B-C50C-407E-A947-70E740481C1C}">
                 <a14:useLocalDpi xmlns:a14="http://schemas.microsoft.com/office/drawing/2010/main" val="0"/>
@@ -7388,24 +7662,37 @@
                   <a:srgbClr val="FF0000"/>
                 </a:solidFill>
               </a:rPr>
-              <a:t>1. </a:t>
-            </a:r>
-            <a:r>
-              <a:rPr lang="fr-FR" sz="2400" cap="none" dirty="0" smtClean="0">
+              <a:t>1.</a:t>
+            </a:r>
+            <a:r>
+              <a:rPr lang="en-US" sz="2000" cap="none" dirty="0" smtClean="0">
                 <a:solidFill>
                   <a:srgbClr val="FF0000"/>
                 </a:solidFill>
               </a:rPr>
+              <a:t> </a:t>
+            </a:r>
+            <a:r>
+              <a:rPr lang="fr-FR" sz="2000" cap="none" dirty="0" smtClean="0">
+                <a:solidFill>
+                  <a:srgbClr val="FF0000"/>
+                </a:solidFill>
+              </a:rPr>
               <a:t>λ  </a:t>
             </a:r>
             <a:r>
-              <a:rPr lang="fr-FR" sz="2400" cap="none" dirty="0">
+              <a:rPr lang="fr-FR" sz="2000" cap="none" dirty="0">
                 <a:solidFill>
                   <a:srgbClr val="FF0000"/>
                 </a:solidFill>
               </a:rPr>
               <a:t>Syntaxe Lambda — Formes &amp; Interfaces Fonctionnelles</a:t>
             </a:r>
+            <a:endParaRPr lang="fr-FR" sz="2400" cap="none" dirty="0">
+              <a:solidFill>
+                <a:srgbClr val="FF0000"/>
+              </a:solidFill>
+            </a:endParaRPr>
           </a:p>
         </p:txBody>
       </p:sp>
@@ -8339,7 +8626,7 @@
         </p:nvSpPr>
         <p:spPr>
           <a:xfrm>
-            <a:off x="4830376" y="2418410"/>
+            <a:off x="4830376" y="2466035"/>
             <a:ext cx="4206240" cy="640080"/>
           </a:xfrm>
           <a:prstGeom prst="rect">
@@ -18323,6 +18610,140 @@
           </a:prstGeom>
         </p:spPr>
       </p:pic>
+      <p:sp>
+        <p:nvSpPr>
+          <p:cNvPr id="4" name="Rectangle 3"/>
+          <p:cNvSpPr/>
+          <p:nvPr/>
+        </p:nvSpPr>
+        <p:spPr>
+          <a:xfrm>
+            <a:off x="755576" y="1268760"/>
+            <a:ext cx="4666662" cy="4524315"/>
+          </a:xfrm>
+          <a:prstGeom prst="rect">
+            <a:avLst/>
+          </a:prstGeom>
+        </p:spPr>
+        <p:txBody>
+          <a:bodyPr wrap="none">
+            <a:spAutoFit/>
+          </a:bodyPr>
+          <a:lstStyle/>
+          <a:p>
+            <a:pPr marL="400050" indent="-400050">
+              <a:lnSpc>
+                <a:spcPct val="200000"/>
+              </a:lnSpc>
+              <a:buAutoNum type="romanUcPeriod"/>
+            </a:pPr>
+            <a:r>
+              <a:rPr lang="fr-CA" b="1" dirty="0" smtClean="0"/>
+              <a:t> INTRODUCTION</a:t>
+            </a:r>
+          </a:p>
+          <a:p>
+            <a:pPr marL="400050" indent="-400050">
+              <a:lnSpc>
+                <a:spcPct val="200000"/>
+              </a:lnSpc>
+              <a:buAutoNum type="romanUcPeriod"/>
+            </a:pPr>
+            <a:r>
+              <a:rPr lang="fr-CA" b="1" dirty="0" smtClean="0"/>
+              <a:t> GÉNÉRIQUE (SYNTAXE DE BASE)</a:t>
+            </a:r>
+          </a:p>
+          <a:p>
+            <a:pPr marL="400050" indent="-400050">
+              <a:lnSpc>
+                <a:spcPct val="200000"/>
+              </a:lnSpc>
+              <a:buAutoNum type="romanUcPeriod"/>
+            </a:pPr>
+            <a:r>
+              <a:rPr lang="fr-CA" b="1" dirty="0" smtClean="0"/>
+              <a:t> COLLECTION</a:t>
+            </a:r>
+          </a:p>
+          <a:p>
+            <a:pPr marL="400050" indent="-400050">
+              <a:lnSpc>
+                <a:spcPct val="200000"/>
+              </a:lnSpc>
+              <a:buAutoNum type="romanUcPeriod"/>
+            </a:pPr>
+            <a:r>
+              <a:rPr lang="en-US" b="1" dirty="0" smtClean="0"/>
+              <a:t> </a:t>
+            </a:r>
+            <a:r>
+              <a:rPr lang="el-GR" b="1" dirty="0"/>
+              <a:t>λ</a:t>
+            </a:r>
+            <a:r>
+              <a:rPr lang="el-GR" b="1" dirty="0" smtClean="0"/>
+              <a:t>  </a:t>
+            </a:r>
+            <a:r>
+              <a:rPr lang="fr-CA" b="1" dirty="0" smtClean="0"/>
+              <a:t>EXPRESSIONS LAMBDA</a:t>
+            </a:r>
+          </a:p>
+          <a:p>
+            <a:pPr marL="400050" indent="-400050">
+              <a:lnSpc>
+                <a:spcPct val="200000"/>
+              </a:lnSpc>
+              <a:buAutoNum type="romanUcPeriod"/>
+            </a:pPr>
+            <a:r>
+              <a:rPr lang="fr-CA" b="1" dirty="0" smtClean="0"/>
+              <a:t> INNER CLASSE (CLASSE INTERNE) </a:t>
+            </a:r>
+          </a:p>
+          <a:p>
+            <a:pPr marL="400050" indent="-400050">
+              <a:lnSpc>
+                <a:spcPct val="200000"/>
+              </a:lnSpc>
+              <a:buAutoNum type="romanUcPeriod"/>
+            </a:pPr>
+            <a:r>
+              <a:rPr lang="fr-CA" b="1" dirty="0" smtClean="0"/>
+              <a:t> ANONYMOUS CLASS </a:t>
+            </a:r>
+          </a:p>
+          <a:p>
+            <a:pPr marL="400050" indent="-400050">
+              <a:lnSpc>
+                <a:spcPct val="200000"/>
+              </a:lnSpc>
+              <a:buAutoNum type="romanUcPeriod"/>
+            </a:pPr>
+            <a:r>
+              <a:rPr lang="fr-CA" b="1" dirty="0" smtClean="0"/>
+              <a:t> CONCLUSION</a:t>
+            </a:r>
+          </a:p>
+          <a:p>
+            <a:pPr marL="400050" indent="-400050">
+              <a:buAutoNum type="romanUcPeriod"/>
+            </a:pPr>
+            <a:endParaRPr lang="fr-CA" dirty="0" smtClean="0">
+              <a:solidFill>
+                <a:srgbClr val="FF0000"/>
+              </a:solidFill>
+            </a:endParaRPr>
+          </a:p>
+          <a:p>
+            <a:pPr marL="400050" indent="-400050">
+              <a:buAutoNum type="romanUcPeriod"/>
+            </a:pPr>
+            <a:endParaRPr lang="en-US" dirty="0"/>
+          </a:p>
+        </p:txBody>
+      </p:sp>
     </p:spTree>
     <p:extLst>
       <p:ext uri="{BB962C8B-B14F-4D97-AF65-F5344CB8AC3E}">
@@ -21136,7 +21557,15 @@
                   <a:srgbClr val="FF0000"/>
                 </a:solidFill>
               </a:rPr>
-              <a:t>VI. Conclusion</a:t>
+              <a:t>VII. </a:t>
+            </a:r>
+            <a:r>
+              <a:rPr lang="fr-CA" sz="2400" cap="none" dirty="0" smtClean="0">
+                <a:solidFill>
+                  <a:srgbClr val="FF0000"/>
+                </a:solidFill>
+              </a:rPr>
+              <a:t>Conclusion</a:t>
             </a:r>
             <a:endParaRPr lang="fr-CA" sz="2400" cap="none" dirty="0">
               <a:solidFill>
@@ -21643,7 +22072,7 @@
           <p:nvPr/>
         </p:nvPicPr>
         <p:blipFill>
-          <a:blip r:embed="rId2">
+          <a:blip r:embed="rId3">
             <a:extLst>
               <a:ext uri="{28A0092B-C50C-407E-A947-70E740481C1C}">
                 <a14:useLocalDpi xmlns:a14="http://schemas.microsoft.com/office/drawing/2010/main" val="0"/>
@@ -21753,7 +22182,7 @@
           <p:nvPr/>
         </p:nvPicPr>
         <p:blipFill>
-          <a:blip r:embed="rId3" cstate="print">
+          <a:blip r:embed="rId4" cstate="print">
             <a:extLst>
               <a:ext uri="{28A0092B-C50C-407E-A947-70E740481C1C}">
                 <a14:useLocalDpi xmlns:a14="http://schemas.microsoft.com/office/drawing/2010/main" val="0"/>
@@ -21834,507 +22263,270 @@
           </a:bodyPr>
           <a:lstStyle/>
           <a:p>
+            <a:pPr eaLnBrk="0" hangingPunct="0"/>
+            <a:r>
+              <a:rPr lang="en-US" altLang="en-US" b="1" dirty="0">
+                <a:solidFill>
+                  <a:srgbClr val="0A0A0A"/>
+                </a:solidFill>
+                <a:latin typeface="Times New Roman" panose="02020603050405020304" pitchFamily="18" charset="0"/>
+                <a:cs typeface="Times New Roman" panose="02020603050405020304" pitchFamily="18" charset="0"/>
+              </a:rPr>
+              <a:t>Le Java Collections Framework (JCF)</a:t>
+            </a:r>
+            <a:r>
+              <a:rPr lang="en-US" altLang="en-US" dirty="0">
+                <a:solidFill>
+                  <a:srgbClr val="0A0A0A"/>
+                </a:solidFill>
+                <a:latin typeface="Times New Roman" panose="02020603050405020304" pitchFamily="18" charset="0"/>
+                <a:cs typeface="Times New Roman" panose="02020603050405020304" pitchFamily="18" charset="0"/>
+              </a:rPr>
+              <a:t> : </a:t>
+            </a:r>
+            <a:r>
+              <a:rPr lang="en-US" altLang="en-US" dirty="0" err="1">
+                <a:solidFill>
+                  <a:srgbClr val="0A0A0A"/>
+                </a:solidFill>
+                <a:latin typeface="Times New Roman" panose="02020603050405020304" pitchFamily="18" charset="0"/>
+                <a:cs typeface="Times New Roman" panose="02020603050405020304" pitchFamily="18" charset="0"/>
+              </a:rPr>
+              <a:t>Introduit</a:t>
+            </a:r>
+            <a:r>
+              <a:rPr lang="en-US" altLang="en-US" dirty="0">
+                <a:solidFill>
+                  <a:srgbClr val="0A0A0A"/>
+                </a:solidFill>
+                <a:latin typeface="Times New Roman" panose="02020603050405020304" pitchFamily="18" charset="0"/>
+                <a:cs typeface="Times New Roman" panose="02020603050405020304" pitchFamily="18" charset="0"/>
+              </a:rPr>
+              <a:t> </a:t>
+            </a:r>
+            <a:r>
+              <a:rPr lang="en-US" altLang="en-US" dirty="0" err="1">
+                <a:solidFill>
+                  <a:srgbClr val="0A0A0A"/>
+                </a:solidFill>
+                <a:latin typeface="Times New Roman" panose="02020603050405020304" pitchFamily="18" charset="0"/>
+                <a:cs typeface="Times New Roman" panose="02020603050405020304" pitchFamily="18" charset="0"/>
+              </a:rPr>
+              <a:t>en</a:t>
+            </a:r>
+            <a:r>
+              <a:rPr lang="en-US" altLang="en-US" dirty="0">
+                <a:solidFill>
+                  <a:srgbClr val="0A0A0A"/>
+                </a:solidFill>
+                <a:latin typeface="Times New Roman" panose="02020603050405020304" pitchFamily="18" charset="0"/>
+                <a:cs typeface="Times New Roman" panose="02020603050405020304" pitchFamily="18" charset="0"/>
+              </a:rPr>
+              <a:t> </a:t>
+            </a:r>
+            <a:r>
+              <a:rPr lang="en-US" altLang="en-US" b="1" dirty="0">
+                <a:solidFill>
+                  <a:srgbClr val="0A0A0A"/>
+                </a:solidFill>
+                <a:latin typeface="Times New Roman" panose="02020603050405020304" pitchFamily="18" charset="0"/>
+                <a:cs typeface="Times New Roman" panose="02020603050405020304" pitchFamily="18" charset="0"/>
+              </a:rPr>
+              <a:t>1998</a:t>
+            </a:r>
+            <a:r>
+              <a:rPr lang="en-US" altLang="en-US" dirty="0">
+                <a:solidFill>
+                  <a:srgbClr val="0A0A0A"/>
+                </a:solidFill>
+                <a:latin typeface="Times New Roman" panose="02020603050405020304" pitchFamily="18" charset="0"/>
+                <a:cs typeface="Times New Roman" panose="02020603050405020304" pitchFamily="18" charset="0"/>
+              </a:rPr>
+              <a:t> avec </a:t>
+            </a:r>
+            <a:r>
+              <a:rPr lang="en-US" altLang="en-US" b="1" dirty="0">
+                <a:solidFill>
+                  <a:srgbClr val="0A0A0A"/>
+                </a:solidFill>
+                <a:latin typeface="Times New Roman" panose="02020603050405020304" pitchFamily="18" charset="0"/>
+                <a:cs typeface="Times New Roman" panose="02020603050405020304" pitchFamily="18" charset="0"/>
+              </a:rPr>
+              <a:t>Java 2 (JDK 1.2)</a:t>
+            </a:r>
+            <a:r>
+              <a:rPr lang="en-US" altLang="en-US" dirty="0">
+                <a:solidFill>
+                  <a:srgbClr val="0A0A0A"/>
+                </a:solidFill>
+                <a:latin typeface="Times New Roman" panose="02020603050405020304" pitchFamily="18" charset="0"/>
+                <a:cs typeface="Times New Roman" panose="02020603050405020304" pitchFamily="18" charset="0"/>
+              </a:rPr>
+              <a:t>. </a:t>
+            </a:r>
+            <a:r>
+              <a:rPr lang="en-US" altLang="en-US" dirty="0" err="1">
+                <a:solidFill>
+                  <a:srgbClr val="0A0A0A"/>
+                </a:solidFill>
+                <a:latin typeface="Times New Roman" panose="02020603050405020304" pitchFamily="18" charset="0"/>
+                <a:cs typeface="Times New Roman" panose="02020603050405020304" pitchFamily="18" charset="0"/>
+              </a:rPr>
+              <a:t>C'est</a:t>
+            </a:r>
+            <a:r>
+              <a:rPr lang="en-US" altLang="en-US" dirty="0">
+                <a:solidFill>
+                  <a:srgbClr val="0A0A0A"/>
+                </a:solidFill>
+                <a:latin typeface="Times New Roman" panose="02020603050405020304" pitchFamily="18" charset="0"/>
+                <a:cs typeface="Times New Roman" panose="02020603050405020304" pitchFamily="18" charset="0"/>
+              </a:rPr>
+              <a:t> à </a:t>
+            </a:r>
+            <a:r>
+              <a:rPr lang="en-US" altLang="en-US" dirty="0" err="1">
+                <a:solidFill>
+                  <a:srgbClr val="0A0A0A"/>
+                </a:solidFill>
+                <a:latin typeface="Times New Roman" panose="02020603050405020304" pitchFamily="18" charset="0"/>
+                <a:cs typeface="Times New Roman" panose="02020603050405020304" pitchFamily="18" charset="0"/>
+              </a:rPr>
+              <a:t>ce</a:t>
+            </a:r>
+            <a:r>
+              <a:rPr lang="en-US" altLang="en-US" dirty="0">
+                <a:solidFill>
+                  <a:srgbClr val="0A0A0A"/>
+                </a:solidFill>
+                <a:latin typeface="Times New Roman" panose="02020603050405020304" pitchFamily="18" charset="0"/>
+                <a:cs typeface="Times New Roman" panose="02020603050405020304" pitchFamily="18" charset="0"/>
+              </a:rPr>
+              <a:t> moment-</a:t>
+            </a:r>
+            <a:r>
+              <a:rPr lang="en-US" altLang="en-US" dirty="0" err="1">
+                <a:solidFill>
+                  <a:srgbClr val="0A0A0A"/>
+                </a:solidFill>
+                <a:latin typeface="Times New Roman" panose="02020603050405020304" pitchFamily="18" charset="0"/>
+                <a:cs typeface="Times New Roman" panose="02020603050405020304" pitchFamily="18" charset="0"/>
+              </a:rPr>
+              <a:t>là</a:t>
+            </a:r>
+            <a:r>
+              <a:rPr lang="en-US" altLang="en-US" dirty="0">
+                <a:solidFill>
+                  <a:srgbClr val="0A0A0A"/>
+                </a:solidFill>
+                <a:latin typeface="Times New Roman" panose="02020603050405020304" pitchFamily="18" charset="0"/>
+                <a:cs typeface="Times New Roman" panose="02020603050405020304" pitchFamily="18" charset="0"/>
+              </a:rPr>
+              <a:t> </a:t>
+            </a:r>
+            <a:r>
+              <a:rPr lang="en-US" altLang="en-US" dirty="0" err="1">
+                <a:solidFill>
+                  <a:srgbClr val="0A0A0A"/>
+                </a:solidFill>
+                <a:latin typeface="Times New Roman" panose="02020603050405020304" pitchFamily="18" charset="0"/>
+                <a:cs typeface="Times New Roman" panose="02020603050405020304" pitchFamily="18" charset="0"/>
+              </a:rPr>
+              <a:t>qu'apparaissent</a:t>
+            </a:r>
+            <a:r>
+              <a:rPr lang="en-US" altLang="en-US" dirty="0">
+                <a:solidFill>
+                  <a:srgbClr val="0A0A0A"/>
+                </a:solidFill>
+                <a:latin typeface="Times New Roman" panose="02020603050405020304" pitchFamily="18" charset="0"/>
+                <a:cs typeface="Times New Roman" panose="02020603050405020304" pitchFamily="18" charset="0"/>
+              </a:rPr>
+              <a:t> les interfaces List, Set, Map et les classes </a:t>
+            </a:r>
+            <a:r>
+              <a:rPr lang="en-US" altLang="en-US" dirty="0" err="1">
+                <a:solidFill>
+                  <a:srgbClr val="0A0A0A"/>
+                </a:solidFill>
+                <a:latin typeface="Times New Roman" panose="02020603050405020304" pitchFamily="18" charset="0"/>
+                <a:cs typeface="Times New Roman" panose="02020603050405020304" pitchFamily="18" charset="0"/>
+              </a:rPr>
+              <a:t>comme</a:t>
+            </a:r>
+            <a:r>
+              <a:rPr lang="en-US" altLang="en-US" dirty="0">
+                <a:solidFill>
+                  <a:srgbClr val="0A0A0A"/>
+                </a:solidFill>
+                <a:latin typeface="Times New Roman" panose="02020603050405020304" pitchFamily="18" charset="0"/>
+                <a:cs typeface="Times New Roman" panose="02020603050405020304" pitchFamily="18" charset="0"/>
+              </a:rPr>
+              <a:t> </a:t>
+            </a:r>
+            <a:r>
+              <a:rPr lang="en-US" altLang="en-US" dirty="0" err="1">
+                <a:solidFill>
+                  <a:srgbClr val="0A0A0A"/>
+                </a:solidFill>
+                <a:latin typeface="Times New Roman" panose="02020603050405020304" pitchFamily="18" charset="0"/>
+                <a:cs typeface="Times New Roman" panose="02020603050405020304" pitchFamily="18" charset="0"/>
+              </a:rPr>
+              <a:t>ArrayList</a:t>
+            </a:r>
+            <a:r>
+              <a:rPr lang="en-US" altLang="en-US" dirty="0">
+                <a:solidFill>
+                  <a:srgbClr val="0A0A0A"/>
+                </a:solidFill>
+                <a:latin typeface="Times New Roman" panose="02020603050405020304" pitchFamily="18" charset="0"/>
+                <a:cs typeface="Times New Roman" panose="02020603050405020304" pitchFamily="18" charset="0"/>
+              </a:rPr>
+              <a:t> </a:t>
+            </a:r>
+            <a:r>
+              <a:rPr lang="en-US" altLang="en-US" dirty="0" err="1">
+                <a:solidFill>
+                  <a:srgbClr val="0A0A0A"/>
+                </a:solidFill>
+                <a:latin typeface="Times New Roman" panose="02020603050405020304" pitchFamily="18" charset="0"/>
+                <a:cs typeface="Times New Roman" panose="02020603050405020304" pitchFamily="18" charset="0"/>
+              </a:rPr>
+              <a:t>ou</a:t>
+            </a:r>
+            <a:r>
+              <a:rPr lang="en-US" altLang="en-US" dirty="0">
+                <a:solidFill>
+                  <a:srgbClr val="0A0A0A"/>
+                </a:solidFill>
+                <a:latin typeface="Times New Roman" panose="02020603050405020304" pitchFamily="18" charset="0"/>
+                <a:cs typeface="Times New Roman" panose="02020603050405020304" pitchFamily="18" charset="0"/>
+              </a:rPr>
+              <a:t> </a:t>
+            </a:r>
+            <a:r>
+              <a:rPr lang="en-US" altLang="en-US" dirty="0" err="1">
+                <a:solidFill>
+                  <a:srgbClr val="0A0A0A"/>
+                </a:solidFill>
+                <a:latin typeface="Times New Roman" panose="02020603050405020304" pitchFamily="18" charset="0"/>
+                <a:cs typeface="Times New Roman" panose="02020603050405020304" pitchFamily="18" charset="0"/>
+              </a:rPr>
+              <a:t>HashMap</a:t>
+            </a:r>
+            <a:r>
+              <a:rPr lang="en-US" altLang="en-US" dirty="0">
+                <a:solidFill>
+                  <a:srgbClr val="0A0A0A"/>
+                </a:solidFill>
+                <a:latin typeface="Times New Roman" panose="02020603050405020304" pitchFamily="18" charset="0"/>
+                <a:cs typeface="Times New Roman" panose="02020603050405020304" pitchFamily="18" charset="0"/>
+              </a:rPr>
+              <a:t>.</a:t>
+            </a:r>
+          </a:p>
+          <a:p>
             <a:pPr lvl="0" eaLnBrk="0" hangingPunct="0"/>
-            <a:r>
-              <a:rPr lang="en-US" altLang="en-US" b="1" dirty="0" smtClean="0">
-                <a:solidFill>
-                  <a:srgbClr val="0A0A0A"/>
-                </a:solidFill>
-                <a:latin typeface="Times New Roman" panose="02020603050405020304" pitchFamily="18" charset="0"/>
-                <a:cs typeface="Times New Roman" panose="02020603050405020304" pitchFamily="18" charset="0"/>
-              </a:rPr>
-              <a:t>Les </a:t>
-            </a:r>
-            <a:r>
-              <a:rPr lang="en-US" altLang="en-US" b="1" dirty="0">
-                <a:solidFill>
-                  <a:srgbClr val="0A0A0A"/>
-                </a:solidFill>
-                <a:latin typeface="Times New Roman" panose="02020603050405020304" pitchFamily="18" charset="0"/>
-                <a:cs typeface="Times New Roman" panose="02020603050405020304" pitchFamily="18" charset="0"/>
-              </a:rPr>
-              <a:t>Generics</a:t>
-            </a:r>
-            <a:r>
-              <a:rPr lang="en-US" altLang="en-US" dirty="0">
-                <a:solidFill>
-                  <a:srgbClr val="0A0A0A"/>
-                </a:solidFill>
-                <a:latin typeface="Times New Roman" panose="02020603050405020304" pitchFamily="18" charset="0"/>
-                <a:cs typeface="Times New Roman" panose="02020603050405020304" pitchFamily="18" charset="0"/>
-              </a:rPr>
-              <a:t> : </a:t>
-            </a:r>
-            <a:r>
-              <a:rPr lang="en-US" altLang="en-US" dirty="0" err="1">
-                <a:solidFill>
-                  <a:srgbClr val="0A0A0A"/>
-                </a:solidFill>
-                <a:latin typeface="Times New Roman" panose="02020603050405020304" pitchFamily="18" charset="0"/>
-                <a:cs typeface="Times New Roman" panose="02020603050405020304" pitchFamily="18" charset="0"/>
-              </a:rPr>
-              <a:t>Introduits</a:t>
-            </a:r>
-            <a:r>
-              <a:rPr lang="en-US" altLang="en-US" dirty="0">
-                <a:solidFill>
-                  <a:srgbClr val="0A0A0A"/>
-                </a:solidFill>
-                <a:latin typeface="Times New Roman" panose="02020603050405020304" pitchFamily="18" charset="0"/>
-                <a:cs typeface="Times New Roman" panose="02020603050405020304" pitchFamily="18" charset="0"/>
-              </a:rPr>
-              <a:t> </a:t>
-            </a:r>
-            <a:r>
-              <a:rPr lang="en-US" altLang="en-US" dirty="0" err="1">
-                <a:solidFill>
-                  <a:srgbClr val="0A0A0A"/>
-                </a:solidFill>
-                <a:latin typeface="Times New Roman" panose="02020603050405020304" pitchFamily="18" charset="0"/>
-                <a:cs typeface="Times New Roman" panose="02020603050405020304" pitchFamily="18" charset="0"/>
-              </a:rPr>
-              <a:t>en</a:t>
-            </a:r>
-            <a:r>
-              <a:rPr lang="en-US" altLang="en-US" dirty="0">
-                <a:solidFill>
-                  <a:srgbClr val="0A0A0A"/>
-                </a:solidFill>
-                <a:latin typeface="Times New Roman" panose="02020603050405020304" pitchFamily="18" charset="0"/>
-                <a:cs typeface="Times New Roman" panose="02020603050405020304" pitchFamily="18" charset="0"/>
-              </a:rPr>
-              <a:t> </a:t>
-            </a:r>
-            <a:r>
-              <a:rPr lang="en-US" altLang="en-US" b="1" dirty="0">
-                <a:solidFill>
-                  <a:srgbClr val="0A0A0A"/>
-                </a:solidFill>
-                <a:latin typeface="Times New Roman" panose="02020603050405020304" pitchFamily="18" charset="0"/>
-                <a:cs typeface="Times New Roman" panose="02020603050405020304" pitchFamily="18" charset="0"/>
-              </a:rPr>
-              <a:t>2004</a:t>
-            </a:r>
-            <a:r>
-              <a:rPr lang="en-US" altLang="en-US" dirty="0">
-                <a:solidFill>
-                  <a:srgbClr val="0A0A0A"/>
-                </a:solidFill>
-                <a:latin typeface="Times New Roman" panose="02020603050405020304" pitchFamily="18" charset="0"/>
-                <a:cs typeface="Times New Roman" panose="02020603050405020304" pitchFamily="18" charset="0"/>
-              </a:rPr>
-              <a:t> avec </a:t>
-            </a:r>
-            <a:r>
-              <a:rPr lang="en-US" altLang="en-US" b="1" dirty="0">
-                <a:solidFill>
-                  <a:srgbClr val="0A0A0A"/>
-                </a:solidFill>
-                <a:latin typeface="Times New Roman" panose="02020603050405020304" pitchFamily="18" charset="0"/>
-                <a:cs typeface="Times New Roman" panose="02020603050405020304" pitchFamily="18" charset="0"/>
-              </a:rPr>
-              <a:t>Java 5</a:t>
-            </a:r>
-            <a:r>
-              <a:rPr lang="en-US" altLang="en-US" dirty="0">
-                <a:solidFill>
-                  <a:srgbClr val="0A0A0A"/>
-                </a:solidFill>
-                <a:latin typeface="Times New Roman" panose="02020603050405020304" pitchFamily="18" charset="0"/>
-                <a:cs typeface="Times New Roman" panose="02020603050405020304" pitchFamily="18" charset="0"/>
-              </a:rPr>
-              <a:t>. Avant </a:t>
-            </a:r>
-            <a:r>
-              <a:rPr lang="en-US" altLang="en-US" dirty="0" err="1">
-                <a:solidFill>
-                  <a:srgbClr val="0A0A0A"/>
-                </a:solidFill>
-                <a:latin typeface="Times New Roman" panose="02020603050405020304" pitchFamily="18" charset="0"/>
-                <a:cs typeface="Times New Roman" panose="02020603050405020304" pitchFamily="18" charset="0"/>
-              </a:rPr>
-              <a:t>cette</a:t>
-            </a:r>
-            <a:r>
-              <a:rPr lang="en-US" altLang="en-US" dirty="0">
-                <a:solidFill>
-                  <a:srgbClr val="0A0A0A"/>
-                </a:solidFill>
-                <a:latin typeface="Times New Roman" panose="02020603050405020304" pitchFamily="18" charset="0"/>
-                <a:cs typeface="Times New Roman" panose="02020603050405020304" pitchFamily="18" charset="0"/>
-              </a:rPr>
-              <a:t> date, on </a:t>
-            </a:r>
-            <a:r>
-              <a:rPr lang="en-US" altLang="en-US" dirty="0" err="1">
-                <a:solidFill>
-                  <a:srgbClr val="0A0A0A"/>
-                </a:solidFill>
-                <a:latin typeface="Times New Roman" panose="02020603050405020304" pitchFamily="18" charset="0"/>
-                <a:cs typeface="Times New Roman" panose="02020603050405020304" pitchFamily="18" charset="0"/>
-              </a:rPr>
-              <a:t>pouvait</a:t>
-            </a:r>
-            <a:r>
-              <a:rPr lang="en-US" altLang="en-US" dirty="0">
-                <a:solidFill>
-                  <a:srgbClr val="0A0A0A"/>
-                </a:solidFill>
-                <a:latin typeface="Times New Roman" panose="02020603050405020304" pitchFamily="18" charset="0"/>
-                <a:cs typeface="Times New Roman" panose="02020603050405020304" pitchFamily="18" charset="0"/>
-              </a:rPr>
-              <a:t> </a:t>
-            </a:r>
-            <a:r>
-              <a:rPr lang="en-US" altLang="en-US" dirty="0" err="1">
-                <a:solidFill>
-                  <a:srgbClr val="0A0A0A"/>
-                </a:solidFill>
-                <a:latin typeface="Times New Roman" panose="02020603050405020304" pitchFamily="18" charset="0"/>
-                <a:cs typeface="Times New Roman" panose="02020603050405020304" pitchFamily="18" charset="0"/>
-              </a:rPr>
-              <a:t>mettre</a:t>
-            </a:r>
-            <a:r>
-              <a:rPr lang="en-US" altLang="en-US" dirty="0">
-                <a:solidFill>
-                  <a:srgbClr val="0A0A0A"/>
-                </a:solidFill>
-                <a:latin typeface="Times New Roman" panose="02020603050405020304" pitchFamily="18" charset="0"/>
-                <a:cs typeface="Times New Roman" panose="02020603050405020304" pitchFamily="18" charset="0"/>
-              </a:rPr>
-              <a:t> </a:t>
-            </a:r>
-            <a:r>
-              <a:rPr lang="en-US" altLang="en-US" dirty="0" err="1">
-                <a:solidFill>
-                  <a:srgbClr val="0A0A0A"/>
-                </a:solidFill>
-                <a:latin typeface="Times New Roman" panose="02020603050405020304" pitchFamily="18" charset="0"/>
-                <a:cs typeface="Times New Roman" panose="02020603050405020304" pitchFamily="18" charset="0"/>
-              </a:rPr>
-              <a:t>n'importe</a:t>
-            </a:r>
-            <a:r>
-              <a:rPr lang="en-US" altLang="en-US" dirty="0">
-                <a:solidFill>
-                  <a:srgbClr val="0A0A0A"/>
-                </a:solidFill>
-                <a:latin typeface="Times New Roman" panose="02020603050405020304" pitchFamily="18" charset="0"/>
-                <a:cs typeface="Times New Roman" panose="02020603050405020304" pitchFamily="18" charset="0"/>
-              </a:rPr>
-              <a:t> </a:t>
-            </a:r>
-            <a:r>
-              <a:rPr lang="en-US" altLang="en-US" dirty="0" err="1">
-                <a:solidFill>
-                  <a:srgbClr val="0A0A0A"/>
-                </a:solidFill>
-                <a:latin typeface="Times New Roman" panose="02020603050405020304" pitchFamily="18" charset="0"/>
-                <a:cs typeface="Times New Roman" panose="02020603050405020304" pitchFamily="18" charset="0"/>
-              </a:rPr>
-              <a:t>quel</a:t>
-            </a:r>
-            <a:r>
-              <a:rPr lang="en-US" altLang="en-US" dirty="0">
-                <a:solidFill>
-                  <a:srgbClr val="0A0A0A"/>
-                </a:solidFill>
-                <a:latin typeface="Times New Roman" panose="02020603050405020304" pitchFamily="18" charset="0"/>
-                <a:cs typeface="Times New Roman" panose="02020603050405020304" pitchFamily="18" charset="0"/>
-              </a:rPr>
-              <a:t> objet </a:t>
-            </a:r>
-            <a:r>
-              <a:rPr lang="en-US" altLang="en-US" dirty="0" err="1">
-                <a:solidFill>
-                  <a:srgbClr val="0A0A0A"/>
-                </a:solidFill>
-                <a:latin typeface="Times New Roman" panose="02020603050405020304" pitchFamily="18" charset="0"/>
-                <a:cs typeface="Times New Roman" panose="02020603050405020304" pitchFamily="18" charset="0"/>
-              </a:rPr>
-              <a:t>dans</a:t>
-            </a:r>
-            <a:r>
-              <a:rPr lang="en-US" altLang="en-US" dirty="0">
-                <a:solidFill>
-                  <a:srgbClr val="0A0A0A"/>
-                </a:solidFill>
-                <a:latin typeface="Times New Roman" panose="02020603050405020304" pitchFamily="18" charset="0"/>
-                <a:cs typeface="Times New Roman" panose="02020603050405020304" pitchFamily="18" charset="0"/>
-              </a:rPr>
-              <a:t> </a:t>
-            </a:r>
-            <a:r>
-              <a:rPr lang="en-US" altLang="en-US" dirty="0" err="1">
-                <a:solidFill>
-                  <a:srgbClr val="0A0A0A"/>
-                </a:solidFill>
-                <a:latin typeface="Times New Roman" panose="02020603050405020304" pitchFamily="18" charset="0"/>
-                <a:cs typeface="Times New Roman" panose="02020603050405020304" pitchFamily="18" charset="0"/>
-              </a:rPr>
-              <a:t>une</a:t>
-            </a:r>
-            <a:r>
-              <a:rPr lang="en-US" altLang="en-US" dirty="0">
-                <a:solidFill>
-                  <a:srgbClr val="0A0A0A"/>
-                </a:solidFill>
-                <a:latin typeface="Times New Roman" panose="02020603050405020304" pitchFamily="18" charset="0"/>
-                <a:cs typeface="Times New Roman" panose="02020603050405020304" pitchFamily="18" charset="0"/>
-              </a:rPr>
-              <a:t> </a:t>
-            </a:r>
-            <a:r>
-              <a:rPr lang="en-US" altLang="en-US" dirty="0" err="1">
-                <a:solidFill>
-                  <a:srgbClr val="0A0A0A"/>
-                </a:solidFill>
-                <a:latin typeface="Times New Roman" panose="02020603050405020304" pitchFamily="18" charset="0"/>
-                <a:cs typeface="Times New Roman" panose="02020603050405020304" pitchFamily="18" charset="0"/>
-              </a:rPr>
-              <a:t>liste</a:t>
-            </a:r>
-            <a:r>
-              <a:rPr lang="en-US" altLang="en-US" dirty="0">
-                <a:solidFill>
-                  <a:srgbClr val="0A0A0A"/>
-                </a:solidFill>
-                <a:latin typeface="Times New Roman" panose="02020603050405020304" pitchFamily="18" charset="0"/>
-                <a:cs typeface="Times New Roman" panose="02020603050405020304" pitchFamily="18" charset="0"/>
-              </a:rPr>
-              <a:t>, </a:t>
-            </a:r>
-            <a:r>
-              <a:rPr lang="en-US" altLang="en-US" dirty="0" err="1">
-                <a:solidFill>
-                  <a:srgbClr val="0A0A0A"/>
-                </a:solidFill>
-                <a:latin typeface="Times New Roman" panose="02020603050405020304" pitchFamily="18" charset="0"/>
-                <a:cs typeface="Times New Roman" panose="02020603050405020304" pitchFamily="18" charset="0"/>
-              </a:rPr>
-              <a:t>mais</a:t>
-            </a:r>
-            <a:r>
-              <a:rPr lang="en-US" altLang="en-US" dirty="0">
-                <a:solidFill>
-                  <a:srgbClr val="0A0A0A"/>
-                </a:solidFill>
-                <a:latin typeface="Times New Roman" panose="02020603050405020304" pitchFamily="18" charset="0"/>
-                <a:cs typeface="Times New Roman" panose="02020603050405020304" pitchFamily="18" charset="0"/>
-              </a:rPr>
-              <a:t> </a:t>
-            </a:r>
-            <a:r>
-              <a:rPr lang="en-US" altLang="en-US" dirty="0" err="1">
-                <a:solidFill>
-                  <a:srgbClr val="0A0A0A"/>
-                </a:solidFill>
-                <a:latin typeface="Times New Roman" panose="02020603050405020304" pitchFamily="18" charset="0"/>
-                <a:cs typeface="Times New Roman" panose="02020603050405020304" pitchFamily="18" charset="0"/>
-              </a:rPr>
-              <a:t>il</a:t>
-            </a:r>
-            <a:r>
-              <a:rPr lang="en-US" altLang="en-US" dirty="0">
-                <a:solidFill>
-                  <a:srgbClr val="0A0A0A"/>
-                </a:solidFill>
-                <a:latin typeface="Times New Roman" panose="02020603050405020304" pitchFamily="18" charset="0"/>
-                <a:cs typeface="Times New Roman" panose="02020603050405020304" pitchFamily="18" charset="0"/>
-              </a:rPr>
-              <a:t> </a:t>
-            </a:r>
-            <a:r>
-              <a:rPr lang="en-US" altLang="en-US" dirty="0" err="1">
-                <a:solidFill>
-                  <a:srgbClr val="0A0A0A"/>
-                </a:solidFill>
-                <a:latin typeface="Times New Roman" panose="02020603050405020304" pitchFamily="18" charset="0"/>
-                <a:cs typeface="Times New Roman" panose="02020603050405020304" pitchFamily="18" charset="0"/>
-              </a:rPr>
-              <a:t>fallait</a:t>
-            </a:r>
-            <a:r>
-              <a:rPr lang="en-US" altLang="en-US" dirty="0">
-                <a:solidFill>
-                  <a:srgbClr val="0A0A0A"/>
-                </a:solidFill>
-                <a:latin typeface="Times New Roman" panose="02020603050405020304" pitchFamily="18" charset="0"/>
-                <a:cs typeface="Times New Roman" panose="02020603050405020304" pitchFamily="18" charset="0"/>
-              </a:rPr>
-              <a:t> </a:t>
-            </a:r>
-            <a:r>
-              <a:rPr lang="en-US" altLang="en-US" dirty="0" err="1">
-                <a:solidFill>
-                  <a:srgbClr val="0A0A0A"/>
-                </a:solidFill>
-                <a:latin typeface="Times New Roman" panose="02020603050405020304" pitchFamily="18" charset="0"/>
-                <a:cs typeface="Times New Roman" panose="02020603050405020304" pitchFamily="18" charset="0"/>
-              </a:rPr>
-              <a:t>effectuer</a:t>
-            </a:r>
-            <a:r>
-              <a:rPr lang="en-US" altLang="en-US" dirty="0">
-                <a:solidFill>
-                  <a:srgbClr val="0A0A0A"/>
-                </a:solidFill>
-                <a:latin typeface="Times New Roman" panose="02020603050405020304" pitchFamily="18" charset="0"/>
-                <a:cs typeface="Times New Roman" panose="02020603050405020304" pitchFamily="18" charset="0"/>
-              </a:rPr>
-              <a:t> un </a:t>
-            </a:r>
-            <a:r>
-              <a:rPr lang="en-US" altLang="en-US" b="1" dirty="0">
-                <a:solidFill>
-                  <a:srgbClr val="0A0A0A"/>
-                </a:solidFill>
-                <a:latin typeface="Times New Roman" panose="02020603050405020304" pitchFamily="18" charset="0"/>
-                <a:cs typeface="Times New Roman" panose="02020603050405020304" pitchFamily="18" charset="0"/>
-              </a:rPr>
-              <a:t>"cast" </a:t>
-            </a:r>
-            <a:r>
-              <a:rPr lang="en-US" altLang="en-US" dirty="0" err="1">
-                <a:solidFill>
-                  <a:srgbClr val="0A0A0A"/>
-                </a:solidFill>
-                <a:latin typeface="Times New Roman" panose="02020603050405020304" pitchFamily="18" charset="0"/>
-                <a:cs typeface="Times New Roman" panose="02020603050405020304" pitchFamily="18" charset="0"/>
-              </a:rPr>
-              <a:t>manuel</a:t>
-            </a:r>
-            <a:r>
-              <a:rPr lang="en-US" altLang="en-US" dirty="0">
-                <a:solidFill>
-                  <a:srgbClr val="0A0A0A"/>
-                </a:solidFill>
-                <a:latin typeface="Times New Roman" panose="02020603050405020304" pitchFamily="18" charset="0"/>
-                <a:cs typeface="Times New Roman" panose="02020603050405020304" pitchFamily="18" charset="0"/>
-              </a:rPr>
-              <a:t> à </a:t>
-            </a:r>
-            <a:r>
-              <a:rPr lang="en-US" altLang="en-US" dirty="0" err="1">
-                <a:solidFill>
-                  <a:srgbClr val="0A0A0A"/>
-                </a:solidFill>
-                <a:latin typeface="Times New Roman" panose="02020603050405020304" pitchFamily="18" charset="0"/>
-                <a:cs typeface="Times New Roman" panose="02020603050405020304" pitchFamily="18" charset="0"/>
-              </a:rPr>
-              <a:t>chaque</a:t>
-            </a:r>
-            <a:r>
-              <a:rPr lang="en-US" altLang="en-US" dirty="0">
-                <a:solidFill>
-                  <a:srgbClr val="0A0A0A"/>
-                </a:solidFill>
-                <a:latin typeface="Times New Roman" panose="02020603050405020304" pitchFamily="18" charset="0"/>
-                <a:cs typeface="Times New Roman" panose="02020603050405020304" pitchFamily="18" charset="0"/>
-              </a:rPr>
-              <a:t> </a:t>
-            </a:r>
-            <a:r>
-              <a:rPr lang="en-US" altLang="en-US" dirty="0" err="1">
-                <a:solidFill>
-                  <a:srgbClr val="0A0A0A"/>
-                </a:solidFill>
-                <a:latin typeface="Times New Roman" panose="02020603050405020304" pitchFamily="18" charset="0"/>
-                <a:cs typeface="Times New Roman" panose="02020603050405020304" pitchFamily="18" charset="0"/>
-              </a:rPr>
-              <a:t>fois</a:t>
-            </a:r>
-            <a:r>
-              <a:rPr lang="en-US" altLang="en-US" dirty="0">
-                <a:solidFill>
-                  <a:srgbClr val="0A0A0A"/>
-                </a:solidFill>
-                <a:latin typeface="Times New Roman" panose="02020603050405020304" pitchFamily="18" charset="0"/>
-                <a:cs typeface="Times New Roman" panose="02020603050405020304" pitchFamily="18" charset="0"/>
-              </a:rPr>
-              <a:t> </a:t>
-            </a:r>
-            <a:r>
-              <a:rPr lang="en-US" altLang="en-US" dirty="0" err="1">
-                <a:solidFill>
-                  <a:srgbClr val="0A0A0A"/>
-                </a:solidFill>
-                <a:latin typeface="Times New Roman" panose="02020603050405020304" pitchFamily="18" charset="0"/>
-                <a:cs typeface="Times New Roman" panose="02020603050405020304" pitchFamily="18" charset="0"/>
-              </a:rPr>
-              <a:t>qu'on</a:t>
-            </a:r>
-            <a:r>
-              <a:rPr lang="en-US" altLang="en-US" dirty="0">
-                <a:solidFill>
-                  <a:srgbClr val="0A0A0A"/>
-                </a:solidFill>
-                <a:latin typeface="Times New Roman" panose="02020603050405020304" pitchFamily="18" charset="0"/>
-                <a:cs typeface="Times New Roman" panose="02020603050405020304" pitchFamily="18" charset="0"/>
-              </a:rPr>
-              <a:t> </a:t>
-            </a:r>
-            <a:r>
-              <a:rPr lang="en-US" altLang="en-US" dirty="0" err="1" smtClean="0">
-                <a:solidFill>
-                  <a:srgbClr val="0A0A0A"/>
-                </a:solidFill>
-                <a:latin typeface="Times New Roman" panose="02020603050405020304" pitchFamily="18" charset="0"/>
-                <a:cs typeface="Times New Roman" panose="02020603050405020304" pitchFamily="18" charset="0"/>
-              </a:rPr>
-              <a:t>veut</a:t>
-            </a:r>
-            <a:r>
-              <a:rPr lang="en-US" altLang="en-US" dirty="0" smtClean="0">
-                <a:solidFill>
-                  <a:srgbClr val="0A0A0A"/>
-                </a:solidFill>
-                <a:latin typeface="Times New Roman" panose="02020603050405020304" pitchFamily="18" charset="0"/>
-                <a:cs typeface="Times New Roman" panose="02020603050405020304" pitchFamily="18" charset="0"/>
-              </a:rPr>
-              <a:t> </a:t>
-            </a:r>
-            <a:r>
-              <a:rPr lang="en-US" altLang="en-US" dirty="0" err="1" smtClean="0">
-                <a:solidFill>
-                  <a:srgbClr val="0A0A0A"/>
-                </a:solidFill>
-                <a:latin typeface="Times New Roman" panose="02020603050405020304" pitchFamily="18" charset="0"/>
-                <a:cs typeface="Times New Roman" panose="02020603050405020304" pitchFamily="18" charset="0"/>
-              </a:rPr>
-              <a:t>récupérer</a:t>
-            </a:r>
-            <a:r>
-              <a:rPr lang="en-US" altLang="en-US" dirty="0" smtClean="0">
-                <a:solidFill>
-                  <a:srgbClr val="0A0A0A"/>
-                </a:solidFill>
-                <a:latin typeface="Times New Roman" panose="02020603050405020304" pitchFamily="18" charset="0"/>
-                <a:cs typeface="Times New Roman" panose="02020603050405020304" pitchFamily="18" charset="0"/>
-              </a:rPr>
-              <a:t> un </a:t>
-            </a:r>
-            <a:r>
-              <a:rPr lang="en-US" altLang="en-US" dirty="0" err="1" smtClean="0">
-                <a:solidFill>
-                  <a:srgbClr val="0A0A0A"/>
-                </a:solidFill>
-                <a:latin typeface="Times New Roman" panose="02020603050405020304" pitchFamily="18" charset="0"/>
-                <a:cs typeface="Times New Roman" panose="02020603050405020304" pitchFamily="18" charset="0"/>
-              </a:rPr>
-              <a:t>élément</a:t>
-            </a:r>
-            <a:r>
-              <a:rPr lang="en-US" altLang="en-US" dirty="0" smtClean="0">
-                <a:solidFill>
-                  <a:srgbClr val="0A0A0A"/>
-                </a:solidFill>
-                <a:latin typeface="Times New Roman" panose="02020603050405020304" pitchFamily="18" charset="0"/>
-                <a:cs typeface="Times New Roman" panose="02020603050405020304" pitchFamily="18" charset="0"/>
-              </a:rPr>
-              <a:t>.</a:t>
-            </a:r>
             <a:endParaRPr lang="en-US" altLang="en-US" b="1" dirty="0">
               <a:solidFill>
                 <a:srgbClr val="0A0A0A"/>
@@ -22345,7 +22537,507 @@
           </a:p>
           <a:p>
             <a:pPr lvl="0" eaLnBrk="0" hangingPunct="0"/>
-            <a:endParaRPr lang="en-US" altLang="en-US" b="1" dirty="0" smtClean="0">
+            <a:r>
+              <a:rPr lang="en-US" altLang="en-US" b="1" dirty="0" smtClean="0">
+                <a:solidFill>
+                  <a:srgbClr val="0A0A0A"/>
+                </a:solidFill>
+                <a:latin typeface="Times New Roman" panose="02020603050405020304" pitchFamily="18" charset="0"/>
+                <a:cs typeface="Times New Roman" panose="02020603050405020304" pitchFamily="18" charset="0"/>
+              </a:rPr>
+              <a:t>Les </a:t>
+            </a:r>
+            <a:r>
+              <a:rPr lang="en-US" altLang="en-US" b="1" dirty="0">
+                <a:solidFill>
+                  <a:srgbClr val="0A0A0A"/>
+                </a:solidFill>
+                <a:latin typeface="Times New Roman" panose="02020603050405020304" pitchFamily="18" charset="0"/>
+                <a:cs typeface="Times New Roman" panose="02020603050405020304" pitchFamily="18" charset="0"/>
+              </a:rPr>
+              <a:t>Generics</a:t>
+            </a:r>
+            <a:r>
+              <a:rPr lang="en-US" altLang="en-US" dirty="0">
+                <a:solidFill>
+                  <a:srgbClr val="0A0A0A"/>
+                </a:solidFill>
+                <a:latin typeface="Times New Roman" panose="02020603050405020304" pitchFamily="18" charset="0"/>
+                <a:cs typeface="Times New Roman" panose="02020603050405020304" pitchFamily="18" charset="0"/>
+              </a:rPr>
+              <a:t> : </a:t>
+            </a:r>
+            <a:r>
+              <a:rPr lang="en-US" altLang="en-US" dirty="0" err="1">
+                <a:solidFill>
+                  <a:srgbClr val="0A0A0A"/>
+                </a:solidFill>
+                <a:latin typeface="Times New Roman" panose="02020603050405020304" pitchFamily="18" charset="0"/>
+                <a:cs typeface="Times New Roman" panose="02020603050405020304" pitchFamily="18" charset="0"/>
+              </a:rPr>
+              <a:t>Introduits</a:t>
+            </a:r>
+            <a:r>
+              <a:rPr lang="en-US" altLang="en-US" dirty="0">
+                <a:solidFill>
+                  <a:srgbClr val="0A0A0A"/>
+                </a:solidFill>
+                <a:latin typeface="Times New Roman" panose="02020603050405020304" pitchFamily="18" charset="0"/>
+                <a:cs typeface="Times New Roman" panose="02020603050405020304" pitchFamily="18" charset="0"/>
+              </a:rPr>
+              <a:t> </a:t>
+            </a:r>
+            <a:r>
+              <a:rPr lang="en-US" altLang="en-US" dirty="0" err="1">
+                <a:solidFill>
+                  <a:srgbClr val="0A0A0A"/>
+                </a:solidFill>
+                <a:latin typeface="Times New Roman" panose="02020603050405020304" pitchFamily="18" charset="0"/>
+                <a:cs typeface="Times New Roman" panose="02020603050405020304" pitchFamily="18" charset="0"/>
+              </a:rPr>
+              <a:t>en</a:t>
+            </a:r>
+            <a:r>
+              <a:rPr lang="en-US" altLang="en-US" dirty="0">
+                <a:solidFill>
+                  <a:srgbClr val="0A0A0A"/>
+                </a:solidFill>
+                <a:latin typeface="Times New Roman" panose="02020603050405020304" pitchFamily="18" charset="0"/>
+                <a:cs typeface="Times New Roman" panose="02020603050405020304" pitchFamily="18" charset="0"/>
+              </a:rPr>
+              <a:t> </a:t>
+            </a:r>
+            <a:r>
+              <a:rPr lang="en-US" altLang="en-US" b="1" dirty="0">
+                <a:solidFill>
+                  <a:srgbClr val="0A0A0A"/>
+                </a:solidFill>
+                <a:latin typeface="Times New Roman" panose="02020603050405020304" pitchFamily="18" charset="0"/>
+                <a:cs typeface="Times New Roman" panose="02020603050405020304" pitchFamily="18" charset="0"/>
+              </a:rPr>
+              <a:t>2004</a:t>
+            </a:r>
+            <a:r>
+              <a:rPr lang="en-US" altLang="en-US" dirty="0">
+                <a:solidFill>
+                  <a:srgbClr val="0A0A0A"/>
+                </a:solidFill>
+                <a:latin typeface="Times New Roman" panose="02020603050405020304" pitchFamily="18" charset="0"/>
+                <a:cs typeface="Times New Roman" panose="02020603050405020304" pitchFamily="18" charset="0"/>
+              </a:rPr>
+              <a:t> avec </a:t>
+            </a:r>
+            <a:r>
+              <a:rPr lang="en-US" altLang="en-US" b="1" dirty="0">
+                <a:solidFill>
+                  <a:srgbClr val="0A0A0A"/>
+                </a:solidFill>
+                <a:latin typeface="Times New Roman" panose="02020603050405020304" pitchFamily="18" charset="0"/>
+                <a:cs typeface="Times New Roman" panose="02020603050405020304" pitchFamily="18" charset="0"/>
+              </a:rPr>
+              <a:t>Java 5</a:t>
+            </a:r>
+            <a:r>
+              <a:rPr lang="en-US" altLang="en-US" dirty="0">
+                <a:solidFill>
+                  <a:srgbClr val="0A0A0A"/>
+                </a:solidFill>
+                <a:latin typeface="Times New Roman" panose="02020603050405020304" pitchFamily="18" charset="0"/>
+                <a:cs typeface="Times New Roman" panose="02020603050405020304" pitchFamily="18" charset="0"/>
+              </a:rPr>
+              <a:t>. Avant </a:t>
+            </a:r>
+            <a:r>
+              <a:rPr lang="en-US" altLang="en-US" dirty="0" err="1">
+                <a:solidFill>
+                  <a:srgbClr val="0A0A0A"/>
+                </a:solidFill>
+                <a:latin typeface="Times New Roman" panose="02020603050405020304" pitchFamily="18" charset="0"/>
+                <a:cs typeface="Times New Roman" panose="02020603050405020304" pitchFamily="18" charset="0"/>
+              </a:rPr>
+              <a:t>cette</a:t>
+            </a:r>
+            <a:r>
+              <a:rPr lang="en-US" altLang="en-US" dirty="0">
+                <a:solidFill>
+                  <a:srgbClr val="0A0A0A"/>
+                </a:solidFill>
+                <a:latin typeface="Times New Roman" panose="02020603050405020304" pitchFamily="18" charset="0"/>
+                <a:cs typeface="Times New Roman" panose="02020603050405020304" pitchFamily="18" charset="0"/>
+              </a:rPr>
+              <a:t> date, on </a:t>
+            </a:r>
+            <a:r>
+              <a:rPr lang="en-US" altLang="en-US" dirty="0" err="1">
+                <a:solidFill>
+                  <a:srgbClr val="0A0A0A"/>
+                </a:solidFill>
+                <a:latin typeface="Times New Roman" panose="02020603050405020304" pitchFamily="18" charset="0"/>
+                <a:cs typeface="Times New Roman" panose="02020603050405020304" pitchFamily="18" charset="0"/>
+              </a:rPr>
+              <a:t>pouvait</a:t>
+            </a:r>
+            <a:r>
+              <a:rPr lang="en-US" altLang="en-US" dirty="0">
+                <a:solidFill>
+                  <a:srgbClr val="0A0A0A"/>
+                </a:solidFill>
+                <a:latin typeface="Times New Roman" panose="02020603050405020304" pitchFamily="18" charset="0"/>
+                <a:cs typeface="Times New Roman" panose="02020603050405020304" pitchFamily="18" charset="0"/>
+              </a:rPr>
+              <a:t> </a:t>
+            </a:r>
+            <a:r>
+              <a:rPr lang="en-US" altLang="en-US" dirty="0" err="1">
+                <a:solidFill>
+                  <a:srgbClr val="0A0A0A"/>
+                </a:solidFill>
+                <a:latin typeface="Times New Roman" panose="02020603050405020304" pitchFamily="18" charset="0"/>
+                <a:cs typeface="Times New Roman" panose="02020603050405020304" pitchFamily="18" charset="0"/>
+              </a:rPr>
+              <a:t>mettre</a:t>
+            </a:r>
+            <a:r>
+              <a:rPr lang="en-US" altLang="en-US" dirty="0">
+                <a:solidFill>
+                  <a:srgbClr val="0A0A0A"/>
+                </a:solidFill>
+                <a:latin typeface="Times New Roman" panose="02020603050405020304" pitchFamily="18" charset="0"/>
+                <a:cs typeface="Times New Roman" panose="02020603050405020304" pitchFamily="18" charset="0"/>
+              </a:rPr>
+              <a:t> </a:t>
+            </a:r>
+            <a:r>
+              <a:rPr lang="en-US" altLang="en-US" dirty="0" err="1">
+                <a:solidFill>
+                  <a:srgbClr val="0A0A0A"/>
+                </a:solidFill>
+                <a:latin typeface="Times New Roman" panose="02020603050405020304" pitchFamily="18" charset="0"/>
+                <a:cs typeface="Times New Roman" panose="02020603050405020304" pitchFamily="18" charset="0"/>
+              </a:rPr>
+              <a:t>n'importe</a:t>
+            </a:r>
+            <a:r>
+              <a:rPr lang="en-US" altLang="en-US" dirty="0">
+                <a:solidFill>
+                  <a:srgbClr val="0A0A0A"/>
+                </a:solidFill>
+                <a:latin typeface="Times New Roman" panose="02020603050405020304" pitchFamily="18" charset="0"/>
+                <a:cs typeface="Times New Roman" panose="02020603050405020304" pitchFamily="18" charset="0"/>
+              </a:rPr>
+              <a:t> </a:t>
+            </a:r>
+            <a:r>
+              <a:rPr lang="en-US" altLang="en-US" dirty="0" err="1">
+                <a:solidFill>
+                  <a:srgbClr val="0A0A0A"/>
+                </a:solidFill>
+                <a:latin typeface="Times New Roman" panose="02020603050405020304" pitchFamily="18" charset="0"/>
+                <a:cs typeface="Times New Roman" panose="02020603050405020304" pitchFamily="18" charset="0"/>
+              </a:rPr>
+              <a:t>quel</a:t>
+            </a:r>
+            <a:r>
+              <a:rPr lang="en-US" altLang="en-US" dirty="0">
+                <a:solidFill>
+                  <a:srgbClr val="0A0A0A"/>
+                </a:solidFill>
+                <a:latin typeface="Times New Roman" panose="02020603050405020304" pitchFamily="18" charset="0"/>
+                <a:cs typeface="Times New Roman" panose="02020603050405020304" pitchFamily="18" charset="0"/>
+              </a:rPr>
+              <a:t> objet </a:t>
+            </a:r>
+            <a:r>
+              <a:rPr lang="en-US" altLang="en-US" dirty="0" err="1">
+                <a:solidFill>
+                  <a:srgbClr val="0A0A0A"/>
+                </a:solidFill>
+                <a:latin typeface="Times New Roman" panose="02020603050405020304" pitchFamily="18" charset="0"/>
+                <a:cs typeface="Times New Roman" panose="02020603050405020304" pitchFamily="18" charset="0"/>
+              </a:rPr>
+              <a:t>dans</a:t>
+            </a:r>
+            <a:r>
+              <a:rPr lang="en-US" altLang="en-US" dirty="0">
+                <a:solidFill>
+                  <a:srgbClr val="0A0A0A"/>
+                </a:solidFill>
+                <a:latin typeface="Times New Roman" panose="02020603050405020304" pitchFamily="18" charset="0"/>
+                <a:cs typeface="Times New Roman" panose="02020603050405020304" pitchFamily="18" charset="0"/>
+              </a:rPr>
+              <a:t> </a:t>
+            </a:r>
+            <a:r>
+              <a:rPr lang="en-US" altLang="en-US" dirty="0" err="1">
+                <a:solidFill>
+                  <a:srgbClr val="0A0A0A"/>
+                </a:solidFill>
+                <a:latin typeface="Times New Roman" panose="02020603050405020304" pitchFamily="18" charset="0"/>
+                <a:cs typeface="Times New Roman" panose="02020603050405020304" pitchFamily="18" charset="0"/>
+              </a:rPr>
+              <a:t>une</a:t>
+            </a:r>
+            <a:r>
+              <a:rPr lang="en-US" altLang="en-US" dirty="0">
+                <a:solidFill>
+                  <a:srgbClr val="0A0A0A"/>
+                </a:solidFill>
+                <a:latin typeface="Times New Roman" panose="02020603050405020304" pitchFamily="18" charset="0"/>
+                <a:cs typeface="Times New Roman" panose="02020603050405020304" pitchFamily="18" charset="0"/>
+              </a:rPr>
+              <a:t> </a:t>
+            </a:r>
+            <a:r>
+              <a:rPr lang="en-US" altLang="en-US" dirty="0" err="1">
+                <a:solidFill>
+                  <a:srgbClr val="0A0A0A"/>
+                </a:solidFill>
+                <a:latin typeface="Times New Roman" panose="02020603050405020304" pitchFamily="18" charset="0"/>
+                <a:cs typeface="Times New Roman" panose="02020603050405020304" pitchFamily="18" charset="0"/>
+              </a:rPr>
+              <a:t>liste</a:t>
+            </a:r>
+            <a:r>
+              <a:rPr lang="en-US" altLang="en-US" dirty="0">
+                <a:solidFill>
+                  <a:srgbClr val="0A0A0A"/>
+                </a:solidFill>
+                <a:latin typeface="Times New Roman" panose="02020603050405020304" pitchFamily="18" charset="0"/>
+                <a:cs typeface="Times New Roman" panose="02020603050405020304" pitchFamily="18" charset="0"/>
+              </a:rPr>
+              <a:t>, </a:t>
+            </a:r>
+            <a:r>
+              <a:rPr lang="en-US" altLang="en-US" dirty="0" err="1">
+                <a:solidFill>
+                  <a:srgbClr val="0A0A0A"/>
+                </a:solidFill>
+                <a:latin typeface="Times New Roman" panose="02020603050405020304" pitchFamily="18" charset="0"/>
+                <a:cs typeface="Times New Roman" panose="02020603050405020304" pitchFamily="18" charset="0"/>
+              </a:rPr>
+              <a:t>mais</a:t>
+            </a:r>
+            <a:r>
+              <a:rPr lang="en-US" altLang="en-US" dirty="0">
+                <a:solidFill>
+                  <a:srgbClr val="0A0A0A"/>
+                </a:solidFill>
+                <a:latin typeface="Times New Roman" panose="02020603050405020304" pitchFamily="18" charset="0"/>
+                <a:cs typeface="Times New Roman" panose="02020603050405020304" pitchFamily="18" charset="0"/>
+              </a:rPr>
+              <a:t> </a:t>
+            </a:r>
+            <a:r>
+              <a:rPr lang="en-US" altLang="en-US" dirty="0" err="1">
+                <a:solidFill>
+                  <a:srgbClr val="0A0A0A"/>
+                </a:solidFill>
+                <a:latin typeface="Times New Roman" panose="02020603050405020304" pitchFamily="18" charset="0"/>
+                <a:cs typeface="Times New Roman" panose="02020603050405020304" pitchFamily="18" charset="0"/>
+              </a:rPr>
+              <a:t>il</a:t>
+            </a:r>
+            <a:r>
+              <a:rPr lang="en-US" altLang="en-US" dirty="0">
+                <a:solidFill>
+                  <a:srgbClr val="0A0A0A"/>
+                </a:solidFill>
+                <a:latin typeface="Times New Roman" panose="02020603050405020304" pitchFamily="18" charset="0"/>
+                <a:cs typeface="Times New Roman" panose="02020603050405020304" pitchFamily="18" charset="0"/>
+              </a:rPr>
+              <a:t> </a:t>
+            </a:r>
+            <a:r>
+              <a:rPr lang="en-US" altLang="en-US" dirty="0" err="1">
+                <a:solidFill>
+                  <a:srgbClr val="0A0A0A"/>
+                </a:solidFill>
+                <a:latin typeface="Times New Roman" panose="02020603050405020304" pitchFamily="18" charset="0"/>
+                <a:cs typeface="Times New Roman" panose="02020603050405020304" pitchFamily="18" charset="0"/>
+              </a:rPr>
+              <a:t>fallait</a:t>
+            </a:r>
+            <a:r>
+              <a:rPr lang="en-US" altLang="en-US" dirty="0">
+                <a:solidFill>
+                  <a:srgbClr val="0A0A0A"/>
+                </a:solidFill>
+                <a:latin typeface="Times New Roman" panose="02020603050405020304" pitchFamily="18" charset="0"/>
+                <a:cs typeface="Times New Roman" panose="02020603050405020304" pitchFamily="18" charset="0"/>
+              </a:rPr>
+              <a:t> </a:t>
+            </a:r>
+            <a:r>
+              <a:rPr lang="en-US" altLang="en-US" dirty="0" err="1">
+                <a:solidFill>
+                  <a:srgbClr val="0A0A0A"/>
+                </a:solidFill>
+                <a:latin typeface="Times New Roman" panose="02020603050405020304" pitchFamily="18" charset="0"/>
+                <a:cs typeface="Times New Roman" panose="02020603050405020304" pitchFamily="18" charset="0"/>
+              </a:rPr>
+              <a:t>effectuer</a:t>
+            </a:r>
+            <a:r>
+              <a:rPr lang="en-US" altLang="en-US" dirty="0">
+                <a:solidFill>
+                  <a:srgbClr val="0A0A0A"/>
+                </a:solidFill>
+                <a:latin typeface="Times New Roman" panose="02020603050405020304" pitchFamily="18" charset="0"/>
+                <a:cs typeface="Times New Roman" panose="02020603050405020304" pitchFamily="18" charset="0"/>
+              </a:rPr>
+              <a:t> un </a:t>
+            </a:r>
+            <a:r>
+              <a:rPr lang="en-US" altLang="en-US" b="1" dirty="0">
+                <a:solidFill>
+                  <a:srgbClr val="0A0A0A"/>
+                </a:solidFill>
+                <a:latin typeface="Times New Roman" panose="02020603050405020304" pitchFamily="18" charset="0"/>
+                <a:cs typeface="Times New Roman" panose="02020603050405020304" pitchFamily="18" charset="0"/>
+              </a:rPr>
+              <a:t>"cast" </a:t>
+            </a:r>
+            <a:r>
+              <a:rPr lang="en-US" altLang="en-US" dirty="0" err="1">
+                <a:solidFill>
+                  <a:srgbClr val="0A0A0A"/>
+                </a:solidFill>
+                <a:latin typeface="Times New Roman" panose="02020603050405020304" pitchFamily="18" charset="0"/>
+                <a:cs typeface="Times New Roman" panose="02020603050405020304" pitchFamily="18" charset="0"/>
+              </a:rPr>
+              <a:t>manuel</a:t>
+            </a:r>
+            <a:r>
+              <a:rPr lang="en-US" altLang="en-US" dirty="0">
+                <a:solidFill>
+                  <a:srgbClr val="0A0A0A"/>
+                </a:solidFill>
+                <a:latin typeface="Times New Roman" panose="02020603050405020304" pitchFamily="18" charset="0"/>
+                <a:cs typeface="Times New Roman" panose="02020603050405020304" pitchFamily="18" charset="0"/>
+              </a:rPr>
+              <a:t> à </a:t>
+            </a:r>
+            <a:r>
+              <a:rPr lang="en-US" altLang="en-US" dirty="0" err="1">
+                <a:solidFill>
+                  <a:srgbClr val="0A0A0A"/>
+                </a:solidFill>
+                <a:latin typeface="Times New Roman" panose="02020603050405020304" pitchFamily="18" charset="0"/>
+                <a:cs typeface="Times New Roman" panose="02020603050405020304" pitchFamily="18" charset="0"/>
+              </a:rPr>
+              <a:t>chaque</a:t>
+            </a:r>
+            <a:r>
+              <a:rPr lang="en-US" altLang="en-US" dirty="0">
+                <a:solidFill>
+                  <a:srgbClr val="0A0A0A"/>
+                </a:solidFill>
+                <a:latin typeface="Times New Roman" panose="02020603050405020304" pitchFamily="18" charset="0"/>
+                <a:cs typeface="Times New Roman" panose="02020603050405020304" pitchFamily="18" charset="0"/>
+              </a:rPr>
+              <a:t> </a:t>
+            </a:r>
+            <a:r>
+              <a:rPr lang="en-US" altLang="en-US" dirty="0" err="1">
+                <a:solidFill>
+                  <a:srgbClr val="0A0A0A"/>
+                </a:solidFill>
+                <a:latin typeface="Times New Roman" panose="02020603050405020304" pitchFamily="18" charset="0"/>
+                <a:cs typeface="Times New Roman" panose="02020603050405020304" pitchFamily="18" charset="0"/>
+              </a:rPr>
+              <a:t>fois</a:t>
+            </a:r>
+            <a:r>
+              <a:rPr lang="en-US" altLang="en-US" dirty="0">
+                <a:solidFill>
+                  <a:srgbClr val="0A0A0A"/>
+                </a:solidFill>
+                <a:latin typeface="Times New Roman" panose="02020603050405020304" pitchFamily="18" charset="0"/>
+                <a:cs typeface="Times New Roman" panose="02020603050405020304" pitchFamily="18" charset="0"/>
+              </a:rPr>
+              <a:t> </a:t>
+            </a:r>
+            <a:r>
+              <a:rPr lang="en-US" altLang="en-US" dirty="0" err="1">
+                <a:solidFill>
+                  <a:srgbClr val="0A0A0A"/>
+                </a:solidFill>
+                <a:latin typeface="Times New Roman" panose="02020603050405020304" pitchFamily="18" charset="0"/>
+                <a:cs typeface="Times New Roman" panose="02020603050405020304" pitchFamily="18" charset="0"/>
+              </a:rPr>
+              <a:t>qu'on</a:t>
+            </a:r>
+            <a:r>
+              <a:rPr lang="en-US" altLang="en-US" dirty="0">
+                <a:solidFill>
+                  <a:srgbClr val="0A0A0A"/>
+                </a:solidFill>
+                <a:latin typeface="Times New Roman" panose="02020603050405020304" pitchFamily="18" charset="0"/>
+                <a:cs typeface="Times New Roman" panose="02020603050405020304" pitchFamily="18" charset="0"/>
+              </a:rPr>
+              <a:t> </a:t>
+            </a:r>
+            <a:r>
+              <a:rPr lang="en-US" altLang="en-US" dirty="0" err="1" smtClean="0">
+                <a:solidFill>
+                  <a:srgbClr val="0A0A0A"/>
+                </a:solidFill>
+                <a:latin typeface="Times New Roman" panose="02020603050405020304" pitchFamily="18" charset="0"/>
+                <a:cs typeface="Times New Roman" panose="02020603050405020304" pitchFamily="18" charset="0"/>
+              </a:rPr>
+              <a:t>veut</a:t>
+            </a:r>
+            <a:r>
+              <a:rPr lang="en-US" altLang="en-US" dirty="0" smtClean="0">
+                <a:solidFill>
+                  <a:srgbClr val="0A0A0A"/>
+                </a:solidFill>
+                <a:latin typeface="Times New Roman" panose="02020603050405020304" pitchFamily="18" charset="0"/>
+                <a:cs typeface="Times New Roman" panose="02020603050405020304" pitchFamily="18" charset="0"/>
+              </a:rPr>
+              <a:t> </a:t>
+            </a:r>
+            <a:r>
+              <a:rPr lang="en-US" altLang="en-US" dirty="0" err="1" smtClean="0">
+                <a:solidFill>
+                  <a:srgbClr val="0A0A0A"/>
+                </a:solidFill>
+                <a:latin typeface="Times New Roman" panose="02020603050405020304" pitchFamily="18" charset="0"/>
+                <a:cs typeface="Times New Roman" panose="02020603050405020304" pitchFamily="18" charset="0"/>
+              </a:rPr>
+              <a:t>récupérer</a:t>
+            </a:r>
+            <a:r>
+              <a:rPr lang="en-US" altLang="en-US" dirty="0" smtClean="0">
+                <a:solidFill>
+                  <a:srgbClr val="0A0A0A"/>
+                </a:solidFill>
+                <a:latin typeface="Times New Roman" panose="02020603050405020304" pitchFamily="18" charset="0"/>
+                <a:cs typeface="Times New Roman" panose="02020603050405020304" pitchFamily="18" charset="0"/>
+              </a:rPr>
+              <a:t> un </a:t>
+            </a:r>
+            <a:r>
+              <a:rPr lang="en-US" altLang="en-US" dirty="0" err="1" smtClean="0">
+                <a:solidFill>
+                  <a:srgbClr val="0A0A0A"/>
+                </a:solidFill>
+                <a:latin typeface="Times New Roman" panose="02020603050405020304" pitchFamily="18" charset="0"/>
+                <a:cs typeface="Times New Roman" panose="02020603050405020304" pitchFamily="18" charset="0"/>
+              </a:rPr>
+              <a:t>élément</a:t>
+            </a:r>
+            <a:r>
+              <a:rPr lang="en-US" altLang="en-US" dirty="0" smtClean="0">
+                <a:solidFill>
+                  <a:srgbClr val="0A0A0A"/>
+                </a:solidFill>
+                <a:latin typeface="Times New Roman" panose="02020603050405020304" pitchFamily="18" charset="0"/>
+                <a:cs typeface="Times New Roman" panose="02020603050405020304" pitchFamily="18" charset="0"/>
+              </a:rPr>
+              <a:t>.</a:t>
+            </a:r>
+            <a:endParaRPr lang="en-US" altLang="en-US" b="1" dirty="0">
               <a:solidFill>
                 <a:srgbClr val="0A0A0A"/>
               </a:solidFill>
@@ -22355,283 +23047,7 @@
           </a:p>
           <a:p>
             <a:pPr lvl="0" eaLnBrk="0" hangingPunct="0"/>
-            <a:r>
-              <a:rPr lang="en-US" altLang="en-US" b="1" dirty="0" smtClean="0">
-                <a:solidFill>
-                  <a:srgbClr val="0A0A0A"/>
-                </a:solidFill>
-                <a:latin typeface="Times New Roman" panose="02020603050405020304" pitchFamily="18" charset="0"/>
-                <a:cs typeface="Times New Roman" panose="02020603050405020304" pitchFamily="18" charset="0"/>
-              </a:rPr>
-              <a:t>Le </a:t>
-            </a:r>
-            <a:r>
-              <a:rPr lang="en-US" altLang="en-US" b="1" dirty="0">
-                <a:solidFill>
-                  <a:srgbClr val="0A0A0A"/>
-                </a:solidFill>
-                <a:latin typeface="Times New Roman" panose="02020603050405020304" pitchFamily="18" charset="0"/>
-                <a:cs typeface="Times New Roman" panose="02020603050405020304" pitchFamily="18" charset="0"/>
-              </a:rPr>
-              <a:t>Java Collections Framework (JCF)</a:t>
-            </a:r>
-            <a:r>
-              <a:rPr lang="en-US" altLang="en-US" dirty="0">
-                <a:solidFill>
-                  <a:srgbClr val="0A0A0A"/>
-                </a:solidFill>
-                <a:latin typeface="Times New Roman" panose="02020603050405020304" pitchFamily="18" charset="0"/>
-                <a:cs typeface="Times New Roman" panose="02020603050405020304" pitchFamily="18" charset="0"/>
-              </a:rPr>
-              <a:t> : </a:t>
-            </a:r>
-            <a:r>
-              <a:rPr lang="en-US" altLang="en-US" dirty="0" err="1">
-                <a:solidFill>
-                  <a:srgbClr val="0A0A0A"/>
-                </a:solidFill>
-                <a:latin typeface="Times New Roman" panose="02020603050405020304" pitchFamily="18" charset="0"/>
-                <a:cs typeface="Times New Roman" panose="02020603050405020304" pitchFamily="18" charset="0"/>
-              </a:rPr>
-              <a:t>Introduit</a:t>
-            </a:r>
-            <a:r>
-              <a:rPr lang="en-US" altLang="en-US" dirty="0">
-                <a:solidFill>
-                  <a:srgbClr val="0A0A0A"/>
-                </a:solidFill>
-                <a:latin typeface="Times New Roman" panose="02020603050405020304" pitchFamily="18" charset="0"/>
-                <a:cs typeface="Times New Roman" panose="02020603050405020304" pitchFamily="18" charset="0"/>
-              </a:rPr>
-              <a:t> </a:t>
-            </a:r>
-            <a:r>
-              <a:rPr lang="en-US" altLang="en-US" dirty="0" err="1">
-                <a:solidFill>
-                  <a:srgbClr val="0A0A0A"/>
-                </a:solidFill>
-                <a:latin typeface="Times New Roman" panose="02020603050405020304" pitchFamily="18" charset="0"/>
-                <a:cs typeface="Times New Roman" panose="02020603050405020304" pitchFamily="18" charset="0"/>
-              </a:rPr>
-              <a:t>en</a:t>
-            </a:r>
-            <a:r>
-              <a:rPr lang="en-US" altLang="en-US" dirty="0">
-                <a:solidFill>
-                  <a:srgbClr val="0A0A0A"/>
-                </a:solidFill>
-                <a:latin typeface="Times New Roman" panose="02020603050405020304" pitchFamily="18" charset="0"/>
-                <a:cs typeface="Times New Roman" panose="02020603050405020304" pitchFamily="18" charset="0"/>
-              </a:rPr>
-              <a:t> </a:t>
-            </a:r>
-            <a:r>
-              <a:rPr lang="en-US" altLang="en-US" b="1" dirty="0">
-                <a:solidFill>
-                  <a:srgbClr val="0A0A0A"/>
-                </a:solidFill>
-                <a:latin typeface="Times New Roman" panose="02020603050405020304" pitchFamily="18" charset="0"/>
-                <a:cs typeface="Times New Roman" panose="02020603050405020304" pitchFamily="18" charset="0"/>
-              </a:rPr>
-              <a:t>1998</a:t>
-            </a:r>
-            <a:r>
-              <a:rPr lang="en-US" altLang="en-US" dirty="0">
-                <a:solidFill>
-                  <a:srgbClr val="0A0A0A"/>
-                </a:solidFill>
-                <a:latin typeface="Times New Roman" panose="02020603050405020304" pitchFamily="18" charset="0"/>
-                <a:cs typeface="Times New Roman" panose="02020603050405020304" pitchFamily="18" charset="0"/>
-              </a:rPr>
-              <a:t> avec </a:t>
-            </a:r>
-            <a:r>
-              <a:rPr lang="en-US" altLang="en-US" b="1" dirty="0">
-                <a:solidFill>
-                  <a:srgbClr val="0A0A0A"/>
-                </a:solidFill>
-                <a:latin typeface="Times New Roman" panose="02020603050405020304" pitchFamily="18" charset="0"/>
-                <a:cs typeface="Times New Roman" panose="02020603050405020304" pitchFamily="18" charset="0"/>
-              </a:rPr>
-              <a:t>Java 2 (JDK 1.2)</a:t>
-            </a:r>
-            <a:r>
-              <a:rPr lang="en-US" altLang="en-US" dirty="0">
-                <a:solidFill>
-                  <a:srgbClr val="0A0A0A"/>
-                </a:solidFill>
-                <a:latin typeface="Times New Roman" panose="02020603050405020304" pitchFamily="18" charset="0"/>
-                <a:cs typeface="Times New Roman" panose="02020603050405020304" pitchFamily="18" charset="0"/>
-              </a:rPr>
-              <a:t>. </a:t>
-            </a:r>
-            <a:r>
-              <a:rPr lang="en-US" altLang="en-US" dirty="0" err="1">
-                <a:solidFill>
-                  <a:srgbClr val="0A0A0A"/>
-                </a:solidFill>
-                <a:latin typeface="Times New Roman" panose="02020603050405020304" pitchFamily="18" charset="0"/>
-                <a:cs typeface="Times New Roman" panose="02020603050405020304" pitchFamily="18" charset="0"/>
-              </a:rPr>
-              <a:t>C'est</a:t>
-            </a:r>
-            <a:r>
-              <a:rPr lang="en-US" altLang="en-US" dirty="0">
-                <a:solidFill>
-                  <a:srgbClr val="0A0A0A"/>
-                </a:solidFill>
-                <a:latin typeface="Times New Roman" panose="02020603050405020304" pitchFamily="18" charset="0"/>
-                <a:cs typeface="Times New Roman" panose="02020603050405020304" pitchFamily="18" charset="0"/>
-              </a:rPr>
-              <a:t> à </a:t>
-            </a:r>
-            <a:r>
-              <a:rPr lang="en-US" altLang="en-US" dirty="0" err="1">
-                <a:solidFill>
-                  <a:srgbClr val="0A0A0A"/>
-                </a:solidFill>
-                <a:latin typeface="Times New Roman" panose="02020603050405020304" pitchFamily="18" charset="0"/>
-                <a:cs typeface="Times New Roman" panose="02020603050405020304" pitchFamily="18" charset="0"/>
-              </a:rPr>
-              <a:t>ce</a:t>
-            </a:r>
-            <a:r>
-              <a:rPr lang="en-US" altLang="en-US" dirty="0">
-                <a:solidFill>
-                  <a:srgbClr val="0A0A0A"/>
-                </a:solidFill>
-                <a:latin typeface="Times New Roman" panose="02020603050405020304" pitchFamily="18" charset="0"/>
-                <a:cs typeface="Times New Roman" panose="02020603050405020304" pitchFamily="18" charset="0"/>
-              </a:rPr>
-              <a:t> moment-</a:t>
-            </a:r>
-            <a:r>
-              <a:rPr lang="en-US" altLang="en-US" dirty="0" err="1">
-                <a:solidFill>
-                  <a:srgbClr val="0A0A0A"/>
-                </a:solidFill>
-                <a:latin typeface="Times New Roman" panose="02020603050405020304" pitchFamily="18" charset="0"/>
-                <a:cs typeface="Times New Roman" panose="02020603050405020304" pitchFamily="18" charset="0"/>
-              </a:rPr>
-              <a:t>là</a:t>
-            </a:r>
-            <a:r>
-              <a:rPr lang="en-US" altLang="en-US" dirty="0">
-                <a:solidFill>
-                  <a:srgbClr val="0A0A0A"/>
-                </a:solidFill>
-                <a:latin typeface="Times New Roman" panose="02020603050405020304" pitchFamily="18" charset="0"/>
-                <a:cs typeface="Times New Roman" panose="02020603050405020304" pitchFamily="18" charset="0"/>
-              </a:rPr>
-              <a:t> </a:t>
-            </a:r>
-            <a:r>
-              <a:rPr lang="en-US" altLang="en-US" dirty="0" err="1">
-                <a:solidFill>
-                  <a:srgbClr val="0A0A0A"/>
-                </a:solidFill>
-                <a:latin typeface="Times New Roman" panose="02020603050405020304" pitchFamily="18" charset="0"/>
-                <a:cs typeface="Times New Roman" panose="02020603050405020304" pitchFamily="18" charset="0"/>
-              </a:rPr>
-              <a:t>qu'apparaissent</a:t>
-            </a:r>
-            <a:r>
-              <a:rPr lang="en-US" altLang="en-US" dirty="0">
-                <a:solidFill>
-                  <a:srgbClr val="0A0A0A"/>
-                </a:solidFill>
-                <a:latin typeface="Times New Roman" panose="02020603050405020304" pitchFamily="18" charset="0"/>
-                <a:cs typeface="Times New Roman" panose="02020603050405020304" pitchFamily="18" charset="0"/>
-              </a:rPr>
-              <a:t> les interfaces List, Set, Map et les classes </a:t>
-            </a:r>
-            <a:r>
-              <a:rPr lang="en-US" altLang="en-US" dirty="0" err="1">
-                <a:solidFill>
-                  <a:srgbClr val="0A0A0A"/>
-                </a:solidFill>
-                <a:latin typeface="Times New Roman" panose="02020603050405020304" pitchFamily="18" charset="0"/>
-                <a:cs typeface="Times New Roman" panose="02020603050405020304" pitchFamily="18" charset="0"/>
-              </a:rPr>
-              <a:t>comme</a:t>
-            </a:r>
-            <a:r>
-              <a:rPr lang="en-US" altLang="en-US" dirty="0">
-                <a:solidFill>
-                  <a:srgbClr val="0A0A0A"/>
-                </a:solidFill>
-                <a:latin typeface="Times New Roman" panose="02020603050405020304" pitchFamily="18" charset="0"/>
-                <a:cs typeface="Times New Roman" panose="02020603050405020304" pitchFamily="18" charset="0"/>
-              </a:rPr>
-              <a:t> </a:t>
-            </a:r>
-            <a:r>
-              <a:rPr lang="en-US" altLang="en-US" dirty="0" err="1">
-                <a:solidFill>
-                  <a:srgbClr val="0A0A0A"/>
-                </a:solidFill>
-                <a:latin typeface="Times New Roman" panose="02020603050405020304" pitchFamily="18" charset="0"/>
-                <a:cs typeface="Times New Roman" panose="02020603050405020304" pitchFamily="18" charset="0"/>
-              </a:rPr>
-              <a:t>ArrayList</a:t>
-            </a:r>
-            <a:r>
-              <a:rPr lang="en-US" altLang="en-US" dirty="0">
-                <a:solidFill>
-                  <a:srgbClr val="0A0A0A"/>
-                </a:solidFill>
-                <a:latin typeface="Times New Roman" panose="02020603050405020304" pitchFamily="18" charset="0"/>
-                <a:cs typeface="Times New Roman" panose="02020603050405020304" pitchFamily="18" charset="0"/>
-              </a:rPr>
-              <a:t> </a:t>
-            </a:r>
-            <a:r>
-              <a:rPr lang="en-US" altLang="en-US" dirty="0" err="1">
-                <a:solidFill>
-                  <a:srgbClr val="0A0A0A"/>
-                </a:solidFill>
-                <a:latin typeface="Times New Roman" panose="02020603050405020304" pitchFamily="18" charset="0"/>
-                <a:cs typeface="Times New Roman" panose="02020603050405020304" pitchFamily="18" charset="0"/>
-              </a:rPr>
-              <a:t>ou</a:t>
-            </a:r>
-            <a:r>
-              <a:rPr lang="en-US" altLang="en-US" dirty="0">
-                <a:solidFill>
-                  <a:srgbClr val="0A0A0A"/>
-                </a:solidFill>
-                <a:latin typeface="Times New Roman" panose="02020603050405020304" pitchFamily="18" charset="0"/>
-                <a:cs typeface="Times New Roman" panose="02020603050405020304" pitchFamily="18" charset="0"/>
-              </a:rPr>
-              <a:t> </a:t>
-            </a:r>
-            <a:r>
-              <a:rPr lang="en-US" altLang="en-US" dirty="0" err="1">
-                <a:solidFill>
-                  <a:srgbClr val="0A0A0A"/>
-                </a:solidFill>
-                <a:latin typeface="Times New Roman" panose="02020603050405020304" pitchFamily="18" charset="0"/>
-                <a:cs typeface="Times New Roman" panose="02020603050405020304" pitchFamily="18" charset="0"/>
-              </a:rPr>
-              <a:t>HashMap</a:t>
-            </a:r>
-            <a:r>
-              <a:rPr lang="en-US" altLang="en-US" dirty="0">
-                <a:solidFill>
-                  <a:srgbClr val="0A0A0A"/>
-                </a:solidFill>
-                <a:latin typeface="Times New Roman" panose="02020603050405020304" pitchFamily="18" charset="0"/>
-                <a:cs typeface="Times New Roman" panose="02020603050405020304" pitchFamily="18" charset="0"/>
-              </a:rPr>
-              <a:t>.</a:t>
-            </a:r>
-          </a:p>
-          <a:p>
-            <a:pPr lvl="0" eaLnBrk="0" hangingPunct="0">
-              <a:buFontTx/>
-              <a:buAutoNum type="arabicPeriod"/>
-            </a:pPr>
-            <a:endParaRPr lang="en-US" altLang="en-US" dirty="0">
+            <a:endParaRPr lang="en-US" altLang="en-US" b="1" dirty="0" smtClean="0">
               <a:solidFill>
                 <a:srgbClr val="0A0A0A"/>
               </a:solidFill>
@@ -22806,17 +23222,19 @@
                 <a:ea typeface="Consolas" pitchFamily="34" charset="-122"/>
                 <a:cs typeface="Times New Roman" panose="02020603050405020304" pitchFamily="18" charset="0"/>
               </a:rPr>
-              <a:t>String s = (String) liste.get(0);</a:t>
-            </a:r>
-            <a:endParaRPr lang="en-US" sz="1400" dirty="0">
-              <a:latin typeface="Times New Roman" panose="02020603050405020304" pitchFamily="18" charset="0"/>
-              <a:cs typeface="Times New Roman" panose="02020603050405020304" pitchFamily="18" charset="0"/>
-            </a:endParaRPr>
-          </a:p>
-          <a:p>
-            <a:pPr marL="0" indent="0">
-              <a:buNone/>
-            </a:pPr>
+              <a:t>String s = (String) </a:t>
+            </a:r>
+            <a:r>
+              <a:rPr lang="en-US" sz="1400" dirty="0" err="1">
+                <a:solidFill>
+                  <a:srgbClr val="7DD3FC"/>
+                </a:solidFill>
+                <a:latin typeface="Times New Roman" panose="02020603050405020304" pitchFamily="18" charset="0"/>
+                <a:ea typeface="Consolas" pitchFamily="34" charset="-122"/>
+                <a:cs typeface="Times New Roman" panose="02020603050405020304" pitchFamily="18" charset="0"/>
+              </a:rPr>
+              <a:t>liste.get</a:t>
+            </a:r>
             <a:r>
               <a:rPr lang="en-US" sz="1400" dirty="0">
                 <a:solidFill>
@@ -22826,7 +23244,18 @@
                 <a:ea typeface="Consolas" pitchFamily="34" charset="-122"/>
                 <a:cs typeface="Times New Roman" panose="02020603050405020304" pitchFamily="18" charset="0"/>
               </a:rPr>
-              <a:t>// ⚠️ ClassCastException possible !</a:t>
+              <a:t>(0</a:t>
+            </a:r>
+            <a:r>
+              <a:rPr lang="en-US" sz="1400" dirty="0" smtClean="0">
+                <a:solidFill>
+                  <a:srgbClr val="7DD3FC"/>
+                </a:solidFill>
+                <a:latin typeface="Times New Roman" panose="02020603050405020304" pitchFamily="18" charset="0"/>
+                <a:ea typeface="Consolas" pitchFamily="34" charset="-122"/>
+                <a:cs typeface="Times New Roman" panose="02020603050405020304" pitchFamily="18" charset="0"/>
+              </a:rPr>
+              <a:t>);</a:t>
             </a:r>
             <a:endParaRPr lang="en-US" sz="1400" dirty="0">
               <a:latin typeface="Times New Roman" panose="02020603050405020304" pitchFamily="18" charset="0"/>
@@ -28330,13 +28759,6 @@
               <a:t>Collection = </a:t>
             </a:r>
             <a:r>
-              <a:rPr lang="en-US" sz="1600" dirty="0" err="1" smtClean="0">
-                <a:latin typeface="Times New Roman" panose="02020603050405020304" pitchFamily="18" charset="0"/>
-                <a:cs typeface="Times New Roman" panose="02020603050405020304" pitchFamily="18" charset="0"/>
-              </a:rPr>
-              <a:t>est</a:t>
-            </a:r>
-            <a:r>
               <a:rPr lang="en-US" sz="1600" dirty="0" smtClean="0">
                 <a:latin typeface="Times New Roman" panose="02020603050405020304" pitchFamily="18" charset="0"/>
                 <a:cs typeface="Times New Roman" panose="02020603050405020304" pitchFamily="18" charset="0"/>
@@ -28348,7 +28770,7 @@
                 <a:latin typeface="Times New Roman" panose="02020603050405020304" pitchFamily="18" charset="0"/>
                 <a:cs typeface="Times New Roman" panose="02020603050405020304" pitchFamily="18" charset="0"/>
               </a:rPr>
-              <a:t>comme une boîte fixe : tu dois décider la taille à l'avance. Une Collection, c'est comme un sac à </a:t>
+              <a:t>une boîte fixe : tu dois décider la taille à l'avance. Une Collection, c'est comme un sac à </a:t>
             </a:r>
             <a:r>
               <a:rPr lang="en-US" sz="1600" dirty="0" smtClean="0">
